--- a/Cross-Domain_final.pptx
+++ b/Cross-Domain_final.pptx
@@ -13,14 +13,18 @@
     <p:sldId id="310" r:id="rId7"/>
     <p:sldId id="279" r:id="rId8"/>
     <p:sldId id="312" r:id="rId9"/>
-    <p:sldId id="308" r:id="rId10"/>
-    <p:sldId id="335" r:id="rId11"/>
-    <p:sldId id="322" r:id="rId12"/>
-    <p:sldId id="324" r:id="rId13"/>
-    <p:sldId id="336" r:id="rId14"/>
-    <p:sldId id="314" r:id="rId15"/>
-    <p:sldId id="338" r:id="rId16"/>
-    <p:sldId id="329" r:id="rId17"/>
+    <p:sldId id="343" r:id="rId10"/>
+    <p:sldId id="349" r:id="rId11"/>
+    <p:sldId id="341" r:id="rId12"/>
+    <p:sldId id="347" r:id="rId13"/>
+    <p:sldId id="308" r:id="rId14"/>
+    <p:sldId id="335" r:id="rId15"/>
+    <p:sldId id="322" r:id="rId16"/>
+    <p:sldId id="324" r:id="rId17"/>
+    <p:sldId id="336" r:id="rId18"/>
+    <p:sldId id="314" r:id="rId19"/>
+    <p:sldId id="338" r:id="rId20"/>
+    <p:sldId id="329" r:id="rId21"/>
   </p:sldIdLst>
   <p:sldSz cx="12192000" cy="6858000"/>
   <p:notesSz cx="6858000" cy="9144000"/>
@@ -276,7 +280,7 @@
           <a:p>
             <a:fld id="{B31E7A42-2043-4A4B-A4B3-A0342796380B}" type="datetimeFigureOut">
               <a:rPr lang="en-IL" smtClean="0"/>
-              <a:t>09/06/2026</a:t>
+              <a:t>10/06/2026</a:t>
             </a:fld>
             <a:endParaRPr lang="en-IL"/>
           </a:p>
@@ -476,7 +480,7 @@
           <a:p>
             <a:fld id="{B31E7A42-2043-4A4B-A4B3-A0342796380B}" type="datetimeFigureOut">
               <a:rPr lang="en-IL" smtClean="0"/>
-              <a:t>09/06/2026</a:t>
+              <a:t>10/06/2026</a:t>
             </a:fld>
             <a:endParaRPr lang="en-IL"/>
           </a:p>
@@ -686,7 +690,7 @@
           <a:p>
             <a:fld id="{B31E7A42-2043-4A4B-A4B3-A0342796380B}" type="datetimeFigureOut">
               <a:rPr lang="en-IL" smtClean="0"/>
-              <a:t>09/06/2026</a:t>
+              <a:t>10/06/2026</a:t>
             </a:fld>
             <a:endParaRPr lang="en-IL"/>
           </a:p>
@@ -886,7 +890,7 @@
           <a:p>
             <a:fld id="{B31E7A42-2043-4A4B-A4B3-A0342796380B}" type="datetimeFigureOut">
               <a:rPr lang="en-IL" smtClean="0"/>
-              <a:t>09/06/2026</a:t>
+              <a:t>10/06/2026</a:t>
             </a:fld>
             <a:endParaRPr lang="en-IL"/>
           </a:p>
@@ -1162,7 +1166,7 @@
           <a:p>
             <a:fld id="{B31E7A42-2043-4A4B-A4B3-A0342796380B}" type="datetimeFigureOut">
               <a:rPr lang="en-IL" smtClean="0"/>
-              <a:t>09/06/2026</a:t>
+              <a:t>10/06/2026</a:t>
             </a:fld>
             <a:endParaRPr lang="en-IL"/>
           </a:p>
@@ -1430,7 +1434,7 @@
           <a:p>
             <a:fld id="{B31E7A42-2043-4A4B-A4B3-A0342796380B}" type="datetimeFigureOut">
               <a:rPr lang="en-IL" smtClean="0"/>
-              <a:t>09/06/2026</a:t>
+              <a:t>10/06/2026</a:t>
             </a:fld>
             <a:endParaRPr lang="en-IL"/>
           </a:p>
@@ -1845,7 +1849,7 @@
           <a:p>
             <a:fld id="{B31E7A42-2043-4A4B-A4B3-A0342796380B}" type="datetimeFigureOut">
               <a:rPr lang="en-IL" smtClean="0"/>
-              <a:t>09/06/2026</a:t>
+              <a:t>10/06/2026</a:t>
             </a:fld>
             <a:endParaRPr lang="en-IL"/>
           </a:p>
@@ -1987,7 +1991,7 @@
           <a:p>
             <a:fld id="{B31E7A42-2043-4A4B-A4B3-A0342796380B}" type="datetimeFigureOut">
               <a:rPr lang="en-IL" smtClean="0"/>
-              <a:t>09/06/2026</a:t>
+              <a:t>10/06/2026</a:t>
             </a:fld>
             <a:endParaRPr lang="en-IL"/>
           </a:p>
@@ -2100,7 +2104,7 @@
           <a:p>
             <a:fld id="{B31E7A42-2043-4A4B-A4B3-A0342796380B}" type="datetimeFigureOut">
               <a:rPr lang="en-IL" smtClean="0"/>
-              <a:t>09/06/2026</a:t>
+              <a:t>10/06/2026</a:t>
             </a:fld>
             <a:endParaRPr lang="en-IL"/>
           </a:p>
@@ -2413,7 +2417,7 @@
           <a:p>
             <a:fld id="{B31E7A42-2043-4A4B-A4B3-A0342796380B}" type="datetimeFigureOut">
               <a:rPr lang="en-IL" smtClean="0"/>
-              <a:t>09/06/2026</a:t>
+              <a:t>10/06/2026</a:t>
             </a:fld>
             <a:endParaRPr lang="en-IL"/>
           </a:p>
@@ -2702,7 +2706,7 @@
           <a:p>
             <a:fld id="{B31E7A42-2043-4A4B-A4B3-A0342796380B}" type="datetimeFigureOut">
               <a:rPr lang="en-IL" smtClean="0"/>
-              <a:t>09/06/2026</a:t>
+              <a:t>10/06/2026</a:t>
             </a:fld>
             <a:endParaRPr lang="en-IL"/>
           </a:p>
@@ -2948,7 +2952,7 @@
           <a:p>
             <a:fld id="{B31E7A42-2043-4A4B-A4B3-A0342796380B}" type="datetimeFigureOut">
               <a:rPr lang="en-IL" smtClean="0"/>
-              <a:t>09/06/2026</a:t>
+              <a:t>10/06/2026</a:t>
             </a:fld>
             <a:endParaRPr lang="en-IL"/>
           </a:p>
@@ -3540,33 +3544,59 @@
             <p:ph type="title"/>
           </p:nvPr>
         </p:nvSpPr>
-        <p:spPr/>
-        <p:txBody>
-          <a:bodyPr/>
-          <a:lstStyle/>
-          <a:p>
-            <a:r>
-              <a:rPr lang="en-US"/>
-              <a:t>Our solution: EMCDR shared latent space</a:t>
-            </a:r>
-            <a:endParaRPr lang="en-IL"/>
-          </a:p>
-        </p:txBody>
-      </p:sp>
-      <p:sp>
-        <p:nvSpPr>
-          <p:cNvPr id="501" name="C501"/>
+        <p:spPr>
+          <a:xfrm>
+            <a:off x="762000" y="485670"/>
+            <a:ext cx="10668000" cy="1016000"/>
+          </a:xfrm>
+        </p:spPr>
+        <p:txBody>
+          <a:bodyPr anchor="t" anchorCtr="0">
+            <a:normAutofit/>
+          </a:bodyPr>
+          <a:lstStyle/>
+          <a:p>
+            <a:pPr>
+              <a:buNone/>
+            </a:pPr>
+            <a:r>
+              <a:rPr lang="en-US" sz="1300" b="1" dirty="0">
+                <a:solidFill>
+                  <a:srgbClr val="6C3BFF"/>
+                </a:solidFill>
+              </a:rPr>
+              <a:t>BENCHMARKING  ·  BASELINES</a:t>
+            </a:r>
+          </a:p>
+          <a:p>
+            <a:pPr>
+              <a:buNone/>
+            </a:pPr>
+            <a:r>
+              <a:rPr lang="en-US" sz="2800" b="1" dirty="0">
+                <a:solidFill>
+                  <a:srgbClr val="12101A"/>
+                </a:solidFill>
+              </a:rPr>
+              <a:t>What each baseline model is</a:t>
+            </a:r>
+          </a:p>
+        </p:txBody>
+      </p:sp>
+      <p:sp>
+        <p:nvSpPr>
+          <p:cNvPr id="801" name="cRandom"/>
           <p:cNvSpPr/>
           <p:nvPr/>
         </p:nvSpPr>
         <p:spPr>
           <a:xfrm>
-            <a:off x="1524000" y="2133600"/>
-            <a:ext cx="2946400" cy="1879600"/>
+            <a:off x="762000" y="1854200"/>
+            <a:ext cx="2514600" cy="2006600"/>
           </a:xfrm>
           <a:prstGeom prst="roundRect">
             <a:avLst>
-              <a:gd name="adj" fmla="val 7000"/>
+              <a:gd name="adj" fmla="val 8000"/>
             </a:avLst>
           </a:prstGeom>
           <a:solidFill>
@@ -3577,105 +3607,46 @@
           </a:ln>
         </p:spPr>
         <p:txBody>
-          <a:bodyPr/>
-          <a:lstStyle/>
-          <a:p>
-            <a:endParaRPr/>
-          </a:p>
-        </p:txBody>
-      </p:sp>
-      <p:sp>
-        <p:nvSpPr>
-          <p:cNvPr id="502" name="B502"/>
-          <p:cNvSpPr/>
-          <p:nvPr/>
-        </p:nvSpPr>
-        <p:spPr>
-          <a:xfrm>
-            <a:off x="1727200" y="2336800"/>
-            <a:ext cx="431800" cy="431800"/>
-          </a:xfrm>
-          <a:prstGeom prst="ellipse">
-            <a:avLst/>
-          </a:prstGeom>
-          <a:solidFill>
-            <a:srgbClr val="6C3BFF"/>
-          </a:solidFill>
-          <a:ln>
-            <a:noFill/>
-          </a:ln>
-        </p:spPr>
-        <p:txBody>
-          <a:bodyPr wrap="none" lIns="0" tIns="0" rIns="0" bIns="0" anchor="ctr" anchorCtr="1"/>
-          <a:lstStyle/>
-          <a:p>
-            <a:pPr algn="ctr"/>
+          <a:bodyPr wrap="square" lIns="114300" tIns="100584" rIns="100584" bIns="91440" anchor="t"/>
+          <a:lstStyle/>
+          <a:p>
+            <a:pPr>
+              <a:buNone/>
+            </a:pPr>
+            <a:r>
+              <a:rPr lang="en-US" sz="900" b="1" spc="60" dirty="0">
+                <a:solidFill>
+                  <a:srgbClr val="6E6A85"/>
+                </a:solidFill>
+              </a:rPr>
+              <a:t>FLOOR</a:t>
+            </a:r>
+          </a:p>
+          <a:p>
+            <a:pPr>
+              <a:spcBef>
+                <a:spcPts val="400"/>
+              </a:spcBef>
+              <a:spcAft>
+                <a:spcPts val="500"/>
+              </a:spcAft>
+              <a:buNone/>
+            </a:pPr>
             <a:r>
               <a:rPr lang="en-US" sz="1600" b="1" dirty="0">
                 <a:solidFill>
-                  <a:srgbClr val="FFFFFF"/>
-                </a:solidFill>
-              </a:rPr>
-              <a:t>1</a:t>
-            </a:r>
-          </a:p>
-        </p:txBody>
-      </p:sp>
-      <p:sp>
-        <p:nvSpPr>
-          <p:cNvPr id="503" name="T503"/>
-          <p:cNvSpPr txBox="1"/>
-          <p:nvPr/>
-        </p:nvSpPr>
-        <p:spPr>
-          <a:xfrm>
-            <a:off x="1727200" y="2895600"/>
-            <a:ext cx="2540000" cy="304800"/>
-          </a:xfrm>
-          <a:prstGeom prst="rect">
-            <a:avLst/>
-          </a:prstGeom>
-          <a:noFill/>
-        </p:spPr>
-        <p:txBody>
-          <a:bodyPr wrap="square" lIns="0" tIns="0" rIns="0" bIns="0" anchor="t"/>
-          <a:lstStyle/>
-          <a:p>
-            <a:r>
-              <a:rPr lang="en-US" sz="1600" b="1" dirty="0">
-                <a:solidFill>
                   <a:srgbClr val="12101A"/>
                 </a:solidFill>
               </a:rPr>
-              <a:t>Source embeddings</a:t>
-            </a:r>
-          </a:p>
-        </p:txBody>
-      </p:sp>
-      <p:sp>
-        <p:nvSpPr>
-          <p:cNvPr id="504" name="T504"/>
-          <p:cNvSpPr txBox="1"/>
-          <p:nvPr/>
-        </p:nvSpPr>
-        <p:spPr>
-          <a:xfrm>
-            <a:off x="1727200" y="3251200"/>
-            <a:ext cx="2540000" cy="660400"/>
-          </a:xfrm>
-          <a:prstGeom prst="rect">
-            <a:avLst/>
-          </a:prstGeom>
-          <a:noFill/>
-        </p:spPr>
-        <p:txBody>
-          <a:bodyPr wrap="square" lIns="0" tIns="0" rIns="0" bIns="0" anchor="t"/>
-          <a:lstStyle/>
+              <a:t>Random</a:t>
+            </a:r>
+          </a:p>
           <a:p>
             <a:pPr>
               <a:lnSpc>
-                <a:spcPts val="1500"/>
+                <a:spcPts val="1700"/>
               </a:lnSpc>
+              <a:buNone/>
             </a:pPr>
             <a:r>
               <a:rPr lang="en-US" sz="1300" dirty="0">
@@ -3683,25 +3654,25 @@
                   <a:srgbClr val="2A2540"/>
                 </a:solidFill>
               </a:rPr>
-              <a:t>Learn user &amp; item vectors on the source vertical, where the user has history.</a:t>
-            </a:r>
-          </a:p>
-        </p:txBody>
-      </p:sp>
-      <p:sp>
-        <p:nvSpPr>
-          <p:cNvPr id="505" name="C505"/>
+              <a:t>Orders the candidate pool at random. The absolute floor — any useful model must clear it.</a:t>
+            </a:r>
+          </a:p>
+        </p:txBody>
+      </p:sp>
+      <p:sp>
+        <p:nvSpPr>
+          <p:cNvPr id="802" name="cMostPop"/>
           <p:cNvSpPr/>
           <p:nvPr/>
         </p:nvSpPr>
         <p:spPr>
           <a:xfrm>
-            <a:off x="5130800" y="2133600"/>
-            <a:ext cx="2946400" cy="1879600"/>
+            <a:off x="3479800" y="1854200"/>
+            <a:ext cx="2514600" cy="2006600"/>
           </a:xfrm>
           <a:prstGeom prst="roundRect">
             <a:avLst>
-              <a:gd name="adj" fmla="val 7000"/>
+              <a:gd name="adj" fmla="val 8000"/>
             </a:avLst>
           </a:prstGeom>
           <a:solidFill>
@@ -3712,105 +3683,122 @@
           </a:ln>
         </p:spPr>
         <p:txBody>
-          <a:bodyPr/>
-          <a:lstStyle/>
-          <a:p>
-            <a:endParaRPr/>
-          </a:p>
-        </p:txBody>
-      </p:sp>
-      <p:sp>
-        <p:nvSpPr>
-          <p:cNvPr id="506" name="B506"/>
+          <a:bodyPr wrap="square" lIns="114300" tIns="100584" rIns="100584" bIns="91440" anchor="t"/>
+          <a:lstStyle/>
+          <a:p>
+            <a:pPr>
+              <a:buNone/>
+            </a:pPr>
+            <a:r>
+              <a:rPr lang="en-US" sz="900" b="1" spc="60" dirty="0">
+                <a:solidFill>
+                  <a:srgbClr val="3B82F6"/>
+                </a:solidFill>
+              </a:rPr>
+              <a:t>POPULARITY</a:t>
+            </a:r>
+          </a:p>
+          <a:p>
+            <a:pPr>
+              <a:spcBef>
+                <a:spcPts val="400"/>
+              </a:spcBef>
+              <a:spcAft>
+                <a:spcPts val="500"/>
+              </a:spcAft>
+              <a:buNone/>
+            </a:pPr>
+            <a:r>
+              <a:rPr lang="en-US" sz="1600" b="1" dirty="0">
+                <a:solidFill>
+                  <a:srgbClr val="12101A"/>
+                </a:solidFill>
+              </a:rPr>
+              <a:t>Most Popular</a:t>
+            </a:r>
+          </a:p>
+          <a:p>
+            <a:pPr>
+              <a:lnSpc>
+                <a:spcPts val="1700"/>
+              </a:lnSpc>
+              <a:buNone/>
+            </a:pPr>
+            <a:r>
+              <a:rPr lang="en-US" sz="1300" dirty="0">
+                <a:solidFill>
+                  <a:srgbClr val="2A2540"/>
+                </a:solidFill>
+              </a:rPr>
+              <a:t>Always ranks the target domain's globally most-popular items. Non-personalized — the 'no-model' engagement baseline.</a:t>
+            </a:r>
+          </a:p>
+        </p:txBody>
+      </p:sp>
+      <p:sp>
+        <p:nvSpPr>
+          <p:cNvPr id="803" name="cTargetMF"/>
           <p:cNvSpPr/>
           <p:nvPr/>
         </p:nvSpPr>
         <p:spPr>
           <a:xfrm>
-            <a:off x="5334000" y="2336800"/>
-            <a:ext cx="431800" cy="431800"/>
-          </a:xfrm>
-          <a:prstGeom prst="ellipse">
-            <a:avLst/>
+            <a:off x="6197600" y="1854200"/>
+            <a:ext cx="2514600" cy="2006600"/>
+          </a:xfrm>
+          <a:prstGeom prst="roundRect">
+            <a:avLst>
+              <a:gd name="adj" fmla="val 8000"/>
+            </a:avLst>
           </a:prstGeom>
           <a:solidFill>
-            <a:srgbClr val="C72A45"/>
+            <a:srgbClr val="EDEAF7"/>
           </a:solidFill>
           <a:ln>
             <a:noFill/>
           </a:ln>
         </p:spPr>
         <p:txBody>
-          <a:bodyPr wrap="none" lIns="0" tIns="0" rIns="0" bIns="0" anchor="ctr" anchorCtr="1"/>
-          <a:lstStyle/>
-          <a:p>
-            <a:pPr algn="ctr"/>
+          <a:bodyPr wrap="square" lIns="114300" tIns="100584" rIns="100584" bIns="91440" anchor="t"/>
+          <a:lstStyle/>
+          <a:p>
+            <a:pPr>
+              <a:buNone/>
+            </a:pPr>
+            <a:r>
+              <a:rPr lang="en-US" sz="900" b="1" spc="60" dirty="0">
+                <a:solidFill>
+                  <a:srgbClr val="FFB020"/>
+                </a:solidFill>
+              </a:rPr>
+              <a:t>NO TRANSFER</a:t>
+            </a:r>
+          </a:p>
+          <a:p>
+            <a:pPr>
+              <a:spcBef>
+                <a:spcPts val="400"/>
+              </a:spcBef>
+              <a:spcAft>
+                <a:spcPts val="500"/>
+              </a:spcAft>
+              <a:buNone/>
+            </a:pPr>
             <a:r>
               <a:rPr lang="en-US" sz="1600" b="1" dirty="0">
                 <a:solidFill>
-                  <a:srgbClr val="FFFFFF"/>
-                </a:solidFill>
-              </a:rPr>
-              <a:t>2</a:t>
-            </a:r>
-          </a:p>
-        </p:txBody>
-      </p:sp>
-      <p:sp>
-        <p:nvSpPr>
-          <p:cNvPr id="507" name="T507"/>
-          <p:cNvSpPr txBox="1"/>
-          <p:nvPr/>
-        </p:nvSpPr>
-        <p:spPr>
-          <a:xfrm>
-            <a:off x="5334000" y="2895600"/>
-            <a:ext cx="2540000" cy="304800"/>
-          </a:xfrm>
-          <a:prstGeom prst="rect">
-            <a:avLst/>
-          </a:prstGeom>
-          <a:noFill/>
-        </p:spPr>
-        <p:txBody>
-          <a:bodyPr wrap="square" lIns="0" tIns="0" rIns="0" bIns="0" anchor="t"/>
-          <a:lstStyle/>
-          <a:p>
-            <a:r>
-              <a:rPr lang="en-US" sz="1600" b="1" dirty="0">
-                <a:solidFill>
                   <a:srgbClr val="12101A"/>
                 </a:solidFill>
               </a:rPr>
-              <a:t>Target embeddings</a:t>
-            </a:r>
-          </a:p>
-        </p:txBody>
-      </p:sp>
-      <p:sp>
-        <p:nvSpPr>
-          <p:cNvPr id="508" name="T508"/>
-          <p:cNvSpPr txBox="1"/>
-          <p:nvPr/>
-        </p:nvSpPr>
-        <p:spPr>
-          <a:xfrm>
-            <a:off x="5334000" y="3251200"/>
-            <a:ext cx="2540000" cy="660400"/>
-          </a:xfrm>
-          <a:prstGeom prst="rect">
-            <a:avLst/>
-          </a:prstGeom>
-          <a:noFill/>
-        </p:spPr>
-        <p:txBody>
-          <a:bodyPr wrap="square" lIns="0" tIns="0" rIns="0" bIns="0" anchor="t"/>
-          <a:lstStyle/>
+              <a:t>Target-only MF</a:t>
+            </a:r>
+          </a:p>
           <a:p>
             <a:pPr>
               <a:lnSpc>
-                <a:spcPts val="1500"/>
+                <a:spcPts val="1700"/>
               </a:lnSpc>
+              <a:buNone/>
             </a:pPr>
             <a:r>
               <a:rPr lang="en-US" sz="1300" dirty="0">
@@ -3818,134 +3806,75 @@
                   <a:srgbClr val="2A2540"/>
                 </a:solidFill>
               </a:rPr>
-              <a:t>Learn user &amp; item vectors on the target vertical, where we want to recommend.</a:t>
-            </a:r>
-          </a:p>
-        </p:txBody>
-      </p:sp>
-      <p:sp>
-        <p:nvSpPr>
-          <p:cNvPr id="509" name="C509"/>
+              <a:t>Matrix factorization trained on target-domain interactions alone. Isolates whether any cross-domain signal helps.</a:t>
+            </a:r>
+          </a:p>
+        </p:txBody>
+      </p:sp>
+      <p:sp>
+        <p:nvSpPr>
+          <p:cNvPr id="804" name="cFeat"/>
           <p:cNvSpPr/>
           <p:nvPr/>
         </p:nvSpPr>
         <p:spPr>
           <a:xfrm>
-            <a:off x="8737600" y="2133600"/>
-            <a:ext cx="2946400" cy="1879600"/>
+            <a:off x="8915400" y="1854200"/>
+            <a:ext cx="2514600" cy="2006600"/>
           </a:xfrm>
           <a:prstGeom prst="roundRect">
             <a:avLst>
-              <a:gd name="adj" fmla="val 7000"/>
+              <a:gd name="adj" fmla="val 8000"/>
             </a:avLst>
           </a:prstGeom>
           <a:solidFill>
-            <a:srgbClr val="E5F8F5"/>
+            <a:srgbClr val="EDEAF7"/>
           </a:solidFill>
           <a:ln>
             <a:noFill/>
           </a:ln>
         </p:spPr>
         <p:txBody>
-          <a:bodyPr/>
-          <a:lstStyle/>
-          <a:p>
-            <a:endParaRPr/>
-          </a:p>
-        </p:txBody>
-      </p:sp>
-      <p:sp>
-        <p:nvSpPr>
-          <p:cNvPr id="510" name="B510"/>
-          <p:cNvSpPr/>
-          <p:nvPr/>
-        </p:nvSpPr>
-        <p:spPr>
-          <a:xfrm>
-            <a:off x="8940800" y="2336800"/>
-            <a:ext cx="431800" cy="431800"/>
-          </a:xfrm>
-          <a:prstGeom prst="ellipse">
-            <a:avLst/>
-          </a:prstGeom>
-          <a:solidFill>
-            <a:srgbClr val="067A68"/>
-          </a:solidFill>
-          <a:ln>
-            <a:noFill/>
-          </a:ln>
-        </p:spPr>
-        <p:txBody>
-          <a:bodyPr wrap="none" lIns="0" tIns="0" rIns="0" bIns="0" anchor="ctr" anchorCtr="1"/>
-          <a:lstStyle/>
-          <a:p>
-            <a:pPr algn="ctr"/>
+          <a:bodyPr wrap="square" lIns="114300" tIns="100584" rIns="100584" bIns="91440" anchor="t"/>
+          <a:lstStyle/>
+          <a:p>
+            <a:pPr>
+              <a:buNone/>
+            </a:pPr>
+            <a:r>
+              <a:rPr lang="en-US" sz="900" b="1" spc="60" dirty="0">
+                <a:solidFill>
+                  <a:srgbClr val="00C2A8"/>
+                </a:solidFill>
+              </a:rPr>
+              <a:t>FEATURE-BASED</a:t>
+            </a:r>
+          </a:p>
+          <a:p>
+            <a:pPr>
+              <a:spcBef>
+                <a:spcPts val="400"/>
+              </a:spcBef>
+              <a:spcAft>
+                <a:spcPts val="500"/>
+              </a:spcAft>
+              <a:buNone/>
+            </a:pPr>
             <a:r>
               <a:rPr lang="en-US" sz="1600" b="1" dirty="0">
                 <a:solidFill>
-                  <a:srgbClr val="FFFFFF"/>
-                </a:solidFill>
-              </a:rPr>
-              <a:t>3</a:t>
-            </a:r>
-          </a:p>
-        </p:txBody>
-      </p:sp>
-      <p:sp>
-        <p:nvSpPr>
-          <p:cNvPr id="511" name="T511"/>
-          <p:cNvSpPr txBox="1"/>
-          <p:nvPr/>
-        </p:nvSpPr>
-        <p:spPr>
-          <a:xfrm>
-            <a:off x="8940800" y="2895600"/>
-            <a:ext cx="2540000" cy="304800"/>
-          </a:xfrm>
-          <a:prstGeom prst="rect">
-            <a:avLst/>
-          </a:prstGeom>
-          <a:noFill/>
-        </p:spPr>
-        <p:txBody>
-          <a:bodyPr wrap="square" lIns="0" tIns="0" rIns="0" bIns="0" anchor="t"/>
-          <a:lstStyle/>
-          <a:p>
-            <a:r>
-              <a:rPr lang="en-US" sz="1600" b="1" dirty="0">
-                <a:solidFill>
                   <a:srgbClr val="12101A"/>
                 </a:solidFill>
               </a:rPr>
-              <a:t>Mapping function</a:t>
-            </a:r>
-          </a:p>
-        </p:txBody>
-      </p:sp>
-      <p:sp>
-        <p:nvSpPr>
-          <p:cNvPr id="512" name="T512"/>
-          <p:cNvSpPr txBox="1"/>
-          <p:nvPr/>
-        </p:nvSpPr>
-        <p:spPr>
-          <a:xfrm>
-            <a:off x="8940800" y="3251200"/>
-            <a:ext cx="2540000" cy="660400"/>
-          </a:xfrm>
-          <a:prstGeom prst="rect">
-            <a:avLst/>
-          </a:prstGeom>
-          <a:noFill/>
-        </p:spPr>
-        <p:txBody>
-          <a:bodyPr wrap="square" lIns="0" tIns="0" rIns="0" bIns="0" anchor="t"/>
-          <a:lstStyle/>
+              <a:t>Content</a:t>
+            </a:r>
+          </a:p>
           <a:p>
             <a:pPr>
               <a:lnSpc>
-                <a:spcPts val="1500"/>
+                <a:spcPts val="1700"/>
               </a:lnSpc>
+              <a:buNone/>
             </a:pPr>
             <a:r>
               <a:rPr lang="en-US" sz="1300" dirty="0">
@@ -3953,83 +3882,41 @@
                   <a:srgbClr val="2A2540"/>
                 </a:solidFill>
               </a:rPr>
-              <a:t>Learns to map a source-user vector to its target-vector. Trained on shared users.</a:t>
-            </a:r>
-          </a:p>
-        </p:txBody>
-      </p:sp>
-      <p:sp>
-        <p:nvSpPr>
-          <p:cNvPr id="513" name="A513"/>
+              <a:t>Maps source-domain features into the target with a content-based rule (</a:t>
+            </a:r>
+            <a:r>
+              <a:rPr lang="en-US" sz="1300" dirty="0" err="1">
+                <a:solidFill>
+                  <a:srgbClr val="2A2540"/>
+                </a:solidFill>
+              </a:rPr>
+              <a:t>MiniLM</a:t>
+            </a:r>
+            <a:r>
+              <a:rPr lang="en-US" sz="1300" dirty="0">
+                <a:solidFill>
+                  <a:srgbClr val="2A2540"/>
+                </a:solidFill>
+              </a:rPr>
+              <a:t> embedding), similarity calculated with dot product.</a:t>
+            </a:r>
+          </a:p>
+        </p:txBody>
+      </p:sp>
+      <p:sp>
+        <p:nvSpPr>
+          <p:cNvPr id="810" name="emcdrBar"/>
           <p:cNvSpPr/>
           <p:nvPr/>
         </p:nvSpPr>
         <p:spPr>
           <a:xfrm>
-            <a:off x="4521200" y="2819400"/>
-            <a:ext cx="406400" cy="508000"/>
-          </a:xfrm>
-          <a:prstGeom prst="rightArrow">
-            <a:avLst/>
-          </a:prstGeom>
-          <a:solidFill>
-            <a:srgbClr val="6C3BFF"/>
-          </a:solidFill>
-          <a:ln>
-            <a:noFill/>
-          </a:ln>
-        </p:spPr>
-        <p:txBody>
-          <a:bodyPr/>
-          <a:lstStyle/>
-          <a:p>
-            <a:endParaRPr/>
-          </a:p>
-        </p:txBody>
-      </p:sp>
-      <p:sp>
-        <p:nvSpPr>
-          <p:cNvPr id="514" name="A514"/>
-          <p:cNvSpPr/>
-          <p:nvPr/>
-        </p:nvSpPr>
-        <p:spPr>
-          <a:xfrm>
-            <a:off x="8128000" y="2819400"/>
-            <a:ext cx="406400" cy="508000"/>
-          </a:xfrm>
-          <a:prstGeom prst="rightArrow">
-            <a:avLst/>
-          </a:prstGeom>
-          <a:solidFill>
-            <a:srgbClr val="FF5C7A"/>
-          </a:solidFill>
-          <a:ln>
-            <a:noFill/>
-          </a:ln>
-        </p:spPr>
-        <p:txBody>
-          <a:bodyPr/>
-          <a:lstStyle/>
-          <a:p>
-            <a:endParaRPr/>
-          </a:p>
-        </p:txBody>
-      </p:sp>
-      <p:sp>
-        <p:nvSpPr>
-          <p:cNvPr id="515" name="C515"/>
-          <p:cNvSpPr/>
-          <p:nvPr/>
-        </p:nvSpPr>
-        <p:spPr>
-          <a:xfrm>
-            <a:off x="1524000" y="4419600"/>
-            <a:ext cx="10160000" cy="660400"/>
+            <a:off x="762000" y="4140200"/>
+            <a:ext cx="10668000" cy="1524000"/>
           </a:xfrm>
           <a:prstGeom prst="roundRect">
             <a:avLst>
-              <a:gd name="adj" fmla="val 7000"/>
+              <a:gd name="adj" fmla="val 8000"/>
             </a:avLst>
           </a:prstGeom>
           <a:solidFill>
@@ -4042,84 +3929,35 @@
           </a:ln>
         </p:spPr>
         <p:txBody>
-          <a:bodyPr/>
-          <a:lstStyle/>
-          <a:p>
-            <a:endParaRPr/>
-          </a:p>
-        </p:txBody>
-      </p:sp>
-      <p:sp>
-        <p:nvSpPr>
-          <p:cNvPr id="516" name="T516"/>
-          <p:cNvSpPr txBox="1"/>
-          <p:nvPr/>
-        </p:nvSpPr>
-        <p:spPr>
-          <a:xfrm>
-            <a:off x="1778000" y="4521200"/>
-            <a:ext cx="9652000" cy="508000"/>
-          </a:xfrm>
-          <a:prstGeom prst="rect">
-            <a:avLst/>
-          </a:prstGeom>
-          <a:noFill/>
-        </p:spPr>
-        <p:txBody>
-          <a:bodyPr wrap="square" lIns="0" tIns="0" rIns="0" bIns="0" anchor="t"/>
+          <a:bodyPr wrap="square" lIns="114300" tIns="100584" rIns="100584" bIns="91440" anchor="ctr"/>
           <a:lstStyle/>
           <a:p>
             <a:pPr>
-              <a:lnSpc>
-                <a:spcPts val="1600"/>
-              </a:lnSpc>
+              <a:buNone/>
             </a:pPr>
             <a:r>
-              <a:rPr lang="en-US" sz="1350" b="1" dirty="0">
+              <a:rPr lang="en-US" sz="900" b="1" spc="60" dirty="0">
                 <a:solidFill>
                   <a:srgbClr val="6C3BFF"/>
                 </a:solidFill>
               </a:rPr>
-              <a:t>At recommendation time:  </a:t>
-            </a:r>
-            <a:r>
-              <a:rPr lang="en-US" sz="1350" dirty="0">
+              <a:t>OURS · EMCDR</a:t>
+            </a:r>
+          </a:p>
+          <a:p>
+            <a:pPr>
+              <a:spcBef>
+                <a:spcPts val="400"/>
+              </a:spcBef>
+              <a:buNone/>
+            </a:pPr>
+            <a:r>
+              <a:rPr lang="en-US" sz="1400" dirty="0">
                 <a:solidFill>
                   <a:srgbClr val="12101A"/>
                 </a:solidFill>
               </a:rPr>
-              <a:t>a cold user's source vector → through the mapping → rank target-vertical items by match. The content bridge is item text + taxonomy.</a:t>
-            </a:r>
-          </a:p>
-        </p:txBody>
-      </p:sp>
-      <p:sp>
-        <p:nvSpPr>
-          <p:cNvPr id="517" name="T517"/>
-          <p:cNvSpPr txBox="1"/>
-          <p:nvPr/>
-        </p:nvSpPr>
-        <p:spPr>
-          <a:xfrm>
-            <a:off x="1524000" y="5207000"/>
-            <a:ext cx="10160000" cy="304800"/>
-          </a:xfrm>
-          <a:prstGeom prst="rect">
-            <a:avLst/>
-          </a:prstGeom>
-          <a:noFill/>
-        </p:spPr>
-        <p:txBody>
-          <a:bodyPr wrap="square" lIns="0" tIns="0" rIns="0" bIns="0" anchor="t"/>
-          <a:lstStyle/>
-          <a:p>
-            <a:r>
-              <a:rPr lang="en-US" sz="1250" i="1" dirty="0">
-                <a:solidFill>
-                  <a:srgbClr val="6C3BFF"/>
-                </a:solidFill>
-              </a:rPr>
-              <a:t>Evaluated head-to-head vs. a single-vertical MF / NCF baseline on Recall@K and NDCG@K across 8 viable pairs.</a:t>
+              <a:t>A per-vertical two-tower model, then one learned linear map projects each user's source-domain embedding into the target latent space — ranking cold-start users who have no target history.</a:t>
             </a:r>
           </a:p>
         </p:txBody>
@@ -4127,7 +3965,7 @@
     </p:spTree>
     <p:extLst>
       <p:ext uri="{BB962C8B-B14F-4D97-AF65-F5344CB8AC3E}">
-        <p14:creationId xmlns:p14="http://schemas.microsoft.com/office/powerpoint/2010/main" val="3252378547"/>
+        <p14:creationId xmlns:p14="http://schemas.microsoft.com/office/powerpoint/2010/main" val="2061090142"/>
       </p:ext>
     </p:extLst>
   </p:cSld>
@@ -4170,10 +4008,15 @@
             <p:ph type="title"/>
           </p:nvPr>
         </p:nvSpPr>
-        <p:spPr/>
-        <p:txBody>
-          <a:bodyPr>
-            <a:normAutofit fontScale="90000"/>
+        <p:spPr>
+          <a:xfrm>
+            <a:off x="762000" y="304800"/>
+            <a:ext cx="10668000" cy="1016000"/>
+          </a:xfrm>
+        </p:spPr>
+        <p:txBody>
+          <a:bodyPr anchor="t" anchorCtr="0">
+            <a:normAutofit/>
           </a:bodyPr>
           <a:lstStyle/>
           <a:p>
@@ -4181,12 +4024,12 @@
               <a:buNone/>
             </a:pPr>
             <a:r>
-              <a:rPr lang="en-US" sz="2000" b="1" dirty="0">
+              <a:rPr lang="en-US" sz="1300" b="1" dirty="0">
                 <a:solidFill>
                   <a:srgbClr val="6C3BFF"/>
                 </a:solidFill>
               </a:rPr>
-              <a:t>STAGE 1</a:t>
+              <a:t>SOTA  ·  PAPER COMPARISON</a:t>
             </a:r>
           </a:p>
           <a:p>
@@ -4194,929 +4037,545 @@
               <a:buNone/>
             </a:pPr>
             <a:r>
-              <a:rPr lang="en-US" dirty="0"/>
-              <a:t>A hybrid two-tower recommender, per vertical</a:t>
-            </a:r>
-          </a:p>
-        </p:txBody>
-      </p:sp>
-      <p:sp>
-        <p:nvSpPr>
-          <p:cNvPr id="600" name="N600"/>
+              <a:rPr lang="en-US" sz="2800" b="1" dirty="0">
+                <a:solidFill>
+                  <a:srgbClr val="12101A"/>
+                </a:solidFill>
+              </a:rPr>
+              <a:t>Where we stand vs. comparable cross-domain work</a:t>
+            </a:r>
+          </a:p>
+        </p:txBody>
+      </p:sp>
+      <p:sp>
+        <p:nvSpPr>
+          <p:cNvPr id="710" name="takeaway"/>
           <p:cNvSpPr/>
           <p:nvPr/>
         </p:nvSpPr>
         <p:spPr>
           <a:xfrm>
-            <a:off x="1016000" y="1905000"/>
-            <a:ext cx="3810000" cy="3175000"/>
+            <a:off x="762000" y="5740400"/>
+            <a:ext cx="10668000" cy="635000"/>
           </a:xfrm>
           <a:prstGeom prst="roundRect">
             <a:avLst>
-              <a:gd name="adj" fmla="val 6000"/>
+              <a:gd name="adj" fmla="val 14000"/>
             </a:avLst>
           </a:prstGeom>
           <a:solidFill>
             <a:srgbClr val="EDEAF7"/>
-          </a:solidFill>
-          <a:ln w="12700">
-            <a:solidFill>
-              <a:srgbClr val="D9D2F2"/>
-            </a:solidFill>
-          </a:ln>
-        </p:spPr>
-        <p:txBody>
-          <a:bodyPr/>
-          <a:lstStyle/>
-          <a:p>
-            <a:endParaRPr/>
-          </a:p>
-        </p:txBody>
-      </p:sp>
-      <p:sp>
-        <p:nvSpPr>
-          <p:cNvPr id="601" name="N601"/>
-          <p:cNvSpPr/>
-          <p:nvPr/>
-        </p:nvSpPr>
-        <p:spPr>
-          <a:xfrm>
-            <a:off x="1016000" y="2032000"/>
-            <a:ext cx="3810000" cy="381000"/>
-          </a:xfrm>
-          <a:prstGeom prst="rect">
-            <a:avLst/>
-          </a:prstGeom>
-          <a:noFill/>
-          <a:ln>
-            <a:noFill/>
-          </a:ln>
-        </p:spPr>
-        <p:txBody>
-          <a:bodyPr wrap="square" lIns="45720" tIns="27432" rIns="45720" bIns="27432" anchor="ctr">
-            <a:normAutofit/>
-          </a:bodyPr>
-          <a:lstStyle/>
-          <a:p>
-            <a:pPr algn="ctr"/>
-            <a:r>
-              <a:rPr lang="en-US" sz="1300" b="1" i="0" dirty="0">
-                <a:solidFill>
-                  <a:srgbClr val="6C3BFF"/>
-                </a:solidFill>
-              </a:rPr>
-              <a:t>USER TOWER</a:t>
-            </a:r>
-          </a:p>
-        </p:txBody>
-      </p:sp>
-      <p:sp>
-        <p:nvSpPr>
-          <p:cNvPr id="602" name="N602"/>
-          <p:cNvSpPr/>
-          <p:nvPr/>
-        </p:nvSpPr>
-        <p:spPr>
-          <a:xfrm>
-            <a:off x="1397000" y="2692400"/>
-            <a:ext cx="3048000" cy="762000"/>
-          </a:xfrm>
-          <a:prstGeom prst="roundRect">
-            <a:avLst>
-              <a:gd name="adj" fmla="val 9000"/>
-            </a:avLst>
-          </a:prstGeom>
-          <a:solidFill>
-            <a:srgbClr val="FFFFFF"/>
-          </a:solidFill>
-          <a:ln w="12700">
-            <a:solidFill>
-              <a:srgbClr val="D9D2F2"/>
-            </a:solidFill>
-          </a:ln>
-        </p:spPr>
-        <p:txBody>
-          <a:bodyPr wrap="square" lIns="45720" tIns="27432" rIns="45720" bIns="27432" anchor="ctr">
-            <a:normAutofit/>
-          </a:bodyPr>
-          <a:lstStyle/>
-          <a:p>
-            <a:pPr algn="ctr"/>
-            <a:r>
-              <a:rPr lang="en-US" sz="1300" b="1" i="0" dirty="0">
-                <a:solidFill>
-                  <a:srgbClr val="12101A"/>
-                </a:solidFill>
-              </a:rPr>
-              <a:t>user_emb[ u ]</a:t>
-            </a:r>
-          </a:p>
-        </p:txBody>
-      </p:sp>
-      <p:sp>
-        <p:nvSpPr>
-          <p:cNvPr id="603" name="N603"/>
-          <p:cNvSpPr/>
-          <p:nvPr/>
-        </p:nvSpPr>
-        <p:spPr>
-          <a:xfrm>
-            <a:off x="1397000" y="3556000"/>
-            <a:ext cx="3048000" cy="304800"/>
-          </a:xfrm>
-          <a:prstGeom prst="rect">
-            <a:avLst/>
-          </a:prstGeom>
-          <a:noFill/>
-          <a:ln>
-            <a:noFill/>
-          </a:ln>
-        </p:spPr>
-        <p:txBody>
-          <a:bodyPr wrap="square" lIns="45720" tIns="27432" rIns="45720" bIns="27432" anchor="ctr">
-            <a:normAutofit/>
-          </a:bodyPr>
-          <a:lstStyle/>
-          <a:p>
-            <a:pPr algn="ctr"/>
-            <a:r>
-              <a:rPr lang="en-US" sz="1150" b="0" i="1" dirty="0">
-                <a:solidFill>
-                  <a:srgbClr val="6E6A7C"/>
-                </a:solidFill>
-              </a:rPr>
-              <a:t>a plain learned lookup table</a:t>
-            </a:r>
-          </a:p>
-        </p:txBody>
-      </p:sp>
-      <p:sp>
-        <p:nvSpPr>
-          <p:cNvPr id="604" name="N604"/>
-          <p:cNvSpPr/>
-          <p:nvPr/>
-        </p:nvSpPr>
-        <p:spPr>
-          <a:xfrm>
-            <a:off x="2819400" y="3911600"/>
-            <a:ext cx="203200" cy="381000"/>
-          </a:xfrm>
-          <a:prstGeom prst="downArrow">
-            <a:avLst/>
-          </a:prstGeom>
-          <a:solidFill>
-            <a:srgbClr val="B8AEE8"/>
           </a:solidFill>
           <a:ln>
             <a:noFill/>
           </a:ln>
         </p:spPr>
         <p:txBody>
-          <a:bodyPr/>
-          <a:lstStyle/>
-          <a:p>
-            <a:endParaRPr/>
-          </a:p>
-        </p:txBody>
-      </p:sp>
-      <p:sp>
-        <p:nvSpPr>
-          <p:cNvPr id="605" name="N605"/>
-          <p:cNvSpPr/>
-          <p:nvPr/>
-        </p:nvSpPr>
-        <p:spPr>
-          <a:xfrm>
-            <a:off x="1397000" y="4343400"/>
-            <a:ext cx="3048000" cy="533400"/>
-          </a:xfrm>
-          <a:prstGeom prst="roundRect">
-            <a:avLst>
-              <a:gd name="adj" fmla="val 12000"/>
-            </a:avLst>
-          </a:prstGeom>
-          <a:solidFill>
-            <a:srgbClr val="6C3BFF"/>
-          </a:solidFill>
-          <a:ln>
-            <a:noFill/>
-          </a:ln>
-        </p:spPr>
-        <p:txBody>
-          <a:bodyPr wrap="square" lIns="45720" tIns="27432" rIns="45720" bIns="27432" anchor="ctr">
-            <a:normAutofit/>
-          </a:bodyPr>
-          <a:lstStyle/>
-          <a:p>
-            <a:pPr algn="ctr"/>
-            <a:r>
-              <a:rPr lang="en-US" sz="1300" b="1" i="0" dirty="0">
-                <a:solidFill>
-                  <a:srgbClr val="FFFFFF"/>
-                </a:solidFill>
-              </a:rPr>
-              <a:t>user vector  (64-d)</a:t>
-            </a:r>
-          </a:p>
-        </p:txBody>
-      </p:sp>
-      <p:sp>
-        <p:nvSpPr>
-          <p:cNvPr id="606" name="N606"/>
-          <p:cNvSpPr/>
-          <p:nvPr/>
-        </p:nvSpPr>
-        <p:spPr>
-          <a:xfrm>
-            <a:off x="6350000" y="1905000"/>
-            <a:ext cx="4826000" cy="3175000"/>
-          </a:xfrm>
-          <a:prstGeom prst="roundRect">
-            <a:avLst>
-              <a:gd name="adj" fmla="val 6000"/>
-            </a:avLst>
-          </a:prstGeom>
-          <a:solidFill>
-            <a:srgbClr val="EDEAF7"/>
-          </a:solidFill>
-          <a:ln w="12700">
-            <a:solidFill>
-              <a:srgbClr val="CFE9E3"/>
-            </a:solidFill>
-          </a:ln>
-        </p:spPr>
-        <p:txBody>
-          <a:bodyPr/>
-          <a:lstStyle/>
-          <a:p>
-            <a:endParaRPr/>
-          </a:p>
-        </p:txBody>
-      </p:sp>
-      <p:sp>
-        <p:nvSpPr>
-          <p:cNvPr id="607" name="N607"/>
-          <p:cNvSpPr/>
-          <p:nvPr/>
-        </p:nvSpPr>
-        <p:spPr>
-          <a:xfrm>
-            <a:off x="6350000" y="2032000"/>
-            <a:ext cx="4826000" cy="381000"/>
-          </a:xfrm>
-          <a:prstGeom prst="rect">
-            <a:avLst/>
-          </a:prstGeom>
-          <a:noFill/>
-          <a:ln>
-            <a:noFill/>
-          </a:ln>
-        </p:spPr>
-        <p:txBody>
-          <a:bodyPr wrap="square" lIns="45720" tIns="27432" rIns="45720" bIns="27432" anchor="ctr">
-            <a:normAutofit/>
-          </a:bodyPr>
-          <a:lstStyle/>
-          <a:p>
-            <a:pPr algn="ctr"/>
-            <a:r>
-              <a:rPr lang="en-US" sz="1300" b="1" i="0" dirty="0">
+          <a:bodyPr wrap="square" lIns="118872" tIns="45720" rIns="91440" bIns="45720" anchor="ctr"/>
+          <a:lstStyle/>
+          <a:p>
+            <a:pPr>
+              <a:buNone/>
+            </a:pPr>
+            <a:r>
+              <a:rPr lang="en-US" sz="1100" b="1" dirty="0">
                 <a:solidFill>
                   <a:srgbClr val="00C2A8"/>
                 </a:solidFill>
               </a:rPr>
-              <a:t>ITEM TOWER  (hybrid)</a:t>
-            </a:r>
-          </a:p>
-        </p:txBody>
-      </p:sp>
-      <p:sp>
-        <p:nvSpPr>
-          <p:cNvPr id="608" name="N608"/>
-          <p:cNvSpPr/>
-          <p:nvPr/>
-        </p:nvSpPr>
-        <p:spPr>
-          <a:xfrm>
-            <a:off x="6604000" y="2489200"/>
-            <a:ext cx="2921000" cy="355600"/>
-          </a:xfrm>
-          <a:prstGeom prst="roundRect">
-            <a:avLst>
-              <a:gd name="adj" fmla="val 10000"/>
-            </a:avLst>
-          </a:prstGeom>
-          <a:solidFill>
-            <a:srgbClr val="FFFFFF"/>
-          </a:solidFill>
-          <a:ln w="12700">
-            <a:solidFill>
-              <a:srgbClr val="CFE9E3"/>
-            </a:solidFill>
-          </a:ln>
-        </p:spPr>
-        <p:txBody>
-          <a:bodyPr wrap="square" lIns="45720" tIns="27432" rIns="45720" bIns="27432" anchor="ctr">
-            <a:normAutofit/>
-          </a:bodyPr>
-          <a:lstStyle/>
-          <a:p>
-            <a:pPr algn="l"/>
-            <a:r>
-              <a:rPr lang="en-US" sz="1200" b="1" i="0" dirty="0">
-                <a:solidFill>
-                  <a:srgbClr val="12101A"/>
-                </a:solidFill>
-              </a:rPr>
-              <a:t>id_factor</a:t>
-            </a:r>
-          </a:p>
-        </p:txBody>
-      </p:sp>
-      <p:sp>
-        <p:nvSpPr>
-          <p:cNvPr id="609" name="N609"/>
-          <p:cNvSpPr/>
-          <p:nvPr/>
-        </p:nvSpPr>
-        <p:spPr>
-          <a:xfrm>
-            <a:off x="9601200" y="2489200"/>
-            <a:ext cx="1371600" cy="355600"/>
-          </a:xfrm>
-          <a:prstGeom prst="rect">
-            <a:avLst/>
-          </a:prstGeom>
-          <a:noFill/>
-          <a:ln>
-            <a:noFill/>
-          </a:ln>
-        </p:spPr>
-        <p:txBody>
-          <a:bodyPr wrap="square" lIns="45720" tIns="27432" rIns="45720" bIns="27432" anchor="ctr">
-            <a:normAutofit/>
-          </a:bodyPr>
-          <a:lstStyle/>
-          <a:p>
-            <a:pPr algn="l"/>
-            <a:r>
-              <a:rPr lang="en-US" sz="1050" b="0" i="1" dirty="0">
-                <a:solidFill>
-                  <a:srgbClr val="6E6A7C"/>
-                </a:solidFill>
-              </a:rPr>
-              <a:t>free per-item</a:t>
-            </a:r>
-          </a:p>
-        </p:txBody>
-      </p:sp>
-      <p:sp>
-        <p:nvSpPr>
-          <p:cNvPr id="611" name="N611"/>
-          <p:cNvSpPr/>
-          <p:nvPr/>
-        </p:nvSpPr>
-        <p:spPr>
-          <a:xfrm>
-            <a:off x="6604000" y="3022600"/>
-            <a:ext cx="2921000" cy="355600"/>
-          </a:xfrm>
-          <a:prstGeom prst="roundRect">
-            <a:avLst>
-              <a:gd name="adj" fmla="val 10000"/>
-            </a:avLst>
-          </a:prstGeom>
-          <a:solidFill>
-            <a:srgbClr val="FFFFFF"/>
-          </a:solidFill>
-          <a:ln w="12700">
-            <a:solidFill>
-              <a:srgbClr val="CFE9E3"/>
-            </a:solidFill>
-          </a:ln>
-        </p:spPr>
-        <p:txBody>
-          <a:bodyPr wrap="square" lIns="45720" tIns="27432" rIns="45720" bIns="27432" anchor="ctr">
-            <a:normAutofit/>
-          </a:bodyPr>
-          <a:lstStyle/>
-          <a:p>
-            <a:pPr algn="l"/>
-            <a:r>
-              <a:rPr lang="en-US" sz="1200" b="1" i="0" dirty="0">
-                <a:solidFill>
-                  <a:srgbClr val="12101A"/>
-                </a:solidFill>
-              </a:rPr>
-              <a:t>text_proj</a:t>
-            </a:r>
-          </a:p>
-        </p:txBody>
-      </p:sp>
-      <p:sp>
-        <p:nvSpPr>
-          <p:cNvPr id="612" name="N612"/>
-          <p:cNvSpPr/>
-          <p:nvPr/>
-        </p:nvSpPr>
-        <p:spPr>
-          <a:xfrm>
-            <a:off x="9601200" y="3022600"/>
-            <a:ext cx="1371600" cy="355600"/>
-          </a:xfrm>
-          <a:prstGeom prst="rect">
-            <a:avLst/>
-          </a:prstGeom>
-          <a:noFill/>
-          <a:ln>
-            <a:noFill/>
-          </a:ln>
-        </p:spPr>
-        <p:txBody>
-          <a:bodyPr wrap="square" lIns="45720" tIns="27432" rIns="45720" bIns="27432" anchor="ctr">
-            <a:normAutofit/>
-          </a:bodyPr>
-          <a:lstStyle/>
-          <a:p>
-            <a:pPr algn="l"/>
-            <a:r>
-              <a:rPr lang="en-US" sz="1050" b="0" i="1" dirty="0">
-                <a:solidFill>
-                  <a:srgbClr val="6E6A7C"/>
-                </a:solidFill>
-              </a:rPr>
-              <a:t>MiniLM 384→64</a:t>
-            </a:r>
-          </a:p>
-        </p:txBody>
-      </p:sp>
-      <p:sp>
-        <p:nvSpPr>
-          <p:cNvPr id="614" name="N614"/>
-          <p:cNvSpPr/>
-          <p:nvPr/>
-        </p:nvSpPr>
-        <p:spPr>
-          <a:xfrm>
-            <a:off x="6604000" y="3556000"/>
-            <a:ext cx="2921000" cy="355600"/>
-          </a:xfrm>
-          <a:prstGeom prst="roundRect">
-            <a:avLst>
-              <a:gd name="adj" fmla="val 10000"/>
-            </a:avLst>
-          </a:prstGeom>
-          <a:solidFill>
-            <a:srgbClr val="FFFFFF"/>
-          </a:solidFill>
-          <a:ln w="12700">
-            <a:solidFill>
-              <a:srgbClr val="CFE9E3"/>
-            </a:solidFill>
-          </a:ln>
-        </p:spPr>
-        <p:txBody>
-          <a:bodyPr wrap="square" lIns="45720" tIns="27432" rIns="45720" bIns="27432" anchor="ctr">
-            <a:normAutofit/>
-          </a:bodyPr>
-          <a:lstStyle/>
-          <a:p>
-            <a:pPr algn="l"/>
-            <a:r>
-              <a:rPr lang="en-US" sz="1200" b="1" i="0" dirty="0">
-                <a:solidFill>
-                  <a:srgbClr val="12101A"/>
-                </a:solidFill>
-              </a:rPr>
-              <a:t>cat_bag</a:t>
-            </a:r>
-          </a:p>
-        </p:txBody>
-      </p:sp>
-      <p:sp>
-        <p:nvSpPr>
-          <p:cNvPr id="615" name="N615"/>
-          <p:cNvSpPr/>
-          <p:nvPr/>
-        </p:nvSpPr>
-        <p:spPr>
-          <a:xfrm>
-            <a:off x="9601200" y="3556000"/>
-            <a:ext cx="1371600" cy="355600"/>
-          </a:xfrm>
-          <a:prstGeom prst="rect">
-            <a:avLst/>
-          </a:prstGeom>
-          <a:noFill/>
-          <a:ln>
-            <a:noFill/>
-          </a:ln>
-        </p:spPr>
-        <p:txBody>
-          <a:bodyPr wrap="square" lIns="45720" tIns="27432" rIns="45720" bIns="27432" anchor="ctr">
-            <a:normAutofit/>
-          </a:bodyPr>
-          <a:lstStyle/>
-          <a:p>
-            <a:pPr algn="l"/>
-            <a:r>
-              <a:rPr lang="en-US" sz="1050" b="0" i="1" dirty="0">
-                <a:solidFill>
-                  <a:srgbClr val="6E6A7C"/>
-                </a:solidFill>
-              </a:rPr>
-              <a:t>category vectors</a:t>
-            </a:r>
-          </a:p>
-        </p:txBody>
-      </p:sp>
-      <p:sp>
-        <p:nvSpPr>
-          <p:cNvPr id="617" name="N617"/>
-          <p:cNvSpPr/>
-          <p:nvPr/>
-        </p:nvSpPr>
-        <p:spPr>
-          <a:xfrm>
-            <a:off x="6604000" y="4089400"/>
-            <a:ext cx="2921000" cy="355600"/>
-          </a:xfrm>
-          <a:prstGeom prst="roundRect">
-            <a:avLst>
-              <a:gd name="adj" fmla="val 10000"/>
-            </a:avLst>
-          </a:prstGeom>
-          <a:solidFill>
-            <a:srgbClr val="FFFFFF"/>
-          </a:solidFill>
-          <a:ln w="12700">
-            <a:solidFill>
-              <a:srgbClr val="CFE9E3"/>
-            </a:solidFill>
-          </a:ln>
-        </p:spPr>
-        <p:txBody>
-          <a:bodyPr wrap="square" lIns="45720" tIns="27432" rIns="45720" bIns="27432" anchor="ctr">
-            <a:normAutofit/>
-          </a:bodyPr>
-          <a:lstStyle/>
-          <a:p>
-            <a:pPr algn="l"/>
-            <a:r>
-              <a:rPr lang="en-US" sz="1200" b="1" i="0" dirty="0">
-                <a:solidFill>
-                  <a:srgbClr val="12101A"/>
-                </a:solidFill>
-              </a:rPr>
-              <a:t>pop_proj</a:t>
-            </a:r>
-          </a:p>
-        </p:txBody>
-      </p:sp>
-      <p:sp>
-        <p:nvSpPr>
-          <p:cNvPr id="618" name="N618"/>
-          <p:cNvSpPr/>
-          <p:nvPr/>
-        </p:nvSpPr>
-        <p:spPr>
-          <a:xfrm>
-            <a:off x="9601200" y="4089400"/>
-            <a:ext cx="1371600" cy="355600"/>
-          </a:xfrm>
-          <a:prstGeom prst="rect">
-            <a:avLst/>
-          </a:prstGeom>
-          <a:noFill/>
-          <a:ln>
-            <a:noFill/>
-          </a:ln>
-        </p:spPr>
-        <p:txBody>
-          <a:bodyPr wrap="square" lIns="45720" tIns="27432" rIns="45720" bIns="27432" anchor="ctr">
-            <a:normAutofit/>
-          </a:bodyPr>
-          <a:lstStyle/>
-          <a:p>
-            <a:pPr algn="l"/>
-            <a:r>
-              <a:rPr lang="en-US" sz="1050" b="0" i="1" dirty="0">
-                <a:solidFill>
-                  <a:srgbClr val="6E6A7C"/>
-                </a:solidFill>
-              </a:rPr>
-              <a:t>popularity 2→64</a:t>
-            </a:r>
-          </a:p>
-        </p:txBody>
-      </p:sp>
-      <p:sp>
-        <p:nvSpPr>
-          <p:cNvPr id="619" name="N619"/>
-          <p:cNvSpPr/>
-          <p:nvPr/>
-        </p:nvSpPr>
-        <p:spPr>
-          <a:xfrm>
-            <a:off x="1016000" y="5308600"/>
-            <a:ext cx="10160000" cy="939800"/>
-          </a:xfrm>
-          <a:prstGeom prst="roundRect">
-            <a:avLst>
-              <a:gd name="adj" fmla="val 6000"/>
-            </a:avLst>
-          </a:prstGeom>
-          <a:solidFill>
-            <a:srgbClr val="FFFFFF"/>
-          </a:solidFill>
-          <a:ln w="19050">
-            <a:solidFill>
-              <a:srgbClr val="6C3BFF"/>
-            </a:solidFill>
-          </a:ln>
-        </p:spPr>
-        <p:txBody>
-          <a:bodyPr/>
-          <a:lstStyle/>
-          <a:p>
-            <a:endParaRPr/>
-          </a:p>
-        </p:txBody>
-      </p:sp>
-      <p:sp>
-        <p:nvSpPr>
-          <p:cNvPr id="620" name="N620"/>
-          <p:cNvSpPr/>
-          <p:nvPr/>
-        </p:nvSpPr>
-        <p:spPr>
-          <a:xfrm>
-            <a:off x="1219200" y="5308600"/>
-            <a:ext cx="9753600" cy="939800"/>
-          </a:xfrm>
-          <a:prstGeom prst="rect">
-            <a:avLst/>
-          </a:prstGeom>
-          <a:noFill/>
-          <a:ln>
-            <a:noFill/>
-          </a:ln>
-        </p:spPr>
-        <p:txBody>
-          <a:bodyPr wrap="square" lIns="45720" tIns="27432" rIns="45720" bIns="27432" anchor="ctr">
-            <a:normAutofit/>
-          </a:bodyPr>
-          <a:lstStyle/>
-          <a:p>
-            <a:pPr algn="ctr"/>
-            <a:r>
-              <a:rPr lang="en-US" sz="1250" b="0" i="0" dirty="0">
-                <a:solidFill>
-                  <a:srgbClr val="12101A"/>
-                </a:solidFill>
-              </a:rPr>
-              <a:t>score(u, i)  =  user vector  ·  item vector — trained with BPR; loss that pushes a real item's score above a random unseen one</a:t>
-            </a:r>
-          </a:p>
-        </p:txBody>
-      </p:sp>
-      <p:sp>
-        <p:nvSpPr>
-          <p:cNvPr id="3" name="Down Arrow 2">
+              <a:t>TAKEAWAY   </a:t>
+            </a:r>
+            <a:r>
+              <a:rPr lang="en-US" sz="1100" dirty="0">
+                <a:solidFill>
+                  <a:srgbClr val="2A2540"/>
+                </a:solidFill>
+              </a:rPr>
+              <a:t>Our "EMCDR wins data-rich pairs, degrades on thin-overlap targets" pattern matches the recurring finding across the EMCDR family</a:t>
+            </a:r>
+          </a:p>
+        </p:txBody>
+      </p:sp>
+      <p:graphicFrame>
+        <p:nvGraphicFramePr>
+          <p:cNvPr id="4" name="comptable">
             <a:extLst>
               <a:ext uri="{FF2B5EF4-FFF2-40B4-BE49-F238E27FC236}">
-                <a16:creationId xmlns:a16="http://schemas.microsoft.com/office/drawing/2014/main" id="{2D1BD31F-00F0-A74A-8C8B-1EE8B3FBEBDC}"/>
+                <a16:creationId xmlns:a16="http://schemas.microsoft.com/office/drawing/2014/main" id="{D4EEC87E-57F1-6E4F-8508-051FE7FF6D10}"/>
               </a:ext>
             </a:extLst>
           </p:cNvPr>
-          <p:cNvSpPr/>
-          <p:nvPr/>
-        </p:nvSpPr>
-        <p:spPr>
-          <a:xfrm>
-            <a:off x="7962900" y="4457700"/>
-            <a:ext cx="203200" cy="177800"/>
-          </a:xfrm>
-          <a:prstGeom prst="downArrow">
-            <a:avLst/>
-          </a:prstGeom>
-          <a:solidFill>
-            <a:srgbClr val="00C2A8"/>
-          </a:solidFill>
-          <a:ln w="19050" cap="flat" cmpd="sng" algn="ctr">
-            <a:noFill/>
-            <a:prstDash val="solid"/>
-            <a:miter lim="800000"/>
-          </a:ln>
-        </p:spPr>
-        <p:style>
-          <a:lnRef idx="2">
-            <a:schemeClr val="accent1">
-              <a:shade val="15000"/>
-            </a:schemeClr>
-          </a:lnRef>
-          <a:fillRef idx="1">
-            <a:schemeClr val="accent1"/>
-          </a:fillRef>
-          <a:effectRef idx="0">
-            <a:schemeClr val="accent1"/>
-          </a:effectRef>
-          <a:fontRef idx="minor">
-            <a:schemeClr val="lt1"/>
-          </a:fontRef>
-        </p:style>
-        <p:txBody>
-          <a:bodyPr vertOverflow="clip" horzOverflow="clip" rtlCol="0" anchor="t"/>
-          <a:lstStyle/>
-          <a:p>
-            <a:pPr algn="l"/>
-            <a:endParaRPr lang="en-IL"/>
-          </a:p>
-        </p:txBody>
-      </p:sp>
-      <p:sp>
-        <p:nvSpPr>
-          <p:cNvPr id="4" name="Rounded Rectangle 3">
-            <a:extLst>
-              <a:ext uri="{FF2B5EF4-FFF2-40B4-BE49-F238E27FC236}">
-                <a16:creationId xmlns:a16="http://schemas.microsoft.com/office/drawing/2014/main" id="{C6E5911F-187F-4541-80FC-65E89B3F09DF}"/>
-              </a:ext>
-            </a:extLst>
-          </p:cNvPr>
-          <p:cNvSpPr/>
-          <p:nvPr/>
-        </p:nvSpPr>
-        <p:spPr>
-          <a:xfrm>
-            <a:off x="6604000" y="4673600"/>
-            <a:ext cx="4368800" cy="355600"/>
-          </a:xfrm>
-          <a:prstGeom prst="roundRect">
-            <a:avLst/>
-          </a:prstGeom>
-          <a:solidFill>
-            <a:srgbClr val="00C2A8"/>
-          </a:solidFill>
-          <a:ln w="19050" cap="flat" cmpd="sng" algn="ctr">
-            <a:noFill/>
-            <a:prstDash val="solid"/>
-            <a:miter lim="800000"/>
-          </a:ln>
-        </p:spPr>
-        <p:style>
-          <a:lnRef idx="2">
-            <a:schemeClr val="accent1">
-              <a:shade val="15000"/>
-            </a:schemeClr>
-          </a:lnRef>
-          <a:fillRef idx="1">
-            <a:schemeClr val="accent1"/>
-          </a:fillRef>
-          <a:effectRef idx="0">
-            <a:schemeClr val="accent1"/>
-          </a:effectRef>
-          <a:fontRef idx="minor">
-            <a:schemeClr val="lt1"/>
-          </a:fontRef>
-        </p:style>
-        <p:txBody>
-          <a:bodyPr vertOverflow="clip" horzOverflow="clip" wrap="none" rtlCol="0" anchor="ctr" anchorCtr="0">
-            <a:noAutofit/>
-          </a:bodyPr>
-          <a:lstStyle/>
-          <a:p>
-            <a:pPr algn="l"/>
-            <a:r>
-              <a:rPr lang="en-US" sz="1300" b="1">
-                <a:solidFill>
-                  <a:srgbClr val="FFFFFF"/>
-                </a:solidFill>
-              </a:rPr>
-              <a:t>item vector  (64-d)</a:t>
-            </a:r>
-            <a:endParaRPr lang="en-IL" sz="1300" b="1">
-              <a:solidFill>
-                <a:srgbClr val="FFFFFF"/>
-              </a:solidFill>
-            </a:endParaRPr>
-          </a:p>
-        </p:txBody>
-      </p:sp>
-      <p:sp>
-        <p:nvSpPr>
-          <p:cNvPr id="610" name="N610"/>
-          <p:cNvSpPr/>
-          <p:nvPr/>
-        </p:nvSpPr>
-        <p:spPr>
-          <a:xfrm>
-            <a:off x="7861300" y="2794000"/>
-            <a:ext cx="406400" cy="279400"/>
-          </a:xfrm>
-          <a:prstGeom prst="rect">
-            <a:avLst/>
-          </a:prstGeom>
-          <a:noFill/>
-          <a:ln>
-            <a:noFill/>
-          </a:ln>
-        </p:spPr>
-        <p:txBody>
-          <a:bodyPr wrap="none" lIns="45720" tIns="27432" rIns="45720" bIns="27432" anchor="ctr" anchorCtr="0">
-            <a:noAutofit/>
-          </a:bodyPr>
-          <a:lstStyle/>
-          <a:p>
-            <a:pPr algn="ctr"/>
-            <a:r>
-              <a:rPr lang="en-US" b="1" i="0" dirty="0">
-                <a:solidFill>
-                  <a:srgbClr val="00C2A8"/>
-                </a:solidFill>
-              </a:rPr>
-              <a:t>+</a:t>
-            </a:r>
-          </a:p>
-        </p:txBody>
-      </p:sp>
-      <p:sp>
-        <p:nvSpPr>
-          <p:cNvPr id="613" name="N613"/>
-          <p:cNvSpPr/>
-          <p:nvPr/>
-        </p:nvSpPr>
-        <p:spPr>
-          <a:xfrm>
-            <a:off x="7861300" y="3327400"/>
-            <a:ext cx="406400" cy="279400"/>
-          </a:xfrm>
-          <a:prstGeom prst="rect">
-            <a:avLst/>
-          </a:prstGeom>
-          <a:noFill/>
-          <a:ln>
-            <a:noFill/>
-          </a:ln>
-        </p:spPr>
-        <p:txBody>
-          <a:bodyPr wrap="none" lIns="45720" tIns="27432" rIns="45720" bIns="27432" anchor="ctr" anchorCtr="0">
-            <a:noAutofit/>
-          </a:bodyPr>
-          <a:lstStyle/>
-          <a:p>
-            <a:pPr algn="ctr"/>
-            <a:r>
-              <a:rPr lang="en-US" b="1" i="0" dirty="0">
-                <a:solidFill>
-                  <a:srgbClr val="00C2A8"/>
-                </a:solidFill>
-              </a:rPr>
-              <a:t>+</a:t>
-            </a:r>
-          </a:p>
-        </p:txBody>
-      </p:sp>
-      <p:sp>
-        <p:nvSpPr>
-          <p:cNvPr id="616" name="N616"/>
-          <p:cNvSpPr/>
-          <p:nvPr/>
-        </p:nvSpPr>
-        <p:spPr>
-          <a:xfrm>
-            <a:off x="7861300" y="3860800"/>
-            <a:ext cx="406400" cy="279400"/>
-          </a:xfrm>
-          <a:prstGeom prst="rect">
-            <a:avLst/>
-          </a:prstGeom>
-          <a:noFill/>
-          <a:ln>
-            <a:noFill/>
-          </a:ln>
-        </p:spPr>
-        <p:txBody>
-          <a:bodyPr wrap="none" lIns="45720" tIns="27432" rIns="45720" bIns="27432" anchor="ctr" anchorCtr="0">
-            <a:noAutofit/>
-          </a:bodyPr>
-          <a:lstStyle/>
-          <a:p>
-            <a:pPr algn="ctr"/>
-            <a:r>
-              <a:rPr lang="en-US" b="1" i="0" dirty="0">
-                <a:solidFill>
-                  <a:srgbClr val="00C2A8"/>
-                </a:solidFill>
-              </a:rPr>
-              <a:t>+</a:t>
-            </a:r>
-          </a:p>
-        </p:txBody>
-      </p:sp>
+          <p:cNvGraphicFramePr>
+            <a:graphicFrameLocks noGrp="1"/>
+          </p:cNvGraphicFramePr>
+          <p:nvPr>
+            <p:extLst>
+              <p:ext uri="{D42A27DB-BD31-4B8C-83A1-F6EECF244321}">
+                <p14:modId xmlns:p14="http://schemas.microsoft.com/office/powerpoint/2010/main" val="3009261963"/>
+              </p:ext>
+            </p:extLst>
+          </p:nvPr>
+        </p:nvGraphicFramePr>
+        <p:xfrm>
+          <a:off x="762000" y="1676400"/>
+          <a:ext cx="10668000" cy="3733800"/>
+        </p:xfrm>
+        <a:graphic>
+          <a:graphicData uri="http://schemas.openxmlformats.org/drawingml/2006/table">
+            <a:tbl>
+              <a:tblPr firstRow="1" bandRow="1">
+                <a:tableStyleId>{5C22544A-7EE6-4342-B048-85BDC9FD1C3A}</a:tableStyleId>
+              </a:tblPr>
+              <a:tblGrid>
+                <a:gridCol w="1778000">
+                  <a:extLst>
+                    <a:ext uri="{9D8B030D-6E8A-4147-A177-3AD203B41FA5}">
+                      <a16:colId xmlns:a16="http://schemas.microsoft.com/office/drawing/2014/main" val="3128485900"/>
+                    </a:ext>
+                  </a:extLst>
+                </a:gridCol>
+                <a:gridCol w="2095500">
+                  <a:extLst>
+                    <a:ext uri="{9D8B030D-6E8A-4147-A177-3AD203B41FA5}">
+                      <a16:colId xmlns:a16="http://schemas.microsoft.com/office/drawing/2014/main" val="1492734742"/>
+                    </a:ext>
+                  </a:extLst>
+                </a:gridCol>
+                <a:gridCol w="2540000">
+                  <a:extLst>
+                    <a:ext uri="{9D8B030D-6E8A-4147-A177-3AD203B41FA5}">
+                      <a16:colId xmlns:a16="http://schemas.microsoft.com/office/drawing/2014/main" val="47954451"/>
+                    </a:ext>
+                  </a:extLst>
+                </a:gridCol>
+                <a:gridCol w="4254500">
+                  <a:extLst>
+                    <a:ext uri="{9D8B030D-6E8A-4147-A177-3AD203B41FA5}">
+                      <a16:colId xmlns:a16="http://schemas.microsoft.com/office/drawing/2014/main" val="12291592"/>
+                    </a:ext>
+                  </a:extLst>
+                </a:gridCol>
+              </a:tblGrid>
+              <a:tr h="533400">
+                <a:tc>
+                  <a:txBody>
+                    <a:bodyPr/>
+                    <a:lstStyle/>
+                    <a:p>
+                      <a:pPr algn="l"/>
+                      <a:r>
+                        <a:rPr lang="en-IL" sz="1300" b="1">
+                          <a:solidFill>
+                            <a:srgbClr val="FFFFFF"/>
+                          </a:solidFill>
+                          <a:latin typeface="Arial"/>
+                          <a:cs typeface="Arial"/>
+                        </a:rPr>
+                        <a:t>Study</a:t>
+                      </a:r>
+                    </a:p>
+                  </a:txBody>
+                  <a:tcPr anchor="ctr">
+                    <a:solidFill>
+                      <a:srgbClr val="6C3BFF"/>
+                    </a:solidFill>
+                  </a:tcPr>
+                </a:tc>
+                <a:tc>
+                  <a:txBody>
+                    <a:bodyPr/>
+                    <a:lstStyle/>
+                    <a:p>
+                      <a:pPr algn="l"/>
+                      <a:r>
+                        <a:rPr lang="en-IL" sz="1300" b="1">
+                          <a:solidFill>
+                            <a:srgbClr val="FFFFFF"/>
+                          </a:solidFill>
+                          <a:latin typeface="Arial"/>
+                          <a:cs typeface="Arial"/>
+                        </a:rPr>
+                        <a:t>Setting</a:t>
+                      </a:r>
+                    </a:p>
+                  </a:txBody>
+                  <a:tcPr anchor="ctr">
+                    <a:solidFill>
+                      <a:srgbClr val="6C3BFF"/>
+                    </a:solidFill>
+                  </a:tcPr>
+                </a:tc>
+                <a:tc>
+                  <a:txBody>
+                    <a:bodyPr/>
+                    <a:lstStyle/>
+                    <a:p>
+                      <a:pPr algn="l"/>
+                      <a:r>
+                        <a:rPr lang="en-IL" sz="1300" b="1">
+                          <a:solidFill>
+                            <a:srgbClr val="FFFFFF"/>
+                          </a:solidFill>
+                          <a:latin typeface="Arial"/>
+                          <a:cs typeface="Arial"/>
+                        </a:rPr>
+                        <a:t>Reported result</a:t>
+                      </a:r>
+                    </a:p>
+                  </a:txBody>
+                  <a:tcPr anchor="ctr">
+                    <a:solidFill>
+                      <a:srgbClr val="6C3BFF"/>
+                    </a:solidFill>
+                  </a:tcPr>
+                </a:tc>
+                <a:tc>
+                  <a:txBody>
+                    <a:bodyPr/>
+                    <a:lstStyle/>
+                    <a:p>
+                      <a:pPr algn="l"/>
+                      <a:r>
+                        <a:rPr lang="en-IL" sz="1300" b="1">
+                          <a:solidFill>
+                            <a:srgbClr val="FFFFFF"/>
+                          </a:solidFill>
+                          <a:latin typeface="Arial"/>
+                          <a:cs typeface="Arial"/>
+                        </a:rPr>
+                        <a:t>Read vs. ours</a:t>
+                      </a:r>
+                    </a:p>
+                  </a:txBody>
+                  <a:tcPr anchor="ctr">
+                    <a:solidFill>
+                      <a:srgbClr val="6C3BFF"/>
+                    </a:solidFill>
+                  </a:tcPr>
+                </a:tc>
+                <a:extLst>
+                  <a:ext uri="{0D108BD9-81ED-4DB2-BD59-A6C34878D82A}">
+                    <a16:rowId xmlns:a16="http://schemas.microsoft.com/office/drawing/2014/main" val="2971082578"/>
+                  </a:ext>
+                </a:extLst>
+              </a:tr>
+              <a:tr h="1066800">
+                <a:tc>
+                  <a:txBody>
+                    <a:bodyPr/>
+                    <a:lstStyle/>
+                    <a:p>
+                      <a:pPr algn="l"/>
+                      <a:r>
+                        <a:rPr lang="en-IL" sz="1300" b="1">
+                          <a:solidFill>
+                            <a:srgbClr val="6C3BFF"/>
+                          </a:solidFill>
+                          <a:latin typeface="Arial"/>
+                          <a:cs typeface="Arial"/>
+                        </a:rPr>
+                        <a:t>Ours (EMCDR)</a:t>
+                      </a:r>
+                    </a:p>
+                  </a:txBody>
+                  <a:tcPr anchor="ctr">
+                    <a:solidFill>
+                      <a:srgbClr val="EDEAF7"/>
+                    </a:solidFill>
+                  </a:tcPr>
+                </a:tc>
+                <a:tc>
+                  <a:txBody>
+                    <a:bodyPr/>
+                    <a:lstStyle/>
+                    <a:p>
+                      <a:pPr algn="l"/>
+                      <a:r>
+                        <a:rPr lang="en-IL" sz="1300" b="0">
+                          <a:solidFill>
+                            <a:srgbClr val="12101A"/>
+                          </a:solidFill>
+                          <a:latin typeface="Arial"/>
+                          <a:cs typeface="Arial"/>
+                        </a:rPr>
+                        <a:t>Amazon 2023 · 8 pairs · LOO + 100 neg</a:t>
+                      </a:r>
+                    </a:p>
+                  </a:txBody>
+                  <a:tcPr anchor="ctr">
+                    <a:solidFill>
+                      <a:srgbClr val="EDEAF7"/>
+                    </a:solidFill>
+                  </a:tcPr>
+                </a:tc>
+                <a:tc>
+                  <a:txBody>
+                    <a:bodyPr/>
+                    <a:lstStyle/>
+                    <a:p>
+                      <a:pPr algn="l"/>
+                      <a:r>
+                        <a:rPr lang="en-IL" sz="1300" b="0">
+                          <a:solidFill>
+                            <a:srgbClr val="12101A"/>
+                          </a:solidFill>
+                          <a:latin typeface="Arial"/>
+                          <a:cs typeface="Arial"/>
+                        </a:rPr>
+                        <a:t>R@10 0.30–0.40 (rich) · N@10 ~0.19</a:t>
+                      </a:r>
+                    </a:p>
+                  </a:txBody>
+                  <a:tcPr anchor="ctr">
+                    <a:solidFill>
+                      <a:srgbClr val="EDEAF7"/>
+                    </a:solidFill>
+                  </a:tcPr>
+                </a:tc>
+                <a:tc>
+                  <a:txBody>
+                    <a:bodyPr/>
+                    <a:lstStyle/>
+                    <a:p>
+                      <a:pPr algn="l"/>
+                      <a:r>
+                        <a:rPr lang="en-IL" sz="1300" b="0">
+                          <a:solidFill>
+                            <a:srgbClr val="12101A"/>
+                          </a:solidFill>
+                          <a:latin typeface="Arial"/>
+                          <a:cs typeface="Arial"/>
+                        </a:rPr>
+                        <a:t>—</a:t>
+                      </a:r>
+                    </a:p>
+                  </a:txBody>
+                  <a:tcPr anchor="ctr">
+                    <a:solidFill>
+                      <a:srgbClr val="EDEAF7"/>
+                    </a:solidFill>
+                  </a:tcPr>
+                </a:tc>
+                <a:extLst>
+                  <a:ext uri="{0D108BD9-81ED-4DB2-BD59-A6C34878D82A}">
+                    <a16:rowId xmlns:a16="http://schemas.microsoft.com/office/drawing/2014/main" val="466276860"/>
+                  </a:ext>
+                </a:extLst>
+              </a:tr>
+              <a:tr h="1066800">
+                <a:tc>
+                  <a:txBody>
+                    <a:bodyPr/>
+                    <a:lstStyle/>
+                    <a:p>
+                      <a:pPr algn="l"/>
+                      <a:r>
+                        <a:rPr lang="en-IL" sz="1300" b="1" dirty="0">
+                          <a:solidFill>
+                            <a:srgbClr val="12101A"/>
+                          </a:solidFill>
+                          <a:latin typeface="Arial"/>
+                          <a:cs typeface="Arial"/>
+                        </a:rPr>
+                        <a:t>Training-free cold-start (2025)</a:t>
+                      </a:r>
+                    </a:p>
+                  </a:txBody>
+                  <a:tcPr anchor="ctr">
+                    <a:solidFill>
+                      <a:srgbClr val="FFFFFF"/>
+                    </a:solidFill>
+                  </a:tcPr>
+                </a:tc>
+                <a:tc>
+                  <a:txBody>
+                    <a:bodyPr/>
+                    <a:lstStyle/>
+                    <a:p>
+                      <a:pPr algn="l"/>
+                      <a:r>
+                        <a:rPr lang="en-IL" sz="1300" b="0">
+                          <a:solidFill>
+                            <a:srgbClr val="2A2540"/>
+                          </a:solidFill>
+                          <a:latin typeface="Arial"/>
+                          <a:cs typeface="Arial"/>
+                        </a:rPr>
+                        <a:t>Same source→target-catalog setup, m′=1</a:t>
+                      </a:r>
+                    </a:p>
+                  </a:txBody>
+                  <a:tcPr anchor="ctr">
+                    <a:solidFill>
+                      <a:srgbClr val="FFFFFF"/>
+                    </a:solidFill>
+                  </a:tcPr>
+                </a:tc>
+                <a:tc>
+                  <a:txBody>
+                    <a:bodyPr/>
+                    <a:lstStyle/>
+                    <a:p>
+                      <a:pPr algn="l"/>
+                      <a:r>
+                        <a:rPr lang="en-IL" sz="1300" b="0" dirty="0">
+                          <a:solidFill>
+                            <a:srgbClr val="2A2540"/>
+                          </a:solidFill>
+                          <a:latin typeface="Arial"/>
+                          <a:cs typeface="Arial"/>
+                        </a:rPr>
+                        <a:t>Books→Movie R 0.28–0.31 / N 0.31–0.33</a:t>
+                      </a:r>
+                    </a:p>
+                  </a:txBody>
+                  <a:tcPr anchor="ctr">
+                    <a:solidFill>
+                      <a:srgbClr val="FFFFFF"/>
+                    </a:solidFill>
+                  </a:tcPr>
+                </a:tc>
+                <a:tc>
+                  <a:txBody>
+                    <a:bodyPr/>
+                    <a:lstStyle/>
+                    <a:p>
+                      <a:pPr algn="l"/>
+                      <a:r>
+                        <a:rPr lang="en-IL" sz="1300" b="0">
+                          <a:solidFill>
+                            <a:srgbClr val="2A2540"/>
+                          </a:solidFill>
+                          <a:latin typeface="Arial"/>
+                          <a:cs typeface="Arial"/>
+                        </a:rPr>
+                        <a:t>We edge them on Recall; below on NDCG (different candidate pool)</a:t>
+                      </a:r>
+                    </a:p>
+                  </a:txBody>
+                  <a:tcPr anchor="ctr">
+                    <a:solidFill>
+                      <a:srgbClr val="FFFFFF"/>
+                    </a:solidFill>
+                  </a:tcPr>
+                </a:tc>
+                <a:extLst>
+                  <a:ext uri="{0D108BD9-81ED-4DB2-BD59-A6C34878D82A}">
+                    <a16:rowId xmlns:a16="http://schemas.microsoft.com/office/drawing/2014/main" val="1431275297"/>
+                  </a:ext>
+                </a:extLst>
+              </a:tr>
+              <a:tr h="1066800">
+                <a:tc>
+                  <a:txBody>
+                    <a:bodyPr/>
+                    <a:lstStyle/>
+                    <a:p>
+                      <a:pPr algn="l"/>
+                      <a:r>
+                        <a:rPr lang="en-IL" sz="1300" b="1" dirty="0">
+                          <a:solidFill>
+                            <a:srgbClr val="12101A"/>
+                          </a:solidFill>
+                          <a:latin typeface="Arial"/>
+                          <a:cs typeface="Arial"/>
+                        </a:rPr>
+                        <a:t>SSCDR (CIKM 2019)</a:t>
+                      </a:r>
+                    </a:p>
+                  </a:txBody>
+                  <a:tcPr anchor="ctr">
+                    <a:solidFill>
+                      <a:srgbClr val="FFFFFF"/>
+                    </a:solidFill>
+                  </a:tcPr>
+                </a:tc>
+                <a:tc>
+                  <a:txBody>
+                    <a:bodyPr/>
+                    <a:lstStyle/>
+                    <a:p>
+                      <a:pPr algn="l"/>
+                      <a:r>
+                        <a:rPr lang="en-IL" sz="1300" b="0">
+                          <a:solidFill>
+                            <a:srgbClr val="2A2540"/>
+                          </a:solidFill>
+                          <a:latin typeface="Arial"/>
+                          <a:cs typeface="Arial"/>
+                        </a:rPr>
+                        <a:t>Cross-domain Amazon, cold-start</a:t>
+                      </a:r>
+                    </a:p>
+                  </a:txBody>
+                  <a:tcPr anchor="ctr">
+                    <a:solidFill>
+                      <a:srgbClr val="FFFFFF"/>
+                    </a:solidFill>
+                  </a:tcPr>
+                </a:tc>
+                <a:tc>
+                  <a:txBody>
+                    <a:bodyPr/>
+                    <a:lstStyle/>
+                    <a:p>
+                      <a:pPr algn="l"/>
+                      <a:r>
+                        <a:rPr lang="en-IL" sz="1300" b="0">
+                          <a:solidFill>
+                            <a:srgbClr val="2A2540"/>
+                          </a:solidFill>
+                          <a:latin typeface="Arial"/>
+                          <a:cs typeface="Arial"/>
+                        </a:rPr>
+                        <a:t>Recall ~0.21 avg (vs. ~0.15 prior)</a:t>
+                      </a:r>
+                    </a:p>
+                  </a:txBody>
+                  <a:tcPr anchor="ctr">
+                    <a:solidFill>
+                      <a:srgbClr val="FFFFFF"/>
+                    </a:solidFill>
+                  </a:tcPr>
+                </a:tc>
+                <a:tc>
+                  <a:txBody>
+                    <a:bodyPr/>
+                    <a:lstStyle/>
+                    <a:p>
+                      <a:pPr algn="l"/>
+                      <a:r>
+                        <a:rPr lang="en-IL" sz="1300" b="0" dirty="0">
+                          <a:solidFill>
+                            <a:srgbClr val="2A2540"/>
+                          </a:solidFill>
+                          <a:latin typeface="Arial"/>
+                          <a:cs typeface="Arial"/>
+                        </a:rPr>
+                        <a:t>Rich pairs clear it; our sparse V-Games pairs land in this band</a:t>
+                      </a:r>
+                    </a:p>
+                  </a:txBody>
+                  <a:tcPr anchor="ctr">
+                    <a:solidFill>
+                      <a:srgbClr val="FFFFFF"/>
+                    </a:solidFill>
+                  </a:tcPr>
+                </a:tc>
+                <a:extLst>
+                  <a:ext uri="{0D108BD9-81ED-4DB2-BD59-A6C34878D82A}">
+                    <a16:rowId xmlns:a16="http://schemas.microsoft.com/office/drawing/2014/main" val="2727748172"/>
+                  </a:ext>
+                </a:extLst>
+              </a:tr>
+            </a:tbl>
+          </a:graphicData>
+        </a:graphic>
+      </p:graphicFrame>
     </p:spTree>
     <p:extLst>
       <p:ext uri="{BB962C8B-B14F-4D97-AF65-F5344CB8AC3E}">
-        <p14:creationId xmlns:p14="http://schemas.microsoft.com/office/powerpoint/2010/main" val="2646129204"/>
+        <p14:creationId xmlns:p14="http://schemas.microsoft.com/office/powerpoint/2010/main" val="2936333776"/>
       </p:ext>
     </p:extLst>
   </p:cSld>
@@ -5148,7 +4607,7 @@
           <p:cNvPr id="2" name="Title 1">
             <a:extLst>
               <a:ext uri="{FF2B5EF4-FFF2-40B4-BE49-F238E27FC236}">
-                <a16:creationId xmlns:a16="http://schemas.microsoft.com/office/drawing/2014/main" id="{9073ADC1-0E06-F17E-9A0B-DC64D22FC011}"/>
+                <a16:creationId xmlns:a16="http://schemas.microsoft.com/office/drawing/2014/main" id="{3CD55913-B6B9-C4CF-884E-5D6D090155A9}"/>
               </a:ext>
             </a:extLst>
           </p:cNvPr>
@@ -5161,21 +4620,19 @@
         </p:nvSpPr>
         <p:spPr/>
         <p:txBody>
-          <a:bodyPr>
-            <a:normAutofit fontScale="90000"/>
-          </a:bodyPr>
+          <a:bodyPr/>
           <a:lstStyle/>
           <a:p>
             <a:pPr>
               <a:buNone/>
             </a:pPr>
             <a:r>
-              <a:rPr lang="en-US" sz="1400" b="1" dirty="0">
-                <a:solidFill>
-                  <a:srgbClr val="6C3BFF"/>
-                </a:solidFill>
-              </a:rPr>
-              <a:t>STAGE 2</a:t>
+              <a:rPr lang="en-US" sz="2000" b="1" dirty="0">
+                <a:solidFill>
+                  <a:srgbClr val="00C2A8"/>
+                </a:solidFill>
+              </a:rPr>
+              <a:t>→ TO THE NOTEBOOK</a:t>
             </a:r>
           </a:p>
           <a:p>
@@ -5184,595 +4641,42 @@
             </a:pPr>
             <a:r>
               <a:rPr lang="en-US" dirty="0"/>
-              <a:t>One small linear map translates source taste into the target space</a:t>
-            </a:r>
-          </a:p>
-        </p:txBody>
-      </p:sp>
-      <p:sp>
-        <p:nvSpPr>
-          <p:cNvPr id="600" name="l600"/>
-          <p:cNvSpPr/>
-          <p:nvPr/>
-        </p:nvSpPr>
-        <p:spPr>
-          <a:xfrm>
-            <a:off x="762000" y="1905000"/>
-            <a:ext cx="3810000" cy="279400"/>
-          </a:xfrm>
-          <a:prstGeom prst="rect">
-            <a:avLst/>
-          </a:prstGeom>
-          <a:noFill/>
-        </p:spPr>
-        <p:txBody>
-          <a:bodyPr lIns="0" tIns="0" rIns="0" bIns="0" rtlCol="0" anchor="ctr">
-            <a:normAutofit/>
-          </a:bodyPr>
-          <a:lstStyle/>
-          <a:p>
-            <a:pPr algn="l">
+              <a:t>Baseline results</a:t>
+            </a:r>
+          </a:p>
+        </p:txBody>
+      </p:sp>
+      <p:sp>
+        <p:nvSpPr>
+          <p:cNvPr id="5" name="Text Placeholder 4">
+            <a:extLst>
+              <a:ext uri="{FF2B5EF4-FFF2-40B4-BE49-F238E27FC236}">
+                <a16:creationId xmlns:a16="http://schemas.microsoft.com/office/drawing/2014/main" id="{BBB3F263-D268-D781-2F25-AA2E0FB1F6F6}"/>
+              </a:ext>
+            </a:extLst>
+          </p:cNvPr>
+          <p:cNvSpPr>
+            <a:spLocks noGrp="1"/>
+          </p:cNvSpPr>
+          <p:nvPr>
+            <p:ph type="body" idx="1"/>
+          </p:nvPr>
+        </p:nvSpPr>
+        <p:spPr/>
+        <p:txBody>
+          <a:bodyPr/>
+          <a:lstStyle/>
+          <a:p>
+            <a:pPr>
               <a:buNone/>
             </a:pPr>
             <a:r>
-              <a:rPr lang="en-US" sz="1100" b="1" i="0" dirty="0">
-                <a:solidFill>
-                  <a:srgbClr val="6E6A7C"/>
-                </a:solidFill>
-              </a:rPr>
-              <a:t>FROZEN INPUTS — overlap users only</a:t>
-            </a:r>
-          </a:p>
-        </p:txBody>
-      </p:sp>
-      <p:sp>
-        <p:nvSpPr>
-          <p:cNvPr id="601" name="b601"/>
-          <p:cNvSpPr/>
-          <p:nvPr/>
-        </p:nvSpPr>
-        <p:spPr>
-          <a:xfrm>
-            <a:off x="762000" y="2286000"/>
-            <a:ext cx="2921000" cy="1066800"/>
-          </a:xfrm>
-          <a:prstGeom prst="roundRect">
-            <a:avLst>
-              <a:gd name="adj" fmla="val 8"/>
-            </a:avLst>
-          </a:prstGeom>
-          <a:solidFill>
-            <a:srgbClr val="EDEAF7"/>
-          </a:solidFill>
-          <a:ln>
-            <a:noFill/>
-          </a:ln>
-        </p:spPr>
-        <p:txBody>
-          <a:bodyPr lIns="73152" tIns="36576" rIns="73152" bIns="36576" rtlCol="0" anchor="ctr">
-            <a:normAutofit/>
-          </a:bodyPr>
-          <a:lstStyle/>
-          <a:p>
-            <a:pPr algn="ctr">
-              <a:buNone/>
-            </a:pPr>
-            <a:r>
-              <a:rPr lang="en-US" sz="1600" b="1" i="0" dirty="0">
-                <a:solidFill>
-                  <a:srgbClr val="6C3BFF"/>
-                </a:solidFill>
-                <a:latin typeface="Consolas"/>
-              </a:rPr>
-              <a:t>U_src</a:t>
-            </a:r>
-          </a:p>
-          <a:p>
-            <a:pPr algn="ctr">
-              <a:buNone/>
-            </a:pPr>
-            <a:r>
-              <a:rPr lang="en-US" sz="1150" b="0" i="0" dirty="0">
-                <a:solidFill>
-                  <a:srgbClr val="2A2540"/>
-                </a:solidFill>
-              </a:rPr>
-              <a:t>source user vectors</a:t>
-            </a:r>
-          </a:p>
-        </p:txBody>
-      </p:sp>
-      <p:sp>
-        <p:nvSpPr>
-          <p:cNvPr id="602" name="b602"/>
-          <p:cNvSpPr/>
-          <p:nvPr/>
-        </p:nvSpPr>
-        <p:spPr>
-          <a:xfrm>
-            <a:off x="762000" y="3657600"/>
-            <a:ext cx="2921000" cy="1066800"/>
-          </a:xfrm>
-          <a:prstGeom prst="roundRect">
-            <a:avLst>
-              <a:gd name="adj" fmla="val 8"/>
-            </a:avLst>
-          </a:prstGeom>
-          <a:solidFill>
-            <a:srgbClr val="EDEAF7"/>
-          </a:solidFill>
-          <a:ln>
-            <a:noFill/>
-          </a:ln>
-        </p:spPr>
-        <p:txBody>
-          <a:bodyPr lIns="73152" tIns="36576" rIns="73152" bIns="36576" rtlCol="0" anchor="ctr">
-            <a:normAutofit/>
-          </a:bodyPr>
-          <a:lstStyle/>
-          <a:p>
-            <a:pPr algn="ctr">
-              <a:buNone/>
-            </a:pPr>
-            <a:r>
-              <a:rPr lang="en-US" sz="1600" b="1" i="0" dirty="0">
-                <a:solidFill>
-                  <a:srgbClr val="00C2A8"/>
-                </a:solidFill>
-                <a:latin typeface="Consolas"/>
-              </a:rPr>
-              <a:t>U_tgt</a:t>
-            </a:r>
-          </a:p>
-          <a:p>
-            <a:pPr algn="ctr">
-              <a:buNone/>
-            </a:pPr>
-            <a:r>
-              <a:rPr lang="en-US" sz="1150" b="0" i="0" dirty="0">
-                <a:solidFill>
-                  <a:srgbClr val="2A2540"/>
-                </a:solidFill>
-              </a:rPr>
-              <a:t>target user vectors</a:t>
-            </a:r>
-          </a:p>
-        </p:txBody>
-      </p:sp>
-      <p:sp>
-        <p:nvSpPr>
-          <p:cNvPr id="603" name="l603"/>
-          <p:cNvSpPr/>
-          <p:nvPr/>
-        </p:nvSpPr>
-        <p:spPr>
-          <a:xfrm>
-            <a:off x="762000" y="4800600"/>
-            <a:ext cx="2921000" cy="254000"/>
-          </a:xfrm>
-          <a:prstGeom prst="rect">
-            <a:avLst/>
-          </a:prstGeom>
-          <a:noFill/>
-        </p:spPr>
-        <p:txBody>
-          <a:bodyPr lIns="0" tIns="0" rIns="0" bIns="0" rtlCol="0" anchor="ctr">
-            <a:normAutofit/>
-          </a:bodyPr>
-          <a:lstStyle/>
-          <a:p>
-            <a:pPr algn="l">
-              <a:buNone/>
-            </a:pPr>
-            <a:r>
-              <a:rPr lang="en-US" sz="1000" b="0" i="1" dirty="0">
-                <a:solidFill>
-                  <a:srgbClr val="6E6A7C"/>
-                </a:solidFill>
-              </a:rPr>
-              <a:t>both detached — gradients off</a:t>
-            </a:r>
-          </a:p>
-        </p:txBody>
-      </p:sp>
-      <p:sp>
-        <p:nvSpPr>
-          <p:cNvPr id="604" name="a604"/>
-          <p:cNvSpPr/>
-          <p:nvPr/>
-        </p:nvSpPr>
-        <p:spPr>
-          <a:xfrm>
-            <a:off x="3810000" y="2667000"/>
-            <a:ext cx="711200" cy="355600"/>
-          </a:xfrm>
-          <a:prstGeom prst="rightArrow">
-            <a:avLst/>
-          </a:prstGeom>
-          <a:solidFill>
-            <a:srgbClr val="6C3BFF"/>
-          </a:solidFill>
-          <a:ln>
-            <a:noFill/>
-          </a:ln>
-        </p:spPr>
-        <p:txBody>
-          <a:bodyPr/>
-          <a:lstStyle/>
-          <a:p>
-            <a:endParaRPr lang="en-US"/>
-          </a:p>
-        </p:txBody>
-      </p:sp>
-      <p:sp>
-        <p:nvSpPr>
-          <p:cNvPr id="605" name="a605"/>
-          <p:cNvSpPr/>
-          <p:nvPr/>
-        </p:nvSpPr>
-        <p:spPr>
-          <a:xfrm>
-            <a:off x="3810000" y="4038600"/>
-            <a:ext cx="711200" cy="355600"/>
-          </a:xfrm>
-          <a:prstGeom prst="rightArrow">
-            <a:avLst/>
-          </a:prstGeom>
-          <a:solidFill>
-            <a:srgbClr val="00C2A8"/>
-          </a:solidFill>
-          <a:ln>
-            <a:noFill/>
-          </a:ln>
-        </p:spPr>
-        <p:txBody>
-          <a:bodyPr/>
-          <a:lstStyle/>
-          <a:p>
-            <a:endParaRPr lang="en-US"/>
-          </a:p>
-        </p:txBody>
-      </p:sp>
-      <p:sp>
-        <p:nvSpPr>
-          <p:cNvPr id="606" name="b606"/>
-          <p:cNvSpPr/>
-          <p:nvPr/>
-        </p:nvSpPr>
-        <p:spPr>
-          <a:xfrm>
-            <a:off x="4724400" y="2540000"/>
-            <a:ext cx="2489200" cy="2184400"/>
-          </a:xfrm>
-          <a:prstGeom prst="roundRect">
-            <a:avLst>
-              <a:gd name="adj" fmla="val 12"/>
-            </a:avLst>
-          </a:prstGeom>
-          <a:solidFill>
-            <a:srgbClr val="6C3BFF"/>
-          </a:solidFill>
-          <a:ln>
-            <a:noFill/>
-          </a:ln>
-        </p:spPr>
-        <p:txBody>
-          <a:bodyPr lIns="73152" tIns="36576" rIns="73152" bIns="36576" rtlCol="0" anchor="ctr">
-            <a:normAutofit/>
-          </a:bodyPr>
-          <a:lstStyle/>
-          <a:p>
-            <a:pPr algn="ctr">
-              <a:buNone/>
-            </a:pPr>
-            <a:r>
-              <a:rPr lang="en-US" sz="3200" b="1" i="1" dirty="0">
-                <a:solidFill>
-                  <a:srgbClr val="FFFFFF"/>
-                </a:solidFill>
-              </a:rPr>
-              <a:t>f</a:t>
-            </a:r>
-          </a:p>
-          <a:p>
-            <a:pPr algn="ctr">
-              <a:buNone/>
-            </a:pPr>
-            <a:r>
-              <a:rPr lang="en-US" sz="1400" b="1" i="0" dirty="0">
-                <a:solidFill>
-                  <a:srgbClr val="FFFFFF"/>
-                </a:solidFill>
-                <a:latin typeface="Consolas"/>
-              </a:rPr>
-              <a:t>f(x) = W x + b</a:t>
-            </a:r>
-          </a:p>
-          <a:p>
-            <a:pPr algn="ctr">
-              <a:buNone/>
-            </a:pPr>
-            <a:r>
-              <a:rPr lang="en-US" sz="1050" b="0" i="0" dirty="0">
-                <a:solidFill>
-                  <a:srgbClr val="E7DEFF"/>
-                </a:solidFill>
-              </a:rPr>
-              <a:t>one linear layer · ~4.2k params</a:t>
-            </a:r>
-          </a:p>
-        </p:txBody>
-      </p:sp>
-      <p:sp>
-        <p:nvSpPr>
-          <p:cNvPr id="607" name="l607"/>
-          <p:cNvSpPr/>
-          <p:nvPr/>
-        </p:nvSpPr>
-        <p:spPr>
-          <a:xfrm>
-            <a:off x="4724400" y="4800600"/>
-            <a:ext cx="2489200" cy="279400"/>
-          </a:xfrm>
-          <a:prstGeom prst="rect">
-            <a:avLst/>
-          </a:prstGeom>
-          <a:noFill/>
-        </p:spPr>
-        <p:txBody>
-          <a:bodyPr lIns="0" tIns="0" rIns="0" bIns="0" rtlCol="0" anchor="ctr">
-            <a:normAutofit/>
-          </a:bodyPr>
-          <a:lstStyle/>
-          <a:p>
-            <a:pPr algn="ctr">
-              <a:buNone/>
-            </a:pPr>
-            <a:r>
-              <a:rPr lang="en-US" sz="1150" b="1" i="0" dirty="0">
-                <a:solidFill>
-                  <a:srgbClr val="6C3BFF"/>
-                </a:solidFill>
-              </a:rPr>
-              <a:t>learns f(U_src) ≈ U_tgt</a:t>
-            </a:r>
-          </a:p>
-        </p:txBody>
-      </p:sp>
-      <p:sp>
-        <p:nvSpPr>
-          <p:cNvPr id="608" name="a608"/>
-          <p:cNvSpPr/>
-          <p:nvPr/>
-        </p:nvSpPr>
-        <p:spPr>
-          <a:xfrm>
-            <a:off x="7340600" y="3454400"/>
-            <a:ext cx="508000" cy="355600"/>
-          </a:xfrm>
-          <a:prstGeom prst="rightArrow">
-            <a:avLst/>
-          </a:prstGeom>
-          <a:solidFill>
-            <a:srgbClr val="6E6A7C"/>
-          </a:solidFill>
-          <a:ln>
-            <a:noFill/>
-          </a:ln>
-        </p:spPr>
-        <p:txBody>
-          <a:bodyPr/>
-          <a:lstStyle/>
-          <a:p>
-            <a:endParaRPr lang="en-US"/>
-          </a:p>
-        </p:txBody>
-      </p:sp>
-      <p:sp>
-        <p:nvSpPr>
-          <p:cNvPr id="609" name="b609"/>
-          <p:cNvSpPr/>
-          <p:nvPr/>
-        </p:nvSpPr>
-        <p:spPr>
-          <a:xfrm>
-            <a:off x="7975600" y="2286000"/>
-            <a:ext cx="3454400" cy="2794000"/>
-          </a:xfrm>
-          <a:prstGeom prst="roundRect">
-            <a:avLst>
-              <a:gd name="adj" fmla="val 8"/>
-            </a:avLst>
-          </a:prstGeom>
-          <a:solidFill>
-            <a:srgbClr val="FFFFFF"/>
-          </a:solidFill>
-          <a:ln w="12700">
-            <a:solidFill>
-              <a:srgbClr val="E3DEF5"/>
-            </a:solidFill>
-          </a:ln>
-        </p:spPr>
-        <p:txBody>
-          <a:bodyPr lIns="73152" tIns="36576" rIns="73152" bIns="36576" rtlCol="0" anchor="ctr">
-            <a:normAutofit/>
-          </a:bodyPr>
-          <a:lstStyle/>
-          <a:p>
-            <a:pPr algn="ctr">
-              <a:buNone/>
-            </a:pPr>
-            <a:endParaRPr lang="en-US"/>
-          </a:p>
-        </p:txBody>
-      </p:sp>
-      <p:sp>
-        <p:nvSpPr>
-          <p:cNvPr id="610" name="l610"/>
-          <p:cNvSpPr/>
-          <p:nvPr/>
-        </p:nvSpPr>
-        <p:spPr>
-          <a:xfrm>
-            <a:off x="8229600" y="2489200"/>
-            <a:ext cx="2997200" cy="304800"/>
-          </a:xfrm>
-          <a:prstGeom prst="rect">
-            <a:avLst/>
-          </a:prstGeom>
-          <a:noFill/>
-        </p:spPr>
-        <p:txBody>
-          <a:bodyPr lIns="0" tIns="0" rIns="0" bIns="0" rtlCol="0" anchor="ctr">
-            <a:normAutofit/>
-          </a:bodyPr>
-          <a:lstStyle/>
-          <a:p>
-            <a:pPr algn="l">
-              <a:buNone/>
-            </a:pPr>
-            <a:r>
-              <a:rPr lang="en-US" sz="1150" b="1" i="0" dirty="0">
-                <a:solidFill>
-                  <a:srgbClr val="FF6B6B"/>
-                </a:solidFill>
-              </a:rPr>
-              <a:t>WHY LINEAR, NOT DEEP</a:t>
-            </a:r>
-          </a:p>
-        </p:txBody>
-      </p:sp>
-      <p:sp>
-        <p:nvSpPr>
-          <p:cNvPr id="611" name="l611"/>
-          <p:cNvSpPr/>
-          <p:nvPr/>
-        </p:nvSpPr>
-        <p:spPr>
-          <a:xfrm>
-            <a:off x="8229600" y="2844800"/>
-            <a:ext cx="2997200" cy="2032000"/>
-          </a:xfrm>
-          <a:prstGeom prst="rect">
-            <a:avLst/>
-          </a:prstGeom>
-          <a:noFill/>
-        </p:spPr>
-        <p:txBody>
-          <a:bodyPr lIns="0" tIns="0" rIns="0" bIns="0" rtlCol="0" anchor="t" anchorCtr="0">
-            <a:normAutofit/>
-          </a:bodyPr>
-          <a:lstStyle/>
-          <a:p>
-            <a:pPr algn="l">
-              <a:buNone/>
-            </a:pPr>
-            <a:r>
-              <a:rPr lang="en-US" sz="1250" b="0" i="0" dirty="0">
-                <a:solidFill>
-                  <a:srgbClr val="2A2540"/>
-                </a:solidFill>
-              </a:rPr>
-              <a:t>Supervised on only ~10k–100k overlap users, such that a deep MLP overfits.</a:t>
-            </a:r>
-            <a:br>
-              <a:rPr lang="en-US" sz="1250" b="0" i="0" dirty="0">
-                <a:solidFill>
-                  <a:srgbClr val="2A2540"/>
-                </a:solidFill>
-              </a:rPr>
-            </a:br>
-            <a:endParaRPr lang="en-US" sz="1250" b="0" i="0" dirty="0">
-              <a:solidFill>
-                <a:srgbClr val="2A2540"/>
-              </a:solidFill>
-            </a:endParaRPr>
-          </a:p>
-          <a:p>
-            <a:pPr algn="l">
-              <a:buNone/>
-            </a:pPr>
-            <a:r>
-              <a:rPr lang="en-US" sz="1250" b="0" i="0" dirty="0">
-                <a:solidFill>
-                  <a:srgbClr val="2A2540"/>
-                </a:solidFill>
-              </a:rPr>
-              <a:t>A small, regularized linear map generalizes better and is never materially worse on rich pairs.</a:t>
-            </a:r>
-          </a:p>
-        </p:txBody>
-      </p:sp>
-      <p:sp>
-        <p:nvSpPr>
-          <p:cNvPr id="612" name="b612"/>
-          <p:cNvSpPr/>
-          <p:nvPr/>
-        </p:nvSpPr>
-        <p:spPr>
-          <a:xfrm>
-            <a:off x="762000" y="5334000"/>
-            <a:ext cx="10668000" cy="914400"/>
-          </a:xfrm>
-          <a:prstGeom prst="roundRect">
-            <a:avLst>
-              <a:gd name="adj" fmla="val 8"/>
-            </a:avLst>
-          </a:prstGeom>
-          <a:solidFill>
-            <a:srgbClr val="FFFFFF"/>
-          </a:solidFill>
-          <a:ln w="19050">
-            <a:solidFill>
-              <a:srgbClr val="6C3BFF"/>
-            </a:solidFill>
-          </a:ln>
-        </p:spPr>
-        <p:txBody>
-          <a:bodyPr lIns="73152" tIns="36576" rIns="73152" bIns="36576" rtlCol="0" anchor="ctr">
-            <a:normAutofit/>
-          </a:bodyPr>
-          <a:lstStyle/>
-          <a:p>
-            <a:pPr algn="ctr">
-              <a:buNone/>
-            </a:pPr>
-            <a:endParaRPr lang="en-US"/>
-          </a:p>
-        </p:txBody>
-      </p:sp>
-      <p:sp>
-        <p:nvSpPr>
-          <p:cNvPr id="613" name="l613"/>
-          <p:cNvSpPr/>
-          <p:nvPr/>
-        </p:nvSpPr>
-        <p:spPr>
-          <a:xfrm>
-            <a:off x="1066800" y="5486400"/>
-            <a:ext cx="10058400" cy="609600"/>
-          </a:xfrm>
-          <a:prstGeom prst="rect">
-            <a:avLst/>
-          </a:prstGeom>
-          <a:noFill/>
-        </p:spPr>
-        <p:txBody>
-          <a:bodyPr lIns="0" tIns="0" rIns="0" bIns="0" rtlCol="0" anchor="ctr">
-            <a:normAutofit/>
-          </a:bodyPr>
-          <a:lstStyle/>
-          <a:p>
-            <a:pPr algn="l">
-              <a:buNone/>
-            </a:pPr>
-            <a:r>
-              <a:rPr lang="en-US" sz="1300" b="1" i="0" dirty="0">
-                <a:solidFill>
-                  <a:srgbClr val="12101A"/>
-                </a:solidFill>
-              </a:rPr>
-              <a:t>Train on 80% of overlap users · hold out 20% as the cold-eval cohort f never sees.</a:t>
+              <a:rPr lang="en-US" sz="1600" dirty="0">
+                <a:solidFill>
+                  <a:schemeClr val="tx2"/>
+                </a:solidFill>
+              </a:rPr>
+              <a:t>Recall@10 for every baseline.</a:t>
             </a:r>
           </a:p>
         </p:txBody>
@@ -5780,7 +4684,7 @@
     </p:spTree>
     <p:extLst>
       <p:ext uri="{BB962C8B-B14F-4D97-AF65-F5344CB8AC3E}">
-        <p14:creationId xmlns:p14="http://schemas.microsoft.com/office/powerpoint/2010/main" val="2017471410"/>
+        <p14:creationId xmlns:p14="http://schemas.microsoft.com/office/powerpoint/2010/main" val="3183659006"/>
       </p:ext>
     </p:extLst>
   </p:cSld>
@@ -5812,7 +4716,7 @@
           <p:cNvPr id="2" name="Title 1">
             <a:extLst>
               <a:ext uri="{FF2B5EF4-FFF2-40B4-BE49-F238E27FC236}">
-                <a16:creationId xmlns:a16="http://schemas.microsoft.com/office/drawing/2014/main" id="{9073ADC1-0E06-F17E-9A0B-DC64D22FC011}"/>
+                <a16:creationId xmlns:a16="http://schemas.microsoft.com/office/drawing/2014/main" id="{3CC4A1E0-45D1-FC6B-3761-D986E7D45CE7}"/>
               </a:ext>
             </a:extLst>
           </p:cNvPr>
@@ -5825,21 +4729,19 @@
         </p:nvSpPr>
         <p:spPr/>
         <p:txBody>
-          <a:bodyPr>
-            <a:normAutofit fontScale="90000"/>
-          </a:bodyPr>
+          <a:bodyPr/>
           <a:lstStyle/>
           <a:p>
             <a:pPr>
               <a:buNone/>
             </a:pPr>
             <a:r>
-              <a:rPr lang="en-US" sz="1400" b="1" dirty="0">
+              <a:rPr lang="en-US" sz="2000" b="1" dirty="0">
                 <a:solidFill>
                   <a:srgbClr val="6C3BFF"/>
                 </a:solidFill>
               </a:rPr>
-              <a:t>STAGE 3</a:t>
+              <a:t>02</a:t>
             </a:r>
           </a:p>
           <a:p>
@@ -5848,1126 +4750,42 @@
             </a:pPr>
             <a:r>
               <a:rPr lang="en-US" dirty="0"/>
-              <a:t>Cold-start inference, then how we measure it</a:t>
-            </a:r>
-          </a:p>
-        </p:txBody>
-      </p:sp>
-      <p:sp>
-        <p:nvSpPr>
-          <p:cNvPr id="600" name="t600"/>
-          <p:cNvSpPr/>
-          <p:nvPr/>
-        </p:nvSpPr>
-        <p:spPr>
-          <a:xfrm>
-            <a:off x="762000" y="1854200"/>
-            <a:ext cx="5842000" cy="254000"/>
-          </a:xfrm>
-          <a:prstGeom prst="rect">
-            <a:avLst/>
-          </a:prstGeom>
-          <a:noFill/>
-        </p:spPr>
-        <p:txBody>
-          <a:bodyPr wrap="square" lIns="0" tIns="0" rIns="0" bIns="0" rtlCol="0" anchor="t"/>
-          <a:lstStyle/>
-          <a:p>
-            <a:pPr algn="l"/>
-            <a:r>
-              <a:rPr lang="en-US" sz="1250" b="1" dirty="0">
-                <a:solidFill>
-                  <a:srgbClr val="6C3BFF"/>
-                </a:solidFill>
-              </a:rPr>
-              <a:t>INFERENCE  ·  RANK FOR A COLD USER</a:t>
-            </a:r>
-          </a:p>
-        </p:txBody>
-      </p:sp>
-      <p:sp>
-        <p:nvSpPr>
-          <p:cNvPr id="601" name="b601"/>
-          <p:cNvSpPr/>
-          <p:nvPr/>
-        </p:nvSpPr>
-        <p:spPr>
-          <a:xfrm>
-            <a:off x="762000" y="2235200"/>
-            <a:ext cx="1625600" cy="914400"/>
-          </a:xfrm>
-          <a:prstGeom prst="roundRect">
-            <a:avLst>
-              <a:gd name="adj" fmla="val 16000"/>
-            </a:avLst>
-          </a:prstGeom>
-          <a:solidFill>
-            <a:srgbClr val="EDEAF7"/>
-          </a:solidFill>
-          <a:ln>
-            <a:noFill/>
-          </a:ln>
-        </p:spPr>
-        <p:txBody>
-          <a:bodyPr lIns="76200" tIns="25400" rIns="76200" bIns="25400" rtlCol="0" anchor="ctr"/>
-          <a:lstStyle/>
-          <a:p>
-            <a:pPr algn="ctr"/>
-            <a:r>
-              <a:rPr lang="en-US" sz="1300" b="1" dirty="0">
-                <a:solidFill>
-                  <a:srgbClr val="12101A"/>
-                </a:solidFill>
-              </a:rPr>
-              <a:t>Cold user</a:t>
-            </a:r>
-          </a:p>
-          <a:p>
-            <a:pPr algn="ctr"/>
-            <a:r>
-              <a:rPr lang="en-US" sz="1000" i="1" dirty="0">
-                <a:solidFill>
-                  <a:srgbClr val="6E6A7C"/>
-                </a:solidFill>
-              </a:rPr>
-              <a:t>source history only</a:t>
-            </a:r>
-          </a:p>
-        </p:txBody>
-      </p:sp>
-      <p:sp>
-        <p:nvSpPr>
-          <p:cNvPr id="602" name="a602"/>
-          <p:cNvSpPr/>
-          <p:nvPr/>
-        </p:nvSpPr>
-        <p:spPr>
-          <a:xfrm>
-            <a:off x="2413000" y="2527300"/>
-            <a:ext cx="254000" cy="330200"/>
-          </a:xfrm>
-          <a:prstGeom prst="rect">
-            <a:avLst/>
-          </a:prstGeom>
-          <a:noFill/>
-        </p:spPr>
-        <p:txBody>
-          <a:bodyPr lIns="0" tIns="0" rIns="0" bIns="0" rtlCol="0" anchor="ctr"/>
-          <a:lstStyle/>
-          <a:p>
-            <a:pPr algn="ctr"/>
-            <a:r>
-              <a:rPr lang="en-US" sz="1600" b="1" dirty="0">
-                <a:solidFill>
-                  <a:srgbClr val="6E6A7C"/>
-                </a:solidFill>
-              </a:rPr>
-              <a:t>→</a:t>
-            </a:r>
-          </a:p>
-        </p:txBody>
-      </p:sp>
-      <p:sp>
-        <p:nvSpPr>
-          <p:cNvPr id="603" name="b603"/>
-          <p:cNvSpPr/>
-          <p:nvPr/>
-        </p:nvSpPr>
-        <p:spPr>
-          <a:xfrm>
-            <a:off x="2692400" y="2235200"/>
-            <a:ext cx="1625600" cy="914400"/>
-          </a:xfrm>
-          <a:prstGeom prst="roundRect">
-            <a:avLst>
-              <a:gd name="adj" fmla="val 16000"/>
-            </a:avLst>
-          </a:prstGeom>
-          <a:solidFill>
-            <a:srgbClr val="FFFFFF"/>
-          </a:solidFill>
-          <a:ln w="1482">
-            <a:solidFill>
-              <a:srgbClr val="6C3BFF"/>
-            </a:solidFill>
-          </a:ln>
-        </p:spPr>
-        <p:txBody>
-          <a:bodyPr lIns="76200" tIns="25400" rIns="76200" bIns="25400" rtlCol="0" anchor="ctr"/>
-          <a:lstStyle/>
-          <a:p>
-            <a:pPr algn="ctr"/>
-            <a:r>
-              <a:rPr lang="en-US" sz="1300" b="1" dirty="0">
-                <a:solidFill>
-                  <a:srgbClr val="6C3BFF"/>
-                </a:solidFill>
-                <a:latin typeface="Consolas"/>
-              </a:rPr>
-              <a:t>U_src</a:t>
-            </a:r>
-          </a:p>
-          <a:p>
-            <a:pPr algn="ctr"/>
-            <a:r>
-              <a:rPr lang="en-US" sz="1000" i="1" dirty="0">
-                <a:solidFill>
-                  <a:srgbClr val="6E6A7C"/>
-                </a:solidFill>
-              </a:rPr>
-              <a:t>source vector</a:t>
-            </a:r>
-          </a:p>
-        </p:txBody>
-      </p:sp>
-      <p:sp>
-        <p:nvSpPr>
-          <p:cNvPr id="604" name="a604"/>
-          <p:cNvSpPr/>
-          <p:nvPr/>
-        </p:nvSpPr>
-        <p:spPr>
-          <a:xfrm>
-            <a:off x="4343400" y="2527300"/>
-            <a:ext cx="254000" cy="330200"/>
-          </a:xfrm>
-          <a:prstGeom prst="rect">
-            <a:avLst/>
-          </a:prstGeom>
-          <a:noFill/>
-        </p:spPr>
-        <p:txBody>
-          <a:bodyPr lIns="0" tIns="0" rIns="0" bIns="0" rtlCol="0" anchor="ctr"/>
-          <a:lstStyle/>
-          <a:p>
-            <a:pPr algn="ctr"/>
-            <a:r>
-              <a:rPr lang="en-US" sz="1600" b="1" dirty="0">
-                <a:solidFill>
-                  <a:srgbClr val="6E6A7C"/>
-                </a:solidFill>
-              </a:rPr>
-              <a:t>→</a:t>
-            </a:r>
-          </a:p>
-        </p:txBody>
-      </p:sp>
-      <p:sp>
-        <p:nvSpPr>
-          <p:cNvPr id="605" name="b605"/>
-          <p:cNvSpPr/>
-          <p:nvPr/>
-        </p:nvSpPr>
-        <p:spPr>
-          <a:xfrm>
-            <a:off x="4622800" y="2235200"/>
-            <a:ext cx="1625600" cy="914400"/>
-          </a:xfrm>
-          <a:prstGeom prst="roundRect">
-            <a:avLst>
-              <a:gd name="adj" fmla="val 16000"/>
-            </a:avLst>
-          </a:prstGeom>
-          <a:solidFill>
-            <a:srgbClr val="6C3BFF"/>
-          </a:solidFill>
-          <a:ln>
-            <a:noFill/>
-          </a:ln>
-        </p:spPr>
-        <p:txBody>
-          <a:bodyPr lIns="76200" tIns="25400" rIns="76200" bIns="25400" rtlCol="0" anchor="ctr"/>
-          <a:lstStyle/>
-          <a:p>
-            <a:pPr algn="ctr"/>
-            <a:r>
-              <a:rPr lang="en-US" sz="1700" b="1" dirty="0">
-                <a:solidFill>
-                  <a:srgbClr val="FFFFFF"/>
-                </a:solidFill>
-                <a:latin typeface="Consolas"/>
-              </a:rPr>
-              <a:t>f</a:t>
-            </a:r>
-          </a:p>
-          <a:p>
-            <a:pPr algn="ctr"/>
-            <a:r>
-              <a:rPr lang="en-US" sz="1000" i="1" dirty="0">
-                <a:solidFill>
-                  <a:srgbClr val="E5DEFF"/>
-                </a:solidFill>
-              </a:rPr>
-              <a:t>the linear map</a:t>
-            </a:r>
-          </a:p>
-        </p:txBody>
-      </p:sp>
-      <p:sp>
-        <p:nvSpPr>
-          <p:cNvPr id="606" name="a606"/>
-          <p:cNvSpPr/>
-          <p:nvPr/>
-        </p:nvSpPr>
-        <p:spPr>
-          <a:xfrm>
-            <a:off x="6273800" y="2527300"/>
-            <a:ext cx="254000" cy="330200"/>
-          </a:xfrm>
-          <a:prstGeom prst="rect">
-            <a:avLst/>
-          </a:prstGeom>
-          <a:noFill/>
-        </p:spPr>
-        <p:txBody>
-          <a:bodyPr lIns="0" tIns="0" rIns="0" bIns="0" rtlCol="0" anchor="ctr"/>
-          <a:lstStyle/>
-          <a:p>
-            <a:pPr algn="ctr"/>
-            <a:r>
-              <a:rPr lang="en-US" sz="1600" b="1" dirty="0">
-                <a:solidFill>
-                  <a:srgbClr val="6E6A7C"/>
-                </a:solidFill>
-              </a:rPr>
-              <a:t>→</a:t>
-            </a:r>
-          </a:p>
-        </p:txBody>
-      </p:sp>
-      <p:sp>
-        <p:nvSpPr>
-          <p:cNvPr id="607" name="b607"/>
-          <p:cNvSpPr/>
-          <p:nvPr/>
-        </p:nvSpPr>
-        <p:spPr>
-          <a:xfrm>
-            <a:off x="6553200" y="2235200"/>
-            <a:ext cx="1625600" cy="914400"/>
-          </a:xfrm>
-          <a:prstGeom prst="roundRect">
-            <a:avLst>
-              <a:gd name="adj" fmla="val 16000"/>
-            </a:avLst>
-          </a:prstGeom>
-          <a:solidFill>
-            <a:srgbClr val="FFFFFF"/>
-          </a:solidFill>
-          <a:ln w="1482">
-            <a:solidFill>
-              <a:srgbClr val="00C2A8"/>
-            </a:solidFill>
-          </a:ln>
-        </p:spPr>
-        <p:txBody>
-          <a:bodyPr lIns="76200" tIns="25400" rIns="76200" bIns="25400" rtlCol="0" anchor="ctr"/>
-          <a:lstStyle/>
-          <a:p>
-            <a:pPr algn="ctr"/>
-            <a:r>
-              <a:rPr lang="en-US" sz="1500" b="1" dirty="0">
-                <a:solidFill>
-                  <a:srgbClr val="00C2A8"/>
-                </a:solidFill>
-                <a:latin typeface="Consolas"/>
-              </a:rPr>
-              <a:t>û_t</a:t>
-            </a:r>
-          </a:p>
-          <a:p>
-            <a:pPr algn="ctr"/>
-            <a:r>
-              <a:rPr lang="en-US" sz="1000" i="1" dirty="0">
-                <a:solidFill>
-                  <a:srgbClr val="6E6A7C"/>
-                </a:solidFill>
-              </a:rPr>
-              <a:t>predicted taste</a:t>
-            </a:r>
-          </a:p>
-        </p:txBody>
-      </p:sp>
-      <p:sp>
-        <p:nvSpPr>
-          <p:cNvPr id="608" name="a608"/>
-          <p:cNvSpPr/>
-          <p:nvPr/>
-        </p:nvSpPr>
-        <p:spPr>
-          <a:xfrm>
-            <a:off x="8204200" y="2527300"/>
-            <a:ext cx="254000" cy="330200"/>
-          </a:xfrm>
-          <a:prstGeom prst="rect">
-            <a:avLst/>
-          </a:prstGeom>
-          <a:noFill/>
-        </p:spPr>
-        <p:txBody>
-          <a:bodyPr lIns="0" tIns="0" rIns="0" bIns="0" rtlCol="0" anchor="ctr"/>
-          <a:lstStyle/>
-          <a:p>
-            <a:pPr algn="ctr"/>
-            <a:r>
-              <a:rPr lang="en-US" sz="1600" b="1" dirty="0">
-                <a:solidFill>
-                  <a:srgbClr val="6E6A7C"/>
-                </a:solidFill>
-              </a:rPr>
-              <a:t>→</a:t>
-            </a:r>
-          </a:p>
-        </p:txBody>
-      </p:sp>
-      <p:sp>
-        <p:nvSpPr>
-          <p:cNvPr id="609" name="b609"/>
-          <p:cNvSpPr/>
-          <p:nvPr/>
-        </p:nvSpPr>
-        <p:spPr>
-          <a:xfrm>
-            <a:off x="8483600" y="2235200"/>
-            <a:ext cx="1625600" cy="914400"/>
-          </a:xfrm>
-          <a:prstGeom prst="roundRect">
-            <a:avLst>
-              <a:gd name="adj" fmla="val 16000"/>
-            </a:avLst>
-          </a:prstGeom>
-          <a:solidFill>
-            <a:srgbClr val="FFFFFF"/>
-          </a:solidFill>
-          <a:ln w="19050">
-            <a:solidFill>
-              <a:srgbClr val="6C3BFF"/>
-            </a:solidFill>
-          </a:ln>
-        </p:spPr>
-        <p:txBody>
-          <a:bodyPr lIns="76200" tIns="25400" rIns="76200" bIns="25400" rtlCol="0" anchor="ctr"/>
-          <a:lstStyle/>
-          <a:p>
-            <a:pPr algn="ctr"/>
-            <a:r>
-              <a:rPr lang="en-US" sz="1250" b="1" dirty="0">
-                <a:solidFill>
-                  <a:srgbClr val="12101A"/>
-                </a:solidFill>
-              </a:rPr>
-              <a:t>Ranked items</a:t>
-            </a:r>
-          </a:p>
-          <a:p>
-            <a:pPr algn="ctr"/>
-            <a:r>
-              <a:rPr lang="en-US" sz="1000" i="1" dirty="0">
-                <a:solidFill>
-                  <a:srgbClr val="6E6A7C"/>
-                </a:solidFill>
-              </a:rPr>
-              <a:t>top of target list</a:t>
-            </a:r>
-          </a:p>
-        </p:txBody>
-      </p:sp>
-      <p:sp>
-        <p:nvSpPr>
-          <p:cNvPr id="610" name="t610"/>
-          <p:cNvSpPr/>
-          <p:nvPr/>
-        </p:nvSpPr>
-        <p:spPr>
-          <a:xfrm>
-            <a:off x="4622800" y="3276600"/>
-            <a:ext cx="5486400" cy="228600"/>
-          </a:xfrm>
-          <a:prstGeom prst="rect">
-            <a:avLst/>
-          </a:prstGeom>
-          <a:noFill/>
-        </p:spPr>
-        <p:txBody>
-          <a:bodyPr wrap="square" lIns="0" tIns="0" rIns="0" bIns="0" rtlCol="0" anchor="t"/>
-          <a:lstStyle/>
-          <a:p>
-            <a:pPr algn="l"/>
-            <a:r>
-              <a:rPr lang="en-US" sz="1100" i="1" dirty="0">
-                <a:solidFill>
-                  <a:srgbClr val="6E6A7C"/>
-                </a:solidFill>
-              </a:rPr>
-              <a:t>score = û_t · V_tgt   (dot product vs. every target item)</a:t>
-            </a:r>
-          </a:p>
-        </p:txBody>
-      </p:sp>
-      <p:sp>
-        <p:nvSpPr>
-          <p:cNvPr id="611" name="div"/>
-          <p:cNvSpPr/>
-          <p:nvPr/>
-        </p:nvSpPr>
-        <p:spPr>
-          <a:xfrm>
-            <a:off x="762000" y="3835400"/>
-            <a:ext cx="10668000" cy="19050"/>
-          </a:xfrm>
-          <a:prstGeom prst="rect">
-            <a:avLst/>
-          </a:prstGeom>
-          <a:solidFill>
-            <a:srgbClr val="DAD6EA"/>
-          </a:solidFill>
-          <a:ln>
-            <a:noFill/>
-          </a:ln>
-        </p:spPr>
+              <a:t>Model &amp; Results</a:t>
+            </a:r>
+          </a:p>
+        </p:txBody>
+      </p:sp>
+      <p:sp>
+        <p:nvSpPr>
+          <p:cNvPr id="3" name="Text Placeholder 2">
+            <a:extLst>
+              <a:ext uri="{FF2B5EF4-FFF2-40B4-BE49-F238E27FC236}">
+                <a16:creationId xmlns:a16="http://schemas.microsoft.com/office/drawing/2014/main" id="{D5CDF83A-F0FE-5600-FABE-3306077A90D4}"/>
+              </a:ext>
+            </a:extLst>
+          </p:cNvPr>
+          <p:cNvSpPr>
+            <a:spLocks noGrp="1"/>
+          </p:cNvSpPr>
+          <p:nvPr>
+            <p:ph type="body" idx="1"/>
+          </p:nvPr>
+        </p:nvSpPr>
+        <p:spPr/>
         <p:txBody>
           <a:bodyPr/>
           <a:lstStyle/>
           <a:p>
-            <a:endParaRPr lang="en-US"/>
-          </a:p>
-        </p:txBody>
-      </p:sp>
-      <p:sp>
-        <p:nvSpPr>
-          <p:cNvPr id="612" name="t612"/>
-          <p:cNvSpPr/>
-          <p:nvPr/>
-        </p:nvSpPr>
-        <p:spPr>
-          <a:xfrm>
-            <a:off x="762000" y="4013200"/>
-            <a:ext cx="6858000" cy="254000"/>
-          </a:xfrm>
-          <a:prstGeom prst="rect">
-            <a:avLst/>
-          </a:prstGeom>
-          <a:noFill/>
-        </p:spPr>
-        <p:txBody>
-          <a:bodyPr wrap="square" lIns="0" tIns="0" rIns="0" bIns="0" rtlCol="0" anchor="t"/>
-          <a:lstStyle/>
-          <a:p>
-            <a:pPr algn="l"/>
-            <a:r>
-              <a:rPr lang="en-US" sz="1250" b="1" dirty="0">
-                <a:solidFill>
-                  <a:srgbClr val="00C2A8"/>
-                </a:solidFill>
-              </a:rPr>
-              <a:t>EVALUATION  ·  ON THE 20% COLD-EVAL COHORT</a:t>
-            </a:r>
-          </a:p>
-        </p:txBody>
-      </p:sp>
-      <p:sp>
-        <p:nvSpPr>
-          <p:cNvPr id="613" name="b613"/>
-          <p:cNvSpPr/>
-          <p:nvPr/>
-        </p:nvSpPr>
-        <p:spPr>
-          <a:xfrm>
-            <a:off x="762000" y="4394200"/>
-            <a:ext cx="3175000" cy="1854200"/>
-          </a:xfrm>
-          <a:prstGeom prst="roundRect">
-            <a:avLst>
-              <a:gd name="adj" fmla="val 10000"/>
-            </a:avLst>
-          </a:prstGeom>
-          <a:solidFill>
-            <a:srgbClr val="EDEAF7"/>
-          </a:solidFill>
-          <a:ln>
-            <a:noFill/>
-          </a:ln>
-        </p:spPr>
-        <p:txBody>
-          <a:bodyPr lIns="76200" tIns="25400" rIns="76200" bIns="25400" rtlCol="0" anchor="ctr"/>
-          <a:lstStyle/>
-          <a:p>
-            <a:endParaRPr lang="en-US"/>
-          </a:p>
-        </p:txBody>
-      </p:sp>
-      <p:sp>
-        <p:nvSpPr>
-          <p:cNvPr id="614" name="t614"/>
-          <p:cNvSpPr/>
-          <p:nvPr/>
-        </p:nvSpPr>
-        <p:spPr>
-          <a:xfrm>
-            <a:off x="990600" y="4572000"/>
-            <a:ext cx="2717800" cy="228600"/>
-          </a:xfrm>
-          <a:prstGeom prst="rect">
-            <a:avLst/>
-          </a:prstGeom>
-          <a:noFill/>
-        </p:spPr>
-        <p:txBody>
-          <a:bodyPr wrap="square" lIns="0" tIns="0" rIns="0" bIns="0" rtlCol="0" anchor="t"/>
-          <a:lstStyle/>
-          <a:p>
-            <a:pPr algn="l"/>
-            <a:r>
-              <a:rPr lang="en-US" sz="1300" b="1" dirty="0">
-                <a:solidFill>
-                  <a:srgbClr val="12101A"/>
-                </a:solidFill>
-              </a:rPr>
-              <a:t>Leave-one-out ranking</a:t>
-            </a:r>
-          </a:p>
-        </p:txBody>
-      </p:sp>
-      <p:sp>
-        <p:nvSpPr>
-          <p:cNvPr id="615" name="t615"/>
-          <p:cNvSpPr/>
-          <p:nvPr/>
-        </p:nvSpPr>
-        <p:spPr>
-          <a:xfrm>
-            <a:off x="990600" y="4902200"/>
-            <a:ext cx="2717800" cy="1270000"/>
-          </a:xfrm>
-          <a:prstGeom prst="rect">
-            <a:avLst/>
-          </a:prstGeom>
-          <a:noFill/>
-        </p:spPr>
-        <p:txBody>
-          <a:bodyPr wrap="square" lIns="0" tIns="0" rIns="0" bIns="0" rtlCol="0" anchor="t"/>
-          <a:lstStyle/>
-          <a:p>
-            <a:pPr algn="l"/>
-            <a:r>
-              <a:rPr lang="en-US" sz="1150" dirty="0">
-                <a:solidFill>
-                  <a:srgbClr val="2A2540"/>
-                </a:solidFill>
-              </a:rPr>
-              <a:t>Per user: 1 held-out target positive (latest by time) + 100 sampled unseen negatives = 101 candidates, ranked together — the positive's rank gives the score.</a:t>
-            </a:r>
-          </a:p>
-        </p:txBody>
-      </p:sp>
-      <p:sp>
-        <p:nvSpPr>
-          <p:cNvPr id="616" name="b616"/>
-          <p:cNvSpPr/>
-          <p:nvPr/>
-        </p:nvSpPr>
-        <p:spPr>
-          <a:xfrm>
-            <a:off x="4191000" y="4394200"/>
-            <a:ext cx="3429000" cy="1854200"/>
-          </a:xfrm>
-          <a:prstGeom prst="roundRect">
-            <a:avLst>
-              <a:gd name="adj" fmla="val 10000"/>
-            </a:avLst>
-          </a:prstGeom>
-          <a:solidFill>
-            <a:srgbClr val="EDEAF7"/>
-          </a:solidFill>
-          <a:ln>
-            <a:noFill/>
-          </a:ln>
-        </p:spPr>
-        <p:txBody>
-          <a:bodyPr lIns="76200" tIns="25400" rIns="76200" bIns="25400" rtlCol="0" anchor="ctr"/>
-          <a:lstStyle/>
-          <a:p>
-            <a:endParaRPr lang="en-US"/>
-          </a:p>
-        </p:txBody>
-      </p:sp>
-      <p:sp>
-        <p:nvSpPr>
-          <p:cNvPr id="617" name="t617"/>
-          <p:cNvSpPr/>
-          <p:nvPr/>
-        </p:nvSpPr>
-        <p:spPr>
-          <a:xfrm>
-            <a:off x="4419600" y="4572000"/>
-            <a:ext cx="2971800" cy="228600"/>
-          </a:xfrm>
-          <a:prstGeom prst="rect">
-            <a:avLst/>
-          </a:prstGeom>
-          <a:noFill/>
-        </p:spPr>
-        <p:txBody>
-          <a:bodyPr wrap="square" lIns="0" tIns="0" rIns="0" bIns="0" rtlCol="0" anchor="t"/>
-          <a:lstStyle/>
-          <a:p>
-            <a:pPr algn="l"/>
-            <a:r>
-              <a:rPr lang="en-US" sz="1300" b="1" dirty="0">
-                <a:solidFill>
-                  <a:srgbClr val="12101A"/>
-                </a:solidFill>
-              </a:rPr>
-              <a:t>Against 4 baselines</a:t>
-            </a:r>
-          </a:p>
-        </p:txBody>
-      </p:sp>
-      <p:sp>
-        <p:nvSpPr>
-          <p:cNvPr id="618" name="t618"/>
-          <p:cNvSpPr/>
-          <p:nvPr/>
-        </p:nvSpPr>
-        <p:spPr>
-          <a:xfrm>
-            <a:off x="4419600" y="4927600"/>
-            <a:ext cx="1651000" cy="203200"/>
-          </a:xfrm>
-          <a:prstGeom prst="rect">
-            <a:avLst/>
-          </a:prstGeom>
-          <a:noFill/>
-        </p:spPr>
-        <p:txBody>
-          <a:bodyPr wrap="square" lIns="0" tIns="0" rIns="0" bIns="0" rtlCol="0" anchor="t"/>
-          <a:lstStyle/>
-          <a:p>
-            <a:pPr algn="l"/>
-            <a:r>
-              <a:rPr lang="en-US" sz="1150" b="1" dirty="0">
-                <a:solidFill>
-                  <a:srgbClr val="6C3BFF"/>
-                </a:solidFill>
-              </a:rPr>
-              <a:t>target-MF</a:t>
-            </a:r>
-          </a:p>
-        </p:txBody>
-      </p:sp>
-      <p:sp>
-        <p:nvSpPr>
-          <p:cNvPr id="619" name="t619"/>
-          <p:cNvSpPr/>
-          <p:nvPr/>
-        </p:nvSpPr>
-        <p:spPr>
-          <a:xfrm>
-            <a:off x="5867400" y="4927600"/>
-            <a:ext cx="1574800" cy="203200"/>
-          </a:xfrm>
-          <a:prstGeom prst="rect">
-            <a:avLst/>
-          </a:prstGeom>
-          <a:noFill/>
-        </p:spPr>
-        <p:txBody>
-          <a:bodyPr wrap="square" lIns="0" tIns="0" rIns="0" bIns="0" rtlCol="0" anchor="t"/>
-          <a:lstStyle/>
-          <a:p>
-            <a:pPr algn="l"/>
-            <a:r>
-              <a:rPr lang="en-US" sz="1000" i="1" dirty="0">
-                <a:solidFill>
-                  <a:srgbClr val="6E6A7C"/>
-                </a:solidFill>
-              </a:rPr>
-              <a:t>single-vertical prior</a:t>
-            </a:r>
-          </a:p>
-        </p:txBody>
-      </p:sp>
-      <p:sp>
-        <p:nvSpPr>
-          <p:cNvPr id="620" name="t620"/>
-          <p:cNvSpPr/>
-          <p:nvPr/>
-        </p:nvSpPr>
-        <p:spPr>
-          <a:xfrm>
-            <a:off x="4419600" y="5245100"/>
-            <a:ext cx="1651000" cy="203200"/>
-          </a:xfrm>
-          <a:prstGeom prst="rect">
-            <a:avLst/>
-          </a:prstGeom>
-          <a:noFill/>
-        </p:spPr>
-        <p:txBody>
-          <a:bodyPr wrap="square" lIns="0" tIns="0" rIns="0" bIns="0" rtlCol="0" anchor="t"/>
-          <a:lstStyle/>
-          <a:p>
-            <a:pPr algn="l"/>
-            <a:r>
-              <a:rPr lang="en-US" sz="1150" b="1" dirty="0">
-                <a:solidFill>
-                  <a:srgbClr val="6C3BFF"/>
-                </a:solidFill>
-              </a:rPr>
-              <a:t>content</a:t>
-            </a:r>
-          </a:p>
-        </p:txBody>
-      </p:sp>
-      <p:sp>
-        <p:nvSpPr>
-          <p:cNvPr id="621" name="t621"/>
-          <p:cNvSpPr/>
-          <p:nvPr/>
-        </p:nvSpPr>
-        <p:spPr>
-          <a:xfrm>
-            <a:off x="5867400" y="5245100"/>
-            <a:ext cx="1574800" cy="203200"/>
-          </a:xfrm>
-          <a:prstGeom prst="rect">
-            <a:avLst/>
-          </a:prstGeom>
-          <a:noFill/>
-        </p:spPr>
-        <p:txBody>
-          <a:bodyPr wrap="square" lIns="0" tIns="0" rIns="0" bIns="0" rtlCol="0" anchor="t"/>
-          <a:lstStyle/>
-          <a:p>
-            <a:pPr algn="l"/>
-            <a:r>
-              <a:rPr lang="en-US" sz="1000" i="1" dirty="0">
-                <a:solidFill>
-                  <a:srgbClr val="6E6A7C"/>
-                </a:solidFill>
-              </a:rPr>
-              <a:t>training-free text cosine</a:t>
-            </a:r>
-          </a:p>
-        </p:txBody>
-      </p:sp>
-      <p:sp>
-        <p:nvSpPr>
-          <p:cNvPr id="622" name="t622"/>
-          <p:cNvSpPr/>
-          <p:nvPr/>
-        </p:nvSpPr>
-        <p:spPr>
-          <a:xfrm>
-            <a:off x="4419600" y="5562600"/>
-            <a:ext cx="1651000" cy="203200"/>
-          </a:xfrm>
-          <a:prstGeom prst="rect">
-            <a:avLst/>
-          </a:prstGeom>
-          <a:noFill/>
-        </p:spPr>
-        <p:txBody>
-          <a:bodyPr wrap="square" lIns="0" tIns="0" rIns="0" bIns="0" rtlCol="0" anchor="t"/>
-          <a:lstStyle/>
-          <a:p>
-            <a:pPr algn="l"/>
-            <a:r>
-              <a:rPr lang="en-US" sz="1150" b="1" dirty="0">
-                <a:solidFill>
-                  <a:srgbClr val="6C3BFF"/>
-                </a:solidFill>
-              </a:rPr>
-              <a:t>MostPop</a:t>
-            </a:r>
-          </a:p>
-        </p:txBody>
-      </p:sp>
-      <p:sp>
-        <p:nvSpPr>
-          <p:cNvPr id="623" name="t623"/>
-          <p:cNvSpPr/>
-          <p:nvPr/>
-        </p:nvSpPr>
-        <p:spPr>
-          <a:xfrm>
-            <a:off x="5867400" y="5562600"/>
-            <a:ext cx="1574800" cy="203200"/>
-          </a:xfrm>
-          <a:prstGeom prst="rect">
-            <a:avLst/>
-          </a:prstGeom>
-          <a:noFill/>
-        </p:spPr>
-        <p:txBody>
-          <a:bodyPr wrap="square" lIns="0" tIns="0" rIns="0" bIns="0" rtlCol="0" anchor="t"/>
-          <a:lstStyle/>
-          <a:p>
-            <a:pPr algn="l"/>
-            <a:r>
-              <a:rPr lang="en-US" sz="1000" i="1" dirty="0">
-                <a:solidFill>
-                  <a:srgbClr val="6E6A7C"/>
-                </a:solidFill>
-              </a:rPr>
-              <a:t>deployed fallback</a:t>
-            </a:r>
-          </a:p>
-        </p:txBody>
-      </p:sp>
-      <p:sp>
-        <p:nvSpPr>
-          <p:cNvPr id="624" name="t624"/>
-          <p:cNvSpPr/>
-          <p:nvPr/>
-        </p:nvSpPr>
-        <p:spPr>
-          <a:xfrm>
-            <a:off x="4419600" y="5880100"/>
-            <a:ext cx="1651000" cy="203200"/>
-          </a:xfrm>
-          <a:prstGeom prst="rect">
-            <a:avLst/>
-          </a:prstGeom>
-          <a:noFill/>
-        </p:spPr>
-        <p:txBody>
-          <a:bodyPr wrap="square" lIns="0" tIns="0" rIns="0" bIns="0" rtlCol="0" anchor="t"/>
-          <a:lstStyle/>
-          <a:p>
-            <a:pPr algn="l"/>
-            <a:r>
-              <a:rPr lang="en-US" sz="1150" b="1" dirty="0">
-                <a:solidFill>
-                  <a:srgbClr val="6C3BFF"/>
-                </a:solidFill>
-              </a:rPr>
-              <a:t>Random</a:t>
-            </a:r>
-          </a:p>
-        </p:txBody>
-      </p:sp>
-      <p:sp>
-        <p:nvSpPr>
-          <p:cNvPr id="625" name="t625"/>
-          <p:cNvSpPr/>
-          <p:nvPr/>
-        </p:nvSpPr>
-        <p:spPr>
-          <a:xfrm>
-            <a:off x="5867400" y="5880100"/>
-            <a:ext cx="1574800" cy="203200"/>
-          </a:xfrm>
-          <a:prstGeom prst="rect">
-            <a:avLst/>
-          </a:prstGeom>
-          <a:noFill/>
-        </p:spPr>
-        <p:txBody>
-          <a:bodyPr wrap="square" lIns="0" tIns="0" rIns="0" bIns="0" rtlCol="0" anchor="t"/>
-          <a:lstStyle/>
-          <a:p>
-            <a:pPr algn="l"/>
-            <a:r>
-              <a:rPr lang="en-US" sz="1000" i="1" dirty="0">
-                <a:solidFill>
-                  <a:srgbClr val="6E6A7C"/>
-                </a:solidFill>
-              </a:rPr>
-              <a:t>the floor</a:t>
-            </a:r>
-          </a:p>
-        </p:txBody>
-      </p:sp>
-      <p:sp>
-        <p:nvSpPr>
-          <p:cNvPr id="626" name="b626"/>
-          <p:cNvSpPr/>
-          <p:nvPr/>
-        </p:nvSpPr>
-        <p:spPr>
-          <a:xfrm>
-            <a:off x="7874000" y="4394200"/>
-            <a:ext cx="3556000" cy="1854200"/>
-          </a:xfrm>
-          <a:prstGeom prst="roundRect">
-            <a:avLst>
-              <a:gd name="adj" fmla="val 10000"/>
-            </a:avLst>
-          </a:prstGeom>
-          <a:solidFill>
-            <a:srgbClr val="FFFFFF"/>
-          </a:solidFill>
-          <a:ln w="19050">
-            <a:solidFill>
-              <a:srgbClr val="6C3BFF"/>
-            </a:solidFill>
-          </a:ln>
-        </p:spPr>
-        <p:txBody>
-          <a:bodyPr lIns="76200" tIns="25400" rIns="76200" bIns="25400" rtlCol="0" anchor="ctr"/>
-          <a:lstStyle/>
-          <a:p>
-            <a:endParaRPr lang="en-US"/>
-          </a:p>
-        </p:txBody>
-      </p:sp>
-      <p:sp>
-        <p:nvSpPr>
-          <p:cNvPr id="627" name="t627"/>
-          <p:cNvSpPr/>
-          <p:nvPr/>
-        </p:nvSpPr>
-        <p:spPr>
-          <a:xfrm>
-            <a:off x="8128000" y="4572000"/>
-            <a:ext cx="3098800" cy="228600"/>
-          </a:xfrm>
-          <a:prstGeom prst="rect">
-            <a:avLst/>
-          </a:prstGeom>
-          <a:noFill/>
-        </p:spPr>
-        <p:txBody>
-          <a:bodyPr wrap="square" lIns="0" tIns="0" rIns="0" bIns="0" rtlCol="0" anchor="t"/>
-          <a:lstStyle/>
-          <a:p>
-            <a:pPr algn="l"/>
-            <a:r>
-              <a:rPr lang="en-US" sz="1200" b="1" dirty="0">
-                <a:solidFill>
-                  <a:srgbClr val="12101A"/>
-                </a:solidFill>
-              </a:rPr>
-              <a:t>Metrics · mean over 3 seeds</a:t>
-            </a:r>
-          </a:p>
-        </p:txBody>
-      </p:sp>
-      <p:sp>
-        <p:nvSpPr>
-          <p:cNvPr id="628" name="t628"/>
-          <p:cNvSpPr/>
-          <p:nvPr/>
-        </p:nvSpPr>
-        <p:spPr>
-          <a:xfrm>
-            <a:off x="8128000" y="4927600"/>
-            <a:ext cx="3098800" cy="279400"/>
-          </a:xfrm>
-          <a:prstGeom prst="rect">
-            <a:avLst/>
-          </a:prstGeom>
-          <a:noFill/>
-        </p:spPr>
-        <p:txBody>
-          <a:bodyPr wrap="square" lIns="0" tIns="0" rIns="0" bIns="0" rtlCol="0" anchor="t"/>
-          <a:lstStyle/>
-          <a:p>
-            <a:pPr algn="l"/>
-            <a:r>
-              <a:rPr lang="en-US" sz="1350" b="1" dirty="0">
-                <a:solidFill>
-                  <a:srgbClr val="067A68"/>
-                </a:solidFill>
-              </a:rPr>
-              <a:t>Recall@10</a:t>
-            </a:r>
-          </a:p>
-        </p:txBody>
-      </p:sp>
-      <p:sp>
-        <p:nvSpPr>
-          <p:cNvPr id="629" name="t629"/>
-          <p:cNvSpPr/>
-          <p:nvPr/>
-        </p:nvSpPr>
-        <p:spPr>
-          <a:xfrm>
-            <a:off x="8128000" y="5257800"/>
-            <a:ext cx="3098800" cy="279400"/>
-          </a:xfrm>
-          <a:prstGeom prst="rect">
-            <a:avLst/>
-          </a:prstGeom>
-          <a:noFill/>
-        </p:spPr>
-        <p:txBody>
-          <a:bodyPr wrap="square" lIns="0" tIns="0" rIns="0" bIns="0" rtlCol="0" anchor="t"/>
-          <a:lstStyle/>
-          <a:p>
-            <a:pPr algn="l"/>
-            <a:r>
-              <a:rPr lang="en-US" sz="1350" b="1" dirty="0">
-                <a:solidFill>
-                  <a:srgbClr val="067A68"/>
-                </a:solidFill>
-              </a:rPr>
-              <a:t>NDCG@10</a:t>
-            </a:r>
-          </a:p>
-        </p:txBody>
-      </p:sp>
-      <p:sp>
-        <p:nvSpPr>
-          <p:cNvPr id="630" name="t630"/>
-          <p:cNvSpPr/>
-          <p:nvPr/>
-        </p:nvSpPr>
-        <p:spPr>
-          <a:xfrm>
-            <a:off x="8128000" y="5588000"/>
-            <a:ext cx="3098800" cy="279400"/>
-          </a:xfrm>
-          <a:prstGeom prst="rect">
-            <a:avLst/>
-          </a:prstGeom>
-          <a:noFill/>
-        </p:spPr>
-        <p:txBody>
-          <a:bodyPr wrap="square" lIns="0" tIns="0" rIns="0" bIns="0" rtlCol="0" anchor="t"/>
-          <a:lstStyle/>
-          <a:p>
-            <a:pPr algn="l"/>
-            <a:r>
-              <a:rPr lang="en-US" sz="1350" b="1" dirty="0">
-                <a:solidFill>
-                  <a:srgbClr val="067A68"/>
-                </a:solidFill>
-              </a:rPr>
-              <a:t>HR@10</a:t>
-            </a:r>
-          </a:p>
-        </p:txBody>
-      </p:sp>
-      <p:sp>
-        <p:nvSpPr>
-          <p:cNvPr id="631" name="t631"/>
-          <p:cNvSpPr/>
-          <p:nvPr/>
-        </p:nvSpPr>
-        <p:spPr>
-          <a:xfrm>
-            <a:off x="8128000" y="5918200"/>
-            <a:ext cx="3098800" cy="177800"/>
-          </a:xfrm>
-          <a:prstGeom prst="rect">
-            <a:avLst/>
-          </a:prstGeom>
-          <a:noFill/>
-        </p:spPr>
-        <p:txBody>
-          <a:bodyPr wrap="square" lIns="0" tIns="0" rIns="0" bIns="0" rtlCol="0" anchor="t"/>
-          <a:lstStyle/>
-          <a:p>
-            <a:pPr algn="l"/>
-            <a:r>
-              <a:rPr lang="en-US" sz="1000" i="1" dirty="0">
-                <a:solidFill>
-                  <a:srgbClr val="6E6A7C"/>
-                </a:solidFill>
-              </a:rPr>
-              <a:t>reported mean ± std</a:t>
+            <a:pPr>
+              <a:buNone/>
+            </a:pPr>
+            <a:r>
+              <a:rPr lang="en-US" sz="1600" dirty="0">
+                <a:solidFill>
+                  <a:schemeClr val="tx2"/>
+                </a:solidFill>
+              </a:rPr>
+              <a:t>The EMCDR shared latent space, the baselines it beats, and where it still falls short.</a:t>
             </a:r>
           </a:p>
         </p:txBody>
@@ -6975,7 +4793,7 @@
     </p:spTree>
     <p:extLst>
       <p:ext uri="{BB962C8B-B14F-4D97-AF65-F5344CB8AC3E}">
-        <p14:creationId xmlns:p14="http://schemas.microsoft.com/office/powerpoint/2010/main" val="131938736"/>
+        <p14:creationId xmlns:p14="http://schemas.microsoft.com/office/powerpoint/2010/main" val="4108708542"/>
       </p:ext>
     </p:extLst>
   </p:cSld>
@@ -7007,7 +4825,7 @@
           <p:cNvPr id="2" name="Title 1">
             <a:extLst>
               <a:ext uri="{FF2B5EF4-FFF2-40B4-BE49-F238E27FC236}">
-                <a16:creationId xmlns:a16="http://schemas.microsoft.com/office/drawing/2014/main" id="{C5DB16FC-00FC-4B83-9020-408CA83120F5}"/>
+                <a16:creationId xmlns:a16="http://schemas.microsoft.com/office/drawing/2014/main" id="{9073ADC1-0E06-F17E-9A0B-DC64D22FC011}"/>
               </a:ext>
             </a:extLst>
           </p:cNvPr>
@@ -7023,58 +4841,589 @@
           <a:bodyPr/>
           <a:lstStyle/>
           <a:p>
+            <a:r>
+              <a:rPr lang="en-US"/>
+              <a:t>Our solution: EMCDR shared latent space</a:t>
+            </a:r>
+            <a:endParaRPr lang="en-IL"/>
+          </a:p>
+        </p:txBody>
+      </p:sp>
+      <p:sp>
+        <p:nvSpPr>
+          <p:cNvPr id="501" name="C501"/>
+          <p:cNvSpPr/>
+          <p:nvPr/>
+        </p:nvSpPr>
+        <p:spPr>
+          <a:xfrm>
+            <a:off x="1524000" y="2133600"/>
+            <a:ext cx="2946400" cy="1879600"/>
+          </a:xfrm>
+          <a:prstGeom prst="roundRect">
+            <a:avLst>
+              <a:gd name="adj" fmla="val 7000"/>
+            </a:avLst>
+          </a:prstGeom>
+          <a:solidFill>
+            <a:srgbClr val="EDEAF7"/>
+          </a:solidFill>
+          <a:ln>
+            <a:noFill/>
+          </a:ln>
+        </p:spPr>
+        <p:txBody>
+          <a:bodyPr/>
+          <a:lstStyle/>
+          <a:p>
+            <a:endParaRPr/>
+          </a:p>
+        </p:txBody>
+      </p:sp>
+      <p:sp>
+        <p:nvSpPr>
+          <p:cNvPr id="502" name="B502"/>
+          <p:cNvSpPr/>
+          <p:nvPr/>
+        </p:nvSpPr>
+        <p:spPr>
+          <a:xfrm>
+            <a:off x="1727200" y="2336800"/>
+            <a:ext cx="431800" cy="431800"/>
+          </a:xfrm>
+          <a:prstGeom prst="ellipse">
+            <a:avLst/>
+          </a:prstGeom>
+          <a:solidFill>
+            <a:srgbClr val="6C3BFF"/>
+          </a:solidFill>
+          <a:ln>
+            <a:noFill/>
+          </a:ln>
+        </p:spPr>
+        <p:txBody>
+          <a:bodyPr wrap="none" lIns="0" tIns="0" rIns="0" bIns="0" anchor="ctr" anchorCtr="1"/>
+          <a:lstStyle/>
+          <a:p>
+            <a:pPr algn="ctr"/>
+            <a:r>
+              <a:rPr lang="en-US" sz="1600" b="1" dirty="0">
+                <a:solidFill>
+                  <a:srgbClr val="FFFFFF"/>
+                </a:solidFill>
+              </a:rPr>
+              <a:t>1</a:t>
+            </a:r>
+          </a:p>
+        </p:txBody>
+      </p:sp>
+      <p:sp>
+        <p:nvSpPr>
+          <p:cNvPr id="503" name="T503"/>
+          <p:cNvSpPr txBox="1"/>
+          <p:nvPr/>
+        </p:nvSpPr>
+        <p:spPr>
+          <a:xfrm>
+            <a:off x="1727200" y="2895600"/>
+            <a:ext cx="2540000" cy="304800"/>
+          </a:xfrm>
+          <a:prstGeom prst="rect">
+            <a:avLst/>
+          </a:prstGeom>
+          <a:noFill/>
+        </p:spPr>
+        <p:txBody>
+          <a:bodyPr wrap="square" lIns="0" tIns="0" rIns="0" bIns="0" anchor="t"/>
+          <a:lstStyle/>
+          <a:p>
+            <a:r>
+              <a:rPr lang="en-US" sz="1600" b="1" dirty="0">
+                <a:solidFill>
+                  <a:srgbClr val="12101A"/>
+                </a:solidFill>
+              </a:rPr>
+              <a:t>Source embeddings</a:t>
+            </a:r>
+          </a:p>
+        </p:txBody>
+      </p:sp>
+      <p:sp>
+        <p:nvSpPr>
+          <p:cNvPr id="504" name="T504"/>
+          <p:cNvSpPr txBox="1"/>
+          <p:nvPr/>
+        </p:nvSpPr>
+        <p:spPr>
+          <a:xfrm>
+            <a:off x="1727200" y="3251200"/>
+            <a:ext cx="2540000" cy="660400"/>
+          </a:xfrm>
+          <a:prstGeom prst="rect">
+            <a:avLst/>
+          </a:prstGeom>
+          <a:noFill/>
+        </p:spPr>
+        <p:txBody>
+          <a:bodyPr wrap="square" lIns="0" tIns="0" rIns="0" bIns="0" anchor="t"/>
+          <a:lstStyle/>
+          <a:p>
             <a:pPr>
-              <a:buNone/>
+              <a:lnSpc>
+                <a:spcPts val="1500"/>
+              </a:lnSpc>
             </a:pPr>
             <a:r>
-              <a:rPr lang="en-US" sz="2000" b="1" dirty="0">
-                <a:solidFill>
-                  <a:srgbClr val="00C2A8"/>
-                </a:solidFill>
-              </a:rPr>
-              <a:t>→ TO THE NOTEBOOK</a:t>
-            </a:r>
-          </a:p>
+              <a:rPr lang="en-US" sz="1300" dirty="0">
+                <a:solidFill>
+                  <a:srgbClr val="2A2540"/>
+                </a:solidFill>
+              </a:rPr>
+              <a:t>Learn user &amp; item vectors on the source vertical, where the user has history.</a:t>
+            </a:r>
+          </a:p>
+        </p:txBody>
+      </p:sp>
+      <p:sp>
+        <p:nvSpPr>
+          <p:cNvPr id="505" name="C505"/>
+          <p:cNvSpPr/>
+          <p:nvPr/>
+        </p:nvSpPr>
+        <p:spPr>
+          <a:xfrm>
+            <a:off x="5130800" y="2133600"/>
+            <a:ext cx="2946400" cy="1879600"/>
+          </a:xfrm>
+          <a:prstGeom prst="roundRect">
+            <a:avLst>
+              <a:gd name="adj" fmla="val 7000"/>
+            </a:avLst>
+          </a:prstGeom>
+          <a:solidFill>
+            <a:srgbClr val="EDEAF7"/>
+          </a:solidFill>
+          <a:ln>
+            <a:noFill/>
+          </a:ln>
+        </p:spPr>
+        <p:txBody>
+          <a:bodyPr/>
+          <a:lstStyle/>
+          <a:p>
+            <a:endParaRPr/>
+          </a:p>
+        </p:txBody>
+      </p:sp>
+      <p:sp>
+        <p:nvSpPr>
+          <p:cNvPr id="506" name="B506"/>
+          <p:cNvSpPr/>
+          <p:nvPr/>
+        </p:nvSpPr>
+        <p:spPr>
+          <a:xfrm>
+            <a:off x="5334000" y="2336800"/>
+            <a:ext cx="431800" cy="431800"/>
+          </a:xfrm>
+          <a:prstGeom prst="ellipse">
+            <a:avLst/>
+          </a:prstGeom>
+          <a:solidFill>
+            <a:srgbClr val="C72A45"/>
+          </a:solidFill>
+          <a:ln>
+            <a:noFill/>
+          </a:ln>
+        </p:spPr>
+        <p:txBody>
+          <a:bodyPr wrap="none" lIns="0" tIns="0" rIns="0" bIns="0" anchor="ctr" anchorCtr="1"/>
+          <a:lstStyle/>
+          <a:p>
+            <a:pPr algn="ctr"/>
+            <a:r>
+              <a:rPr lang="en-US" sz="1600" b="1" dirty="0">
+                <a:solidFill>
+                  <a:srgbClr val="FFFFFF"/>
+                </a:solidFill>
+              </a:rPr>
+              <a:t>2</a:t>
+            </a:r>
+          </a:p>
+        </p:txBody>
+      </p:sp>
+      <p:sp>
+        <p:nvSpPr>
+          <p:cNvPr id="507" name="T507"/>
+          <p:cNvSpPr txBox="1"/>
+          <p:nvPr/>
+        </p:nvSpPr>
+        <p:spPr>
+          <a:xfrm>
+            <a:off x="5334000" y="2895600"/>
+            <a:ext cx="2540000" cy="304800"/>
+          </a:xfrm>
+          <a:prstGeom prst="rect">
+            <a:avLst/>
+          </a:prstGeom>
+          <a:noFill/>
+        </p:spPr>
+        <p:txBody>
+          <a:bodyPr wrap="square" lIns="0" tIns="0" rIns="0" bIns="0" anchor="t"/>
+          <a:lstStyle/>
+          <a:p>
+            <a:r>
+              <a:rPr lang="en-US" sz="1600" b="1" dirty="0">
+                <a:solidFill>
+                  <a:srgbClr val="12101A"/>
+                </a:solidFill>
+              </a:rPr>
+              <a:t>Target embeddings</a:t>
+            </a:r>
+          </a:p>
+        </p:txBody>
+      </p:sp>
+      <p:sp>
+        <p:nvSpPr>
+          <p:cNvPr id="508" name="T508"/>
+          <p:cNvSpPr txBox="1"/>
+          <p:nvPr/>
+        </p:nvSpPr>
+        <p:spPr>
+          <a:xfrm>
+            <a:off x="5334000" y="3251200"/>
+            <a:ext cx="2540000" cy="660400"/>
+          </a:xfrm>
+          <a:prstGeom prst="rect">
+            <a:avLst/>
+          </a:prstGeom>
+          <a:noFill/>
+        </p:spPr>
+        <p:txBody>
+          <a:bodyPr wrap="square" lIns="0" tIns="0" rIns="0" bIns="0" anchor="t"/>
+          <a:lstStyle/>
           <a:p>
             <a:pPr>
-              <a:buNone/>
+              <a:lnSpc>
+                <a:spcPts val="1500"/>
+              </a:lnSpc>
             </a:pPr>
             <a:r>
-              <a:rPr lang="en-US" dirty="0"/>
-              <a:t>Baselines, EMCDR &amp; results</a:t>
-            </a:r>
-          </a:p>
-        </p:txBody>
-      </p:sp>
-      <p:sp>
-        <p:nvSpPr>
-          <p:cNvPr id="5" name="Text Placeholder 4">
-            <a:extLst>
-              <a:ext uri="{FF2B5EF4-FFF2-40B4-BE49-F238E27FC236}">
-                <a16:creationId xmlns:a16="http://schemas.microsoft.com/office/drawing/2014/main" id="{9396D725-CAAE-47E9-6093-C00E4D439337}"/>
-              </a:ext>
-            </a:extLst>
-          </p:cNvPr>
-          <p:cNvSpPr>
-            <a:spLocks noGrp="1"/>
-          </p:cNvSpPr>
-          <p:nvPr>
-            <p:ph type="body" idx="1"/>
-          </p:nvPr>
-        </p:nvSpPr>
-        <p:spPr/>
+              <a:rPr lang="en-US" sz="1300" dirty="0">
+                <a:solidFill>
+                  <a:srgbClr val="2A2540"/>
+                </a:solidFill>
+              </a:rPr>
+              <a:t>Learn user &amp; item vectors on the target vertical, where we want to recommend.</a:t>
+            </a:r>
+          </a:p>
+        </p:txBody>
+      </p:sp>
+      <p:sp>
+        <p:nvSpPr>
+          <p:cNvPr id="509" name="C509"/>
+          <p:cNvSpPr/>
+          <p:nvPr/>
+        </p:nvSpPr>
+        <p:spPr>
+          <a:xfrm>
+            <a:off x="8737600" y="2133600"/>
+            <a:ext cx="2946400" cy="1879600"/>
+          </a:xfrm>
+          <a:prstGeom prst="roundRect">
+            <a:avLst>
+              <a:gd name="adj" fmla="val 7000"/>
+            </a:avLst>
+          </a:prstGeom>
+          <a:solidFill>
+            <a:srgbClr val="E5F8F5"/>
+          </a:solidFill>
+          <a:ln>
+            <a:noFill/>
+          </a:ln>
+        </p:spPr>
         <p:txBody>
           <a:bodyPr/>
           <a:lstStyle/>
           <a:p>
-            <a:endParaRPr lang="en-IL" dirty="0"/>
+            <a:endParaRPr/>
+          </a:p>
+        </p:txBody>
+      </p:sp>
+      <p:sp>
+        <p:nvSpPr>
+          <p:cNvPr id="510" name="B510"/>
+          <p:cNvSpPr/>
+          <p:nvPr/>
+        </p:nvSpPr>
+        <p:spPr>
+          <a:xfrm>
+            <a:off x="8940800" y="2336800"/>
+            <a:ext cx="431800" cy="431800"/>
+          </a:xfrm>
+          <a:prstGeom prst="ellipse">
+            <a:avLst/>
+          </a:prstGeom>
+          <a:solidFill>
+            <a:srgbClr val="067A68"/>
+          </a:solidFill>
+          <a:ln>
+            <a:noFill/>
+          </a:ln>
+        </p:spPr>
+        <p:txBody>
+          <a:bodyPr wrap="none" lIns="0" tIns="0" rIns="0" bIns="0" anchor="ctr" anchorCtr="1"/>
+          <a:lstStyle/>
+          <a:p>
+            <a:pPr algn="ctr"/>
+            <a:r>
+              <a:rPr lang="en-US" sz="1600" b="1" dirty="0">
+                <a:solidFill>
+                  <a:srgbClr val="FFFFFF"/>
+                </a:solidFill>
+              </a:rPr>
+              <a:t>3</a:t>
+            </a:r>
+          </a:p>
+        </p:txBody>
+      </p:sp>
+      <p:sp>
+        <p:nvSpPr>
+          <p:cNvPr id="511" name="T511"/>
+          <p:cNvSpPr txBox="1"/>
+          <p:nvPr/>
+        </p:nvSpPr>
+        <p:spPr>
+          <a:xfrm>
+            <a:off x="8940800" y="2895600"/>
+            <a:ext cx="2540000" cy="304800"/>
+          </a:xfrm>
+          <a:prstGeom prst="rect">
+            <a:avLst/>
+          </a:prstGeom>
+          <a:noFill/>
+        </p:spPr>
+        <p:txBody>
+          <a:bodyPr wrap="square" lIns="0" tIns="0" rIns="0" bIns="0" anchor="t"/>
+          <a:lstStyle/>
+          <a:p>
+            <a:r>
+              <a:rPr lang="en-US" sz="1600" b="1" dirty="0">
+                <a:solidFill>
+                  <a:srgbClr val="12101A"/>
+                </a:solidFill>
+              </a:rPr>
+              <a:t>Mapping function</a:t>
+            </a:r>
+          </a:p>
+        </p:txBody>
+      </p:sp>
+      <p:sp>
+        <p:nvSpPr>
+          <p:cNvPr id="512" name="T512"/>
+          <p:cNvSpPr txBox="1"/>
+          <p:nvPr/>
+        </p:nvSpPr>
+        <p:spPr>
+          <a:xfrm>
+            <a:off x="8940800" y="3251200"/>
+            <a:ext cx="2540000" cy="660400"/>
+          </a:xfrm>
+          <a:prstGeom prst="rect">
+            <a:avLst/>
+          </a:prstGeom>
+          <a:noFill/>
+        </p:spPr>
+        <p:txBody>
+          <a:bodyPr wrap="square" lIns="0" tIns="0" rIns="0" bIns="0" anchor="t"/>
+          <a:lstStyle/>
+          <a:p>
+            <a:pPr>
+              <a:lnSpc>
+                <a:spcPts val="1500"/>
+              </a:lnSpc>
+            </a:pPr>
+            <a:r>
+              <a:rPr lang="en-US" sz="1300" dirty="0">
+                <a:solidFill>
+                  <a:srgbClr val="2A2540"/>
+                </a:solidFill>
+              </a:rPr>
+              <a:t>Learns to map a source-user vector to its target-vector. Trained on shared users.</a:t>
+            </a:r>
+          </a:p>
+        </p:txBody>
+      </p:sp>
+      <p:sp>
+        <p:nvSpPr>
+          <p:cNvPr id="513" name="A513"/>
+          <p:cNvSpPr/>
+          <p:nvPr/>
+        </p:nvSpPr>
+        <p:spPr>
+          <a:xfrm>
+            <a:off x="4521200" y="2819400"/>
+            <a:ext cx="406400" cy="508000"/>
+          </a:xfrm>
+          <a:prstGeom prst="rightArrow">
+            <a:avLst/>
+          </a:prstGeom>
+          <a:solidFill>
+            <a:srgbClr val="6C3BFF"/>
+          </a:solidFill>
+          <a:ln>
+            <a:noFill/>
+          </a:ln>
+        </p:spPr>
+        <p:txBody>
+          <a:bodyPr/>
+          <a:lstStyle/>
+          <a:p>
+            <a:endParaRPr/>
+          </a:p>
+        </p:txBody>
+      </p:sp>
+      <p:sp>
+        <p:nvSpPr>
+          <p:cNvPr id="514" name="A514"/>
+          <p:cNvSpPr/>
+          <p:nvPr/>
+        </p:nvSpPr>
+        <p:spPr>
+          <a:xfrm>
+            <a:off x="8128000" y="2819400"/>
+            <a:ext cx="406400" cy="508000"/>
+          </a:xfrm>
+          <a:prstGeom prst="rightArrow">
+            <a:avLst/>
+          </a:prstGeom>
+          <a:solidFill>
+            <a:srgbClr val="FF5C7A"/>
+          </a:solidFill>
+          <a:ln>
+            <a:noFill/>
+          </a:ln>
+        </p:spPr>
+        <p:txBody>
+          <a:bodyPr/>
+          <a:lstStyle/>
+          <a:p>
+            <a:endParaRPr/>
+          </a:p>
+        </p:txBody>
+      </p:sp>
+      <p:sp>
+        <p:nvSpPr>
+          <p:cNvPr id="515" name="C515"/>
+          <p:cNvSpPr/>
+          <p:nvPr/>
+        </p:nvSpPr>
+        <p:spPr>
+          <a:xfrm>
+            <a:off x="1524000" y="4419600"/>
+            <a:ext cx="10160000" cy="660400"/>
+          </a:xfrm>
+          <a:prstGeom prst="roundRect">
+            <a:avLst>
+              <a:gd name="adj" fmla="val 7000"/>
+            </a:avLst>
+          </a:prstGeom>
+          <a:solidFill>
+            <a:srgbClr val="FFFFFF"/>
+          </a:solidFill>
+          <a:ln w="19050">
+            <a:solidFill>
+              <a:srgbClr val="6C3BFF"/>
+            </a:solidFill>
+          </a:ln>
+        </p:spPr>
+        <p:txBody>
+          <a:bodyPr/>
+          <a:lstStyle/>
+          <a:p>
+            <a:endParaRPr/>
+          </a:p>
+        </p:txBody>
+      </p:sp>
+      <p:sp>
+        <p:nvSpPr>
+          <p:cNvPr id="516" name="T516"/>
+          <p:cNvSpPr txBox="1"/>
+          <p:nvPr/>
+        </p:nvSpPr>
+        <p:spPr>
+          <a:xfrm>
+            <a:off x="1778000" y="4521200"/>
+            <a:ext cx="9652000" cy="508000"/>
+          </a:xfrm>
+          <a:prstGeom prst="rect">
+            <a:avLst/>
+          </a:prstGeom>
+          <a:noFill/>
+        </p:spPr>
+        <p:txBody>
+          <a:bodyPr wrap="square" lIns="0" tIns="0" rIns="0" bIns="0" anchor="t"/>
+          <a:lstStyle/>
+          <a:p>
+            <a:pPr>
+              <a:lnSpc>
+                <a:spcPts val="1600"/>
+              </a:lnSpc>
+            </a:pPr>
+            <a:r>
+              <a:rPr lang="en-US" sz="1350" b="1" dirty="0">
+                <a:solidFill>
+                  <a:srgbClr val="6C3BFF"/>
+                </a:solidFill>
+              </a:rPr>
+              <a:t>At recommendation time:  </a:t>
+            </a:r>
+            <a:r>
+              <a:rPr lang="en-US" sz="1350" dirty="0">
+                <a:solidFill>
+                  <a:srgbClr val="12101A"/>
+                </a:solidFill>
+              </a:rPr>
+              <a:t>a cold user's source vector → through the mapping → rank target-vertical items by match. The content bridge is item text + taxonomy.</a:t>
+            </a:r>
+          </a:p>
+        </p:txBody>
+      </p:sp>
+      <p:sp>
+        <p:nvSpPr>
+          <p:cNvPr id="517" name="T517"/>
+          <p:cNvSpPr txBox="1"/>
+          <p:nvPr/>
+        </p:nvSpPr>
+        <p:spPr>
+          <a:xfrm>
+            <a:off x="1524000" y="5207000"/>
+            <a:ext cx="10160000" cy="304800"/>
+          </a:xfrm>
+          <a:prstGeom prst="rect">
+            <a:avLst/>
+          </a:prstGeom>
+          <a:noFill/>
+        </p:spPr>
+        <p:txBody>
+          <a:bodyPr wrap="square" lIns="0" tIns="0" rIns="0" bIns="0" anchor="t"/>
+          <a:lstStyle/>
+          <a:p>
+            <a:r>
+              <a:rPr lang="en-US" sz="1250" i="1" dirty="0">
+                <a:solidFill>
+                  <a:srgbClr val="6C3BFF"/>
+                </a:solidFill>
+              </a:rPr>
+              <a:t>Evaluated head-to-head vs. a single-vertical MF / NCF baseline on Recall@K and NDCG@K across 8 viable pairs.</a:t>
+            </a:r>
           </a:p>
         </p:txBody>
       </p:sp>
     </p:spTree>
     <p:extLst>
       <p:ext uri="{BB962C8B-B14F-4D97-AF65-F5344CB8AC3E}">
-        <p14:creationId xmlns:p14="http://schemas.microsoft.com/office/powerpoint/2010/main" val="321133493"/>
+        <p14:creationId xmlns:p14="http://schemas.microsoft.com/office/powerpoint/2010/main" val="3252378547"/>
       </p:ext>
     </p:extLst>
   </p:cSld>
@@ -7106,7 +5455,7 @@
           <p:cNvPr id="2" name="Title 1">
             <a:extLst>
               <a:ext uri="{FF2B5EF4-FFF2-40B4-BE49-F238E27FC236}">
-                <a16:creationId xmlns:a16="http://schemas.microsoft.com/office/drawing/2014/main" id="{FA1861AF-22E0-DD96-16A1-81362CC1A35C}"/>
+                <a16:creationId xmlns:a16="http://schemas.microsoft.com/office/drawing/2014/main" id="{9073ADC1-0E06-F17E-9A0B-DC64D22FC011}"/>
               </a:ext>
             </a:extLst>
           </p:cNvPr>
@@ -7133,7 +5482,7 @@
                   <a:srgbClr val="6C3BFF"/>
                 </a:solidFill>
               </a:rPr>
-              <a:t>THE FINISHED PRODUCT</a:t>
+              <a:t>STAGE 1</a:t>
             </a:r>
           </a:p>
           <a:p>
@@ -7142,21 +5491,54 @@
             </a:pPr>
             <a:r>
               <a:rPr lang="en-US" dirty="0"/>
-              <a:t>One system that routes each pair to its strongest signal</a:t>
-            </a:r>
-          </a:p>
-        </p:txBody>
-      </p:sp>
-      <p:sp>
-        <p:nvSpPr>
-          <p:cNvPr id="600" name="intro"/>
+              <a:t>A hybrid two-tower recommender, per vertical</a:t>
+            </a:r>
+          </a:p>
+        </p:txBody>
+      </p:sp>
+      <p:sp>
+        <p:nvSpPr>
+          <p:cNvPr id="600" name="N600"/>
           <p:cNvSpPr/>
           <p:nvPr/>
         </p:nvSpPr>
         <p:spPr>
           <a:xfrm>
-            <a:off x="762000" y="1879600"/>
-            <a:ext cx="10668000" cy="508000"/>
+            <a:off x="1016000" y="1905000"/>
+            <a:ext cx="3810000" cy="3175000"/>
+          </a:xfrm>
+          <a:prstGeom prst="roundRect">
+            <a:avLst>
+              <a:gd name="adj" fmla="val 6000"/>
+            </a:avLst>
+          </a:prstGeom>
+          <a:solidFill>
+            <a:srgbClr val="EDEAF7"/>
+          </a:solidFill>
+          <a:ln w="12700">
+            <a:solidFill>
+              <a:srgbClr val="D9D2F2"/>
+            </a:solidFill>
+          </a:ln>
+        </p:spPr>
+        <p:txBody>
+          <a:bodyPr/>
+          <a:lstStyle/>
+          <a:p>
+            <a:endParaRPr/>
+          </a:p>
+        </p:txBody>
+      </p:sp>
+      <p:sp>
+        <p:nvSpPr>
+          <p:cNvPr id="601" name="N601"/>
+          <p:cNvSpPr/>
+          <p:nvPr/>
+        </p:nvSpPr>
+        <p:spPr>
+          <a:xfrm>
+            <a:off x="1016000" y="2032000"/>
+            <a:ext cx="3810000" cy="381000"/>
           </a:xfrm>
           <a:prstGeom prst="rect">
             <a:avLst/>
@@ -7167,39 +5549,146 @@
           </a:ln>
         </p:spPr>
         <p:txBody>
-          <a:bodyPr wrap="square" lIns="91440" tIns="45720" rIns="91440" bIns="45720" anchor="t">
+          <a:bodyPr wrap="square" lIns="45720" tIns="27432" rIns="45720" bIns="27432" anchor="ctr">
             <a:normAutofit/>
           </a:bodyPr>
           <a:lstStyle/>
           <a:p>
-            <a:pPr algn="l">
-              <a:buNone/>
-            </a:pPr>
-            <a:r>
-              <a:rPr lang="en-US" sz="1400" b="0" i="0" dirty="0">
-                <a:solidFill>
-                  <a:srgbClr val="2A2540"/>
-                </a:solidFill>
-              </a:rPr>
-              <a:t>No single model wins everywhere — so we route each pair to its strongest signal.</a:t>
-            </a:r>
-          </a:p>
-        </p:txBody>
-      </p:sp>
-      <p:sp>
-        <p:nvSpPr>
-          <p:cNvPr id="602" name="node"/>
+            <a:pPr algn="ctr"/>
+            <a:r>
+              <a:rPr lang="en-US" sz="1300" b="1" i="0" dirty="0">
+                <a:solidFill>
+                  <a:srgbClr val="6C3BFF"/>
+                </a:solidFill>
+              </a:rPr>
+              <a:t>USER TOWER</a:t>
+            </a:r>
+          </a:p>
+        </p:txBody>
+      </p:sp>
+      <p:sp>
+        <p:nvSpPr>
+          <p:cNvPr id="602" name="N602"/>
           <p:cNvSpPr/>
           <p:nvPr/>
         </p:nvSpPr>
         <p:spPr>
           <a:xfrm>
-            <a:off x="4191000" y="2489200"/>
-            <a:ext cx="3810000" cy="711200"/>
+            <a:off x="1397000" y="2692400"/>
+            <a:ext cx="3048000" cy="762000"/>
           </a:xfrm>
           <a:prstGeom prst="roundRect">
             <a:avLst>
-              <a:gd name="adj" fmla="val 14000"/>
+              <a:gd name="adj" fmla="val 9000"/>
+            </a:avLst>
+          </a:prstGeom>
+          <a:solidFill>
+            <a:srgbClr val="FFFFFF"/>
+          </a:solidFill>
+          <a:ln w="12700">
+            <a:solidFill>
+              <a:srgbClr val="D9D2F2"/>
+            </a:solidFill>
+          </a:ln>
+        </p:spPr>
+        <p:txBody>
+          <a:bodyPr wrap="square" lIns="45720" tIns="27432" rIns="45720" bIns="27432" anchor="ctr">
+            <a:normAutofit/>
+          </a:bodyPr>
+          <a:lstStyle/>
+          <a:p>
+            <a:pPr algn="ctr"/>
+            <a:r>
+              <a:rPr lang="en-US" sz="1300" b="1" i="0" dirty="0">
+                <a:solidFill>
+                  <a:srgbClr val="12101A"/>
+                </a:solidFill>
+              </a:rPr>
+              <a:t>user_emb[ u ]</a:t>
+            </a:r>
+          </a:p>
+        </p:txBody>
+      </p:sp>
+      <p:sp>
+        <p:nvSpPr>
+          <p:cNvPr id="603" name="N603"/>
+          <p:cNvSpPr/>
+          <p:nvPr/>
+        </p:nvSpPr>
+        <p:spPr>
+          <a:xfrm>
+            <a:off x="1397000" y="3556000"/>
+            <a:ext cx="3048000" cy="304800"/>
+          </a:xfrm>
+          <a:prstGeom prst="rect">
+            <a:avLst/>
+          </a:prstGeom>
+          <a:noFill/>
+          <a:ln>
+            <a:noFill/>
+          </a:ln>
+        </p:spPr>
+        <p:txBody>
+          <a:bodyPr wrap="square" lIns="45720" tIns="27432" rIns="45720" bIns="27432" anchor="ctr">
+            <a:normAutofit/>
+          </a:bodyPr>
+          <a:lstStyle/>
+          <a:p>
+            <a:pPr algn="ctr"/>
+            <a:r>
+              <a:rPr lang="en-US" sz="1150" b="0" i="1" dirty="0">
+                <a:solidFill>
+                  <a:srgbClr val="6E6A7C"/>
+                </a:solidFill>
+              </a:rPr>
+              <a:t>a plain learned lookup table</a:t>
+            </a:r>
+          </a:p>
+        </p:txBody>
+      </p:sp>
+      <p:sp>
+        <p:nvSpPr>
+          <p:cNvPr id="604" name="N604"/>
+          <p:cNvSpPr/>
+          <p:nvPr/>
+        </p:nvSpPr>
+        <p:spPr>
+          <a:xfrm>
+            <a:off x="2819400" y="3911600"/>
+            <a:ext cx="203200" cy="381000"/>
+          </a:xfrm>
+          <a:prstGeom prst="downArrow">
+            <a:avLst/>
+          </a:prstGeom>
+          <a:solidFill>
+            <a:srgbClr val="B8AEE8"/>
+          </a:solidFill>
+          <a:ln>
+            <a:noFill/>
+          </a:ln>
+        </p:spPr>
+        <p:txBody>
+          <a:bodyPr/>
+          <a:lstStyle/>
+          <a:p>
+            <a:endParaRPr/>
+          </a:p>
+        </p:txBody>
+      </p:sp>
+      <p:sp>
+        <p:nvSpPr>
+          <p:cNvPr id="605" name="N605"/>
+          <p:cNvSpPr/>
+          <p:nvPr/>
+        </p:nvSpPr>
+        <p:spPr>
+          <a:xfrm>
+            <a:off x="1397000" y="4343400"/>
+            <a:ext cx="3048000" cy="533400"/>
+          </a:xfrm>
+          <a:prstGeom prst="roundRect">
+            <a:avLst>
+              <a:gd name="adj" fmla="val 12000"/>
             </a:avLst>
           </a:prstGeom>
           <a:solidFill>
@@ -7210,151 +5699,66 @@
           </a:ln>
         </p:spPr>
         <p:txBody>
-          <a:bodyPr wrap="square" lIns="91440" tIns="45720" rIns="91440" bIns="45720" anchor="ctr">
+          <a:bodyPr wrap="square" lIns="45720" tIns="27432" rIns="45720" bIns="27432" anchor="ctr">
             <a:normAutofit/>
           </a:bodyPr>
           <a:lstStyle/>
           <a:p>
-            <a:pPr algn="ctr">
-              <a:buNone/>
-            </a:pPr>
-            <a:r>
-              <a:rPr lang="en-US" sz="1400" b="1" i="0" dirty="0">
+            <a:pPr algn="ctr"/>
+            <a:r>
+              <a:rPr lang="en-US" sz="1300" b="1" i="0" dirty="0">
                 <a:solidFill>
                   <a:srgbClr val="FFFFFF"/>
                 </a:solidFill>
               </a:rPr>
-              <a:t>Is the transfer signal strong enough to trust?</a:t>
-            </a:r>
-          </a:p>
-        </p:txBody>
-      </p:sp>
-      <p:sp>
-        <p:nvSpPr>
-          <p:cNvPr id="630" name="stem"/>
+              <a:t>user vector  (64-d)</a:t>
+            </a:r>
+          </a:p>
+        </p:txBody>
+      </p:sp>
+      <p:sp>
+        <p:nvSpPr>
+          <p:cNvPr id="606" name="N606"/>
           <p:cNvSpPr/>
           <p:nvPr/>
         </p:nvSpPr>
         <p:spPr>
           <a:xfrm>
-            <a:off x="6070600" y="3200400"/>
-            <a:ext cx="50800" cy="431800"/>
-          </a:xfrm>
-          <a:prstGeom prst="rect">
-            <a:avLst/>
+            <a:off x="6350000" y="1905000"/>
+            <a:ext cx="4826000" cy="3175000"/>
+          </a:xfrm>
+          <a:prstGeom prst="roundRect">
+            <a:avLst>
+              <a:gd name="adj" fmla="val 6000"/>
+            </a:avLst>
           </a:prstGeom>
           <a:solidFill>
-            <a:srgbClr val="6C3BFF"/>
+            <a:srgbClr val="EDEAF7"/>
           </a:solidFill>
-          <a:ln>
-            <a:noFill/>
+          <a:ln w="12700">
+            <a:solidFill>
+              <a:srgbClr val="CFE9E3"/>
+            </a:solidFill>
           </a:ln>
         </p:spPr>
         <p:txBody>
-          <a:bodyPr anchor="t"/>
-          <a:lstStyle/>
-          <a:p>
-            <a:endParaRPr lang="en-US"/>
-          </a:p>
-        </p:txBody>
-      </p:sp>
-      <p:sp>
-        <p:nvSpPr>
-          <p:cNvPr id="631" name="hbar"/>
+          <a:bodyPr/>
+          <a:lstStyle/>
+          <a:p>
+            <a:endParaRPr/>
+          </a:p>
+        </p:txBody>
+      </p:sp>
+      <p:sp>
+        <p:nvSpPr>
+          <p:cNvPr id="607" name="N607"/>
           <p:cNvSpPr/>
           <p:nvPr/>
         </p:nvSpPr>
         <p:spPr>
           <a:xfrm>
-            <a:off x="3175000" y="3632200"/>
-            <a:ext cx="5867400" cy="50800"/>
-          </a:xfrm>
-          <a:prstGeom prst="rect">
-            <a:avLst/>
-          </a:prstGeom>
-          <a:solidFill>
-            <a:srgbClr val="6C3BFF"/>
-          </a:solidFill>
-          <a:ln>
-            <a:noFill/>
-          </a:ln>
-        </p:spPr>
-        <p:txBody>
-          <a:bodyPr anchor="t"/>
-          <a:lstStyle/>
-          <a:p>
-            <a:endParaRPr lang="en-US"/>
-          </a:p>
-        </p:txBody>
-      </p:sp>
-      <p:sp>
-        <p:nvSpPr>
-          <p:cNvPr id="632" name="dropL"/>
-          <p:cNvSpPr/>
-          <p:nvPr/>
-        </p:nvSpPr>
-        <p:spPr>
-          <a:xfrm>
-            <a:off x="3149600" y="3632200"/>
-            <a:ext cx="50800" cy="558800"/>
-          </a:xfrm>
-          <a:prstGeom prst="rect">
-            <a:avLst/>
-          </a:prstGeom>
-          <a:solidFill>
-            <a:srgbClr val="6C3BFF"/>
-          </a:solidFill>
-          <a:ln>
-            <a:noFill/>
-          </a:ln>
-        </p:spPr>
-        <p:txBody>
-          <a:bodyPr anchor="t"/>
-          <a:lstStyle/>
-          <a:p>
-            <a:endParaRPr lang="en-US"/>
-          </a:p>
-        </p:txBody>
-      </p:sp>
-      <p:sp>
-        <p:nvSpPr>
-          <p:cNvPr id="633" name="dropR"/>
-          <p:cNvSpPr/>
-          <p:nvPr/>
-        </p:nvSpPr>
-        <p:spPr>
-          <a:xfrm>
-            <a:off x="8991600" y="3632200"/>
-            <a:ext cx="50800" cy="558800"/>
-          </a:xfrm>
-          <a:prstGeom prst="rect">
-            <a:avLst/>
-          </a:prstGeom>
-          <a:solidFill>
-            <a:srgbClr val="00C2A8"/>
-          </a:solidFill>
-          <a:ln>
-            <a:noFill/>
-          </a:ln>
-        </p:spPr>
-        <p:txBody>
-          <a:bodyPr anchor="t"/>
-          <a:lstStyle/>
-          <a:p>
-            <a:endParaRPr lang="en-US"/>
-          </a:p>
-        </p:txBody>
-      </p:sp>
-      <p:sp>
-        <p:nvSpPr>
-          <p:cNvPr id="604" name="labL"/>
-          <p:cNvSpPr/>
-          <p:nvPr/>
-        </p:nvSpPr>
-        <p:spPr>
-          <a:xfrm>
-            <a:off x="1143000" y="3759200"/>
-            <a:ext cx="4064000" cy="304800"/>
+            <a:off x="6350000" y="2032000"/>
+            <a:ext cx="4826000" cy="381000"/>
           </a:xfrm>
           <a:prstGeom prst="rect">
             <a:avLst/>
@@ -7365,43 +5769,76 @@
           </a:ln>
         </p:spPr>
         <p:txBody>
-          <a:bodyPr wrap="square" lIns="91440" tIns="45720" rIns="91440" bIns="45720" anchor="t">
+          <a:bodyPr wrap="square" lIns="45720" tIns="27432" rIns="45720" bIns="27432" anchor="ctr">
             <a:normAutofit/>
           </a:bodyPr>
           <a:lstStyle/>
           <a:p>
-            <a:pPr algn="ctr">
-              <a:buNone/>
-            </a:pPr>
-            <a:r>
-              <a:rPr lang="en-US" sz="1150" b="1" i="0" dirty="0">
-                <a:solidFill>
-                  <a:srgbClr val="6C3BFF"/>
-                </a:solidFill>
-              </a:rPr>
-              <a:t>YES · RICH pairs</a:t>
-            </a:r>
-            <a:r>
-              <a:rPr lang="en-US" sz="1150" b="0" i="0" dirty="0">
-                <a:solidFill>
-                  <a:srgbClr val="6E6A7C"/>
-                </a:solidFill>
-              </a:rPr>
-              <a:t>                 ≥20k overlap (5 pairs)</a:t>
-            </a:r>
-          </a:p>
-        </p:txBody>
-      </p:sp>
-      <p:sp>
-        <p:nvSpPr>
-          <p:cNvPr id="605" name="labR"/>
+            <a:pPr algn="ctr"/>
+            <a:r>
+              <a:rPr lang="en-US" sz="1300" b="1" i="0" dirty="0">
+                <a:solidFill>
+                  <a:srgbClr val="00C2A8"/>
+                </a:solidFill>
+              </a:rPr>
+              <a:t>ITEM TOWER  (hybrid)</a:t>
+            </a:r>
+          </a:p>
+        </p:txBody>
+      </p:sp>
+      <p:sp>
+        <p:nvSpPr>
+          <p:cNvPr id="608" name="N608"/>
           <p:cNvSpPr/>
           <p:nvPr/>
         </p:nvSpPr>
         <p:spPr>
           <a:xfrm>
-            <a:off x="6985000" y="3759200"/>
-            <a:ext cx="4064000" cy="304800"/>
+            <a:off x="6604000" y="2489200"/>
+            <a:ext cx="2921000" cy="355600"/>
+          </a:xfrm>
+          <a:prstGeom prst="roundRect">
+            <a:avLst>
+              <a:gd name="adj" fmla="val 10000"/>
+            </a:avLst>
+          </a:prstGeom>
+          <a:solidFill>
+            <a:srgbClr val="FFFFFF"/>
+          </a:solidFill>
+          <a:ln w="12700">
+            <a:solidFill>
+              <a:srgbClr val="CFE9E3"/>
+            </a:solidFill>
+          </a:ln>
+        </p:spPr>
+        <p:txBody>
+          <a:bodyPr wrap="square" lIns="45720" tIns="27432" rIns="45720" bIns="27432" anchor="ctr">
+            <a:normAutofit/>
+          </a:bodyPr>
+          <a:lstStyle/>
+          <a:p>
+            <a:pPr algn="l"/>
+            <a:r>
+              <a:rPr lang="en-US" sz="1200" b="1" i="0" dirty="0">
+                <a:solidFill>
+                  <a:srgbClr val="12101A"/>
+                </a:solidFill>
+              </a:rPr>
+              <a:t>id_factor</a:t>
+            </a:r>
+          </a:p>
+        </p:txBody>
+      </p:sp>
+      <p:sp>
+        <p:nvSpPr>
+          <p:cNvPr id="609" name="N609"/>
+          <p:cNvSpPr/>
+          <p:nvPr/>
+        </p:nvSpPr>
+        <p:spPr>
+          <a:xfrm>
+            <a:off x="9601200" y="2489200"/>
+            <a:ext cx="1371600" cy="355600"/>
           </a:xfrm>
           <a:prstGeom prst="rect">
             <a:avLst/>
@@ -7412,43 +5849,273 @@
           </a:ln>
         </p:spPr>
         <p:txBody>
-          <a:bodyPr wrap="square" lIns="91440" tIns="45720" rIns="91440" bIns="45720" anchor="t">
+          <a:bodyPr wrap="square" lIns="45720" tIns="27432" rIns="45720" bIns="27432" anchor="ctr">
             <a:normAutofit/>
           </a:bodyPr>
           <a:lstStyle/>
           <a:p>
-            <a:pPr algn="ctr">
-              <a:buNone/>
-            </a:pPr>
-            <a:r>
-              <a:rPr lang="en-US" sz="1150" b="1" i="0" dirty="0">
-                <a:solidFill>
-                  <a:srgbClr val="00C2A8"/>
-                </a:solidFill>
-              </a:rPr>
-              <a:t>NO · SPARSE target</a:t>
-            </a:r>
-            <a:r>
-              <a:rPr lang="en-US" sz="1150" b="0" i="0" dirty="0">
+            <a:pPr algn="l"/>
+            <a:r>
+              <a:rPr lang="en-US" sz="1050" b="0" i="1" dirty="0">
                 <a:solidFill>
                   <a:srgbClr val="6E6A7C"/>
                 </a:solidFill>
               </a:rPr>
-              <a:t>              Video-Games (3 pairs)</a:t>
-            </a:r>
-          </a:p>
-        </p:txBody>
-      </p:sp>
-      <p:sp>
-        <p:nvSpPr>
-          <p:cNvPr id="608" name="cardL"/>
+              <a:t>free per-item</a:t>
+            </a:r>
+          </a:p>
+        </p:txBody>
+      </p:sp>
+      <p:sp>
+        <p:nvSpPr>
+          <p:cNvPr id="611" name="N611"/>
           <p:cNvSpPr/>
           <p:nvPr/>
         </p:nvSpPr>
         <p:spPr>
           <a:xfrm>
-            <a:off x="1143000" y="4241800"/>
-            <a:ext cx="4064000" cy="2184400"/>
+            <a:off x="6604000" y="3022600"/>
+            <a:ext cx="2921000" cy="355600"/>
+          </a:xfrm>
+          <a:prstGeom prst="roundRect">
+            <a:avLst>
+              <a:gd name="adj" fmla="val 10000"/>
+            </a:avLst>
+          </a:prstGeom>
+          <a:solidFill>
+            <a:srgbClr val="FFFFFF"/>
+          </a:solidFill>
+          <a:ln w="12700">
+            <a:solidFill>
+              <a:srgbClr val="CFE9E3"/>
+            </a:solidFill>
+          </a:ln>
+        </p:spPr>
+        <p:txBody>
+          <a:bodyPr wrap="square" lIns="45720" tIns="27432" rIns="45720" bIns="27432" anchor="ctr">
+            <a:normAutofit/>
+          </a:bodyPr>
+          <a:lstStyle/>
+          <a:p>
+            <a:pPr algn="l"/>
+            <a:r>
+              <a:rPr lang="en-US" sz="1200" b="1" i="0" dirty="0">
+                <a:solidFill>
+                  <a:srgbClr val="12101A"/>
+                </a:solidFill>
+              </a:rPr>
+              <a:t>text_proj</a:t>
+            </a:r>
+          </a:p>
+        </p:txBody>
+      </p:sp>
+      <p:sp>
+        <p:nvSpPr>
+          <p:cNvPr id="612" name="N612"/>
+          <p:cNvSpPr/>
+          <p:nvPr/>
+        </p:nvSpPr>
+        <p:spPr>
+          <a:xfrm>
+            <a:off x="9601200" y="3022600"/>
+            <a:ext cx="1371600" cy="355600"/>
+          </a:xfrm>
+          <a:prstGeom prst="rect">
+            <a:avLst/>
+          </a:prstGeom>
+          <a:noFill/>
+          <a:ln>
+            <a:noFill/>
+          </a:ln>
+        </p:spPr>
+        <p:txBody>
+          <a:bodyPr wrap="square" lIns="45720" tIns="27432" rIns="45720" bIns="27432" anchor="ctr">
+            <a:normAutofit/>
+          </a:bodyPr>
+          <a:lstStyle/>
+          <a:p>
+            <a:pPr algn="l"/>
+            <a:r>
+              <a:rPr lang="en-US" sz="1050" b="0" i="1" dirty="0">
+                <a:solidFill>
+                  <a:srgbClr val="6E6A7C"/>
+                </a:solidFill>
+              </a:rPr>
+              <a:t>MiniLM 384→64</a:t>
+            </a:r>
+          </a:p>
+        </p:txBody>
+      </p:sp>
+      <p:sp>
+        <p:nvSpPr>
+          <p:cNvPr id="614" name="N614"/>
+          <p:cNvSpPr/>
+          <p:nvPr/>
+        </p:nvSpPr>
+        <p:spPr>
+          <a:xfrm>
+            <a:off x="6604000" y="3556000"/>
+            <a:ext cx="2921000" cy="355600"/>
+          </a:xfrm>
+          <a:prstGeom prst="roundRect">
+            <a:avLst>
+              <a:gd name="adj" fmla="val 10000"/>
+            </a:avLst>
+          </a:prstGeom>
+          <a:solidFill>
+            <a:srgbClr val="FFFFFF"/>
+          </a:solidFill>
+          <a:ln w="12700">
+            <a:solidFill>
+              <a:srgbClr val="CFE9E3"/>
+            </a:solidFill>
+          </a:ln>
+        </p:spPr>
+        <p:txBody>
+          <a:bodyPr wrap="square" lIns="45720" tIns="27432" rIns="45720" bIns="27432" anchor="ctr">
+            <a:normAutofit/>
+          </a:bodyPr>
+          <a:lstStyle/>
+          <a:p>
+            <a:pPr algn="l"/>
+            <a:r>
+              <a:rPr lang="en-US" sz="1200" b="1" i="0" dirty="0">
+                <a:solidFill>
+                  <a:srgbClr val="12101A"/>
+                </a:solidFill>
+              </a:rPr>
+              <a:t>cat_bag</a:t>
+            </a:r>
+          </a:p>
+        </p:txBody>
+      </p:sp>
+      <p:sp>
+        <p:nvSpPr>
+          <p:cNvPr id="615" name="N615"/>
+          <p:cNvSpPr/>
+          <p:nvPr/>
+        </p:nvSpPr>
+        <p:spPr>
+          <a:xfrm>
+            <a:off x="9601200" y="3556000"/>
+            <a:ext cx="1371600" cy="355600"/>
+          </a:xfrm>
+          <a:prstGeom prst="rect">
+            <a:avLst/>
+          </a:prstGeom>
+          <a:noFill/>
+          <a:ln>
+            <a:noFill/>
+          </a:ln>
+        </p:spPr>
+        <p:txBody>
+          <a:bodyPr wrap="square" lIns="45720" tIns="27432" rIns="45720" bIns="27432" anchor="ctr">
+            <a:normAutofit/>
+          </a:bodyPr>
+          <a:lstStyle/>
+          <a:p>
+            <a:pPr algn="l"/>
+            <a:r>
+              <a:rPr lang="en-US" sz="1050" b="0" i="1" dirty="0">
+                <a:solidFill>
+                  <a:srgbClr val="6E6A7C"/>
+                </a:solidFill>
+              </a:rPr>
+              <a:t>category vectors</a:t>
+            </a:r>
+          </a:p>
+        </p:txBody>
+      </p:sp>
+      <p:sp>
+        <p:nvSpPr>
+          <p:cNvPr id="617" name="N617"/>
+          <p:cNvSpPr/>
+          <p:nvPr/>
+        </p:nvSpPr>
+        <p:spPr>
+          <a:xfrm>
+            <a:off x="6604000" y="4089400"/>
+            <a:ext cx="2921000" cy="355600"/>
+          </a:xfrm>
+          <a:prstGeom prst="roundRect">
+            <a:avLst>
+              <a:gd name="adj" fmla="val 10000"/>
+            </a:avLst>
+          </a:prstGeom>
+          <a:solidFill>
+            <a:srgbClr val="FFFFFF"/>
+          </a:solidFill>
+          <a:ln w="12700">
+            <a:solidFill>
+              <a:srgbClr val="CFE9E3"/>
+            </a:solidFill>
+          </a:ln>
+        </p:spPr>
+        <p:txBody>
+          <a:bodyPr wrap="square" lIns="45720" tIns="27432" rIns="45720" bIns="27432" anchor="ctr">
+            <a:normAutofit/>
+          </a:bodyPr>
+          <a:lstStyle/>
+          <a:p>
+            <a:pPr algn="l"/>
+            <a:r>
+              <a:rPr lang="en-US" sz="1200" b="1" i="0" dirty="0">
+                <a:solidFill>
+                  <a:srgbClr val="12101A"/>
+                </a:solidFill>
+              </a:rPr>
+              <a:t>pop_proj</a:t>
+            </a:r>
+          </a:p>
+        </p:txBody>
+      </p:sp>
+      <p:sp>
+        <p:nvSpPr>
+          <p:cNvPr id="618" name="N618"/>
+          <p:cNvSpPr/>
+          <p:nvPr/>
+        </p:nvSpPr>
+        <p:spPr>
+          <a:xfrm>
+            <a:off x="9601200" y="4089400"/>
+            <a:ext cx="1371600" cy="355600"/>
+          </a:xfrm>
+          <a:prstGeom prst="rect">
+            <a:avLst/>
+          </a:prstGeom>
+          <a:noFill/>
+          <a:ln>
+            <a:noFill/>
+          </a:ln>
+        </p:spPr>
+        <p:txBody>
+          <a:bodyPr wrap="square" lIns="45720" tIns="27432" rIns="45720" bIns="27432" anchor="ctr">
+            <a:normAutofit/>
+          </a:bodyPr>
+          <a:lstStyle/>
+          <a:p>
+            <a:pPr algn="l"/>
+            <a:r>
+              <a:rPr lang="en-US" sz="1050" b="0" i="1" dirty="0">
+                <a:solidFill>
+                  <a:srgbClr val="6E6A7C"/>
+                </a:solidFill>
+              </a:rPr>
+              <a:t>popularity 2→64</a:t>
+            </a:r>
+          </a:p>
+        </p:txBody>
+      </p:sp>
+      <p:sp>
+        <p:nvSpPr>
+          <p:cNvPr id="619" name="N619"/>
+          <p:cNvSpPr/>
+          <p:nvPr/>
+        </p:nvSpPr>
+        <p:spPr>
+          <a:xfrm>
+            <a:off x="1016000" y="5308600"/>
+            <a:ext cx="10160000" cy="939800"/>
           </a:xfrm>
           <a:prstGeom prst="roundRect">
             <a:avLst>
@@ -7456,7 +6123,7 @@
             </a:avLst>
           </a:prstGeom>
           <a:solidFill>
-            <a:srgbClr val="EDEAF7"/>
+            <a:srgbClr val="FFFFFF"/>
           </a:solidFill>
           <a:ln w="19050">
             <a:solidFill>
@@ -7465,52 +6132,23 @@
           </a:ln>
         </p:spPr>
         <p:txBody>
-          <a:bodyPr anchor="t"/>
-          <a:lstStyle/>
-          <a:p>
-            <a:endParaRPr lang="en-US"/>
-          </a:p>
-        </p:txBody>
-      </p:sp>
-      <p:sp>
-        <p:nvSpPr>
-          <p:cNvPr id="609" name="cardLbar"/>
+          <a:bodyPr/>
+          <a:lstStyle/>
+          <a:p>
+            <a:endParaRPr/>
+          </a:p>
+        </p:txBody>
+      </p:sp>
+      <p:sp>
+        <p:nvSpPr>
+          <p:cNvPr id="620" name="N620"/>
           <p:cNvSpPr/>
           <p:nvPr/>
         </p:nvSpPr>
         <p:spPr>
           <a:xfrm>
-            <a:off x="1143000" y="4241800"/>
-            <a:ext cx="76200" cy="2184400"/>
-          </a:xfrm>
-          <a:prstGeom prst="rect">
-            <a:avLst/>
-          </a:prstGeom>
-          <a:solidFill>
-            <a:srgbClr val="6C3BFF"/>
-          </a:solidFill>
-          <a:ln>
-            <a:noFill/>
-          </a:ln>
-        </p:spPr>
-        <p:txBody>
-          <a:bodyPr anchor="t"/>
-          <a:lstStyle/>
-          <a:p>
-            <a:endParaRPr lang="en-US"/>
-          </a:p>
-        </p:txBody>
-      </p:sp>
-      <p:sp>
-        <p:nvSpPr>
-          <p:cNvPr id="610" name="hL"/>
-          <p:cNvSpPr/>
-          <p:nvPr/>
-        </p:nvSpPr>
-        <p:spPr>
-          <a:xfrm>
-            <a:off x="1422400" y="4419600"/>
-            <a:ext cx="3556000" cy="355600"/>
+            <a:off x="1219200" y="5308600"/>
+            <a:ext cx="9753600" cy="939800"/>
           </a:xfrm>
           <a:prstGeom prst="rect">
             <a:avLst/>
@@ -7521,35 +6159,155 @@
           </a:ln>
         </p:spPr>
         <p:txBody>
-          <a:bodyPr wrap="square" lIns="91440" tIns="45720" rIns="91440" bIns="45720" anchor="t">
+          <a:bodyPr wrap="square" lIns="45720" tIns="27432" rIns="45720" bIns="27432" anchor="ctr">
             <a:normAutofit/>
           </a:bodyPr>
           <a:lstStyle/>
           <a:p>
-            <a:pPr algn="l">
-              <a:buNone/>
-            </a:pPr>
-            <a:r>
-              <a:rPr lang="en-US" sz="1600" b="1" i="0" dirty="0">
+            <a:pPr algn="ctr"/>
+            <a:r>
+              <a:rPr lang="en-US" sz="1250" b="0" i="0" dirty="0">
                 <a:solidFill>
                   <a:srgbClr val="12101A"/>
                 </a:solidFill>
               </a:rPr>
-              <a:t>Serve EMCDR directly</a:t>
-            </a:r>
-          </a:p>
-        </p:txBody>
-      </p:sp>
-      <p:sp>
-        <p:nvSpPr>
-          <p:cNvPr id="611" name="bL"/>
+              <a:t>score(u, i)  =  user vector  ·  item vector — trained with BPR; loss that pushes a real item's score above a random unseen one</a:t>
+            </a:r>
+          </a:p>
+        </p:txBody>
+      </p:sp>
+      <p:sp>
+        <p:nvSpPr>
+          <p:cNvPr id="3" name="Down Arrow 2">
+            <a:extLst>
+              <a:ext uri="{FF2B5EF4-FFF2-40B4-BE49-F238E27FC236}">
+                <a16:creationId xmlns:a16="http://schemas.microsoft.com/office/drawing/2014/main" id="{2D1BD31F-00F0-A74A-8C8B-1EE8B3FBEBDC}"/>
+              </a:ext>
+            </a:extLst>
+          </p:cNvPr>
           <p:cNvSpPr/>
           <p:nvPr/>
         </p:nvSpPr>
         <p:spPr>
           <a:xfrm>
-            <a:off x="1422400" y="4876800"/>
-            <a:ext cx="3556000" cy="1397000"/>
+            <a:off x="7962900" y="4457700"/>
+            <a:ext cx="203200" cy="177800"/>
+          </a:xfrm>
+          <a:prstGeom prst="downArrow">
+            <a:avLst/>
+          </a:prstGeom>
+          <a:solidFill>
+            <a:srgbClr val="00C2A8"/>
+          </a:solidFill>
+          <a:ln w="19050" cap="flat" cmpd="sng" algn="ctr">
+            <a:noFill/>
+            <a:prstDash val="solid"/>
+            <a:miter lim="800000"/>
+          </a:ln>
+        </p:spPr>
+        <p:style>
+          <a:lnRef idx="2">
+            <a:schemeClr val="accent1">
+              <a:shade val="15000"/>
+            </a:schemeClr>
+          </a:lnRef>
+          <a:fillRef idx="1">
+            <a:schemeClr val="accent1"/>
+          </a:fillRef>
+          <a:effectRef idx="0">
+            <a:schemeClr val="accent1"/>
+          </a:effectRef>
+          <a:fontRef idx="minor">
+            <a:schemeClr val="lt1"/>
+          </a:fontRef>
+        </p:style>
+        <p:txBody>
+          <a:bodyPr vertOverflow="clip" horzOverflow="clip" rtlCol="0" anchor="t"/>
+          <a:lstStyle/>
+          <a:p>
+            <a:pPr algn="l"/>
+            <a:endParaRPr lang="en-IL"/>
+          </a:p>
+        </p:txBody>
+      </p:sp>
+      <p:sp>
+        <p:nvSpPr>
+          <p:cNvPr id="4" name="Rounded Rectangle 3">
+            <a:extLst>
+              <a:ext uri="{FF2B5EF4-FFF2-40B4-BE49-F238E27FC236}">
+                <a16:creationId xmlns:a16="http://schemas.microsoft.com/office/drawing/2014/main" id="{C6E5911F-187F-4541-80FC-65E89B3F09DF}"/>
+              </a:ext>
+            </a:extLst>
+          </p:cNvPr>
+          <p:cNvSpPr/>
+          <p:nvPr/>
+        </p:nvSpPr>
+        <p:spPr>
+          <a:xfrm>
+            <a:off x="6604000" y="4673600"/>
+            <a:ext cx="4368800" cy="355600"/>
+          </a:xfrm>
+          <a:prstGeom prst="roundRect">
+            <a:avLst/>
+          </a:prstGeom>
+          <a:solidFill>
+            <a:srgbClr val="00C2A8"/>
+          </a:solidFill>
+          <a:ln w="19050" cap="flat" cmpd="sng" algn="ctr">
+            <a:noFill/>
+            <a:prstDash val="solid"/>
+            <a:miter lim="800000"/>
+          </a:ln>
+        </p:spPr>
+        <p:style>
+          <a:lnRef idx="2">
+            <a:schemeClr val="accent1">
+              <a:shade val="15000"/>
+            </a:schemeClr>
+          </a:lnRef>
+          <a:fillRef idx="1">
+            <a:schemeClr val="accent1"/>
+          </a:fillRef>
+          <a:effectRef idx="0">
+            <a:schemeClr val="accent1"/>
+          </a:effectRef>
+          <a:fontRef idx="minor">
+            <a:schemeClr val="lt1"/>
+          </a:fontRef>
+        </p:style>
+        <p:txBody>
+          <a:bodyPr vertOverflow="clip" horzOverflow="clip" wrap="none" rtlCol="0" anchor="ctr" anchorCtr="0">
+            <a:noAutofit/>
+          </a:bodyPr>
+          <a:lstStyle/>
+          <a:p>
+            <a:pPr algn="l"/>
+            <a:r>
+              <a:rPr lang="en-US" sz="1300" b="1">
+                <a:solidFill>
+                  <a:srgbClr val="FFFFFF"/>
+                </a:solidFill>
+              </a:rPr>
+              <a:t>item vector  (64-d)</a:t>
+            </a:r>
+            <a:endParaRPr lang="en-IL" sz="1300" b="1">
+              <a:solidFill>
+                <a:srgbClr val="FFFFFF"/>
+              </a:solidFill>
+            </a:endParaRPr>
+          </a:p>
+        </p:txBody>
+      </p:sp>
+      <p:sp>
+        <p:nvSpPr>
+          <p:cNvPr id="610" name="N610"/>
+          <p:cNvSpPr/>
+          <p:nvPr/>
+        </p:nvSpPr>
+        <p:spPr>
+          <a:xfrm>
+            <a:off x="7861300" y="2794000"/>
+            <a:ext cx="406400" cy="279400"/>
           </a:xfrm>
           <a:prstGeom prst="rect">
             <a:avLst/>
@@ -7560,97 +6318,33 @@
           </a:ln>
         </p:spPr>
         <p:txBody>
-          <a:bodyPr wrap="square" lIns="91440" tIns="45720" rIns="91440" bIns="45720" anchor="t">
-            <a:normAutofit/>
+          <a:bodyPr wrap="none" lIns="45720" tIns="27432" rIns="45720" bIns="27432" anchor="ctr" anchorCtr="0">
+            <a:noAutofit/>
           </a:bodyPr>
           <a:lstStyle/>
           <a:p>
-            <a:pPr algn="l">
-              <a:buNone/>
-            </a:pPr>
-            <a:r>
-              <a:rPr lang="en-US" sz="1300" b="0" i="0" dirty="0">
-                <a:solidFill>
-                  <a:srgbClr val="2A2540"/>
-                </a:solidFill>
-              </a:rPr>
-              <a:t>Enough overlap to supervise the mapping — EMCDR is the outright best model and beats every baseline. Best on 5 of 8 pairs.</a:t>
-            </a:r>
-          </a:p>
-        </p:txBody>
-      </p:sp>
-      <p:sp>
-        <p:nvSpPr>
-          <p:cNvPr id="612" name="cardR"/>
+            <a:pPr algn="ctr"/>
+            <a:r>
+              <a:rPr lang="en-US" b="1" i="0" dirty="0">
+                <a:solidFill>
+                  <a:srgbClr val="00C2A8"/>
+                </a:solidFill>
+              </a:rPr>
+              <a:t>+</a:t>
+            </a:r>
+          </a:p>
+        </p:txBody>
+      </p:sp>
+      <p:sp>
+        <p:nvSpPr>
+          <p:cNvPr id="613" name="N613"/>
           <p:cNvSpPr/>
           <p:nvPr/>
         </p:nvSpPr>
         <p:spPr>
           <a:xfrm>
-            <a:off x="6985000" y="4241800"/>
-            <a:ext cx="4064000" cy="2184400"/>
-          </a:xfrm>
-          <a:prstGeom prst="roundRect">
-            <a:avLst>
-              <a:gd name="adj" fmla="val 6000"/>
-            </a:avLst>
-          </a:prstGeom>
-          <a:solidFill>
-            <a:srgbClr val="EDEAF7"/>
-          </a:solidFill>
-          <a:ln w="19050">
-            <a:solidFill>
-              <a:srgbClr val="00C2A8"/>
-            </a:solidFill>
-          </a:ln>
-        </p:spPr>
-        <p:txBody>
-          <a:bodyPr anchor="t"/>
-          <a:lstStyle/>
-          <a:p>
-            <a:endParaRPr lang="en-US"/>
-          </a:p>
-        </p:txBody>
-      </p:sp>
-      <p:sp>
-        <p:nvSpPr>
-          <p:cNvPr id="613" name="cardRbar"/>
-          <p:cNvSpPr/>
-          <p:nvPr/>
-        </p:nvSpPr>
-        <p:spPr>
-          <a:xfrm>
-            <a:off x="6985000" y="4241800"/>
-            <a:ext cx="76200" cy="2184400"/>
-          </a:xfrm>
-          <a:prstGeom prst="rect">
-            <a:avLst/>
-          </a:prstGeom>
-          <a:solidFill>
-            <a:srgbClr val="00C2A8"/>
-          </a:solidFill>
-          <a:ln>
-            <a:noFill/>
-          </a:ln>
-        </p:spPr>
-        <p:txBody>
-          <a:bodyPr anchor="t"/>
-          <a:lstStyle/>
-          <a:p>
-            <a:endParaRPr lang="en-US"/>
-          </a:p>
-        </p:txBody>
-      </p:sp>
-      <p:sp>
-        <p:nvSpPr>
-          <p:cNvPr id="614" name="hR"/>
-          <p:cNvSpPr/>
-          <p:nvPr/>
-        </p:nvSpPr>
-        <p:spPr>
-          <a:xfrm>
-            <a:off x="7264400" y="4419600"/>
-            <a:ext cx="3556000" cy="355600"/>
+            <a:off x="7861300" y="3327400"/>
+            <a:ext cx="406400" cy="279400"/>
           </a:xfrm>
           <a:prstGeom prst="rect">
             <a:avLst/>
@@ -7661,35 +6355,33 @@
           </a:ln>
         </p:spPr>
         <p:txBody>
-          <a:bodyPr wrap="square" lIns="91440" tIns="45720" rIns="91440" bIns="45720" anchor="t">
-            <a:normAutofit/>
+          <a:bodyPr wrap="none" lIns="45720" tIns="27432" rIns="45720" bIns="27432" anchor="ctr" anchorCtr="0">
+            <a:noAutofit/>
           </a:bodyPr>
           <a:lstStyle/>
           <a:p>
-            <a:pPr algn="l">
-              <a:buNone/>
-            </a:pPr>
-            <a:r>
-              <a:rPr lang="en-US" sz="1600" b="1" i="0" dirty="0">
-                <a:solidFill>
-                  <a:srgbClr val="12101A"/>
-                </a:solidFill>
-              </a:rPr>
-              <a:t>Serve content transfer</a:t>
-            </a:r>
-          </a:p>
-        </p:txBody>
-      </p:sp>
-      <p:sp>
-        <p:nvSpPr>
-          <p:cNvPr id="615" name="bR"/>
+            <a:pPr algn="ctr"/>
+            <a:r>
+              <a:rPr lang="en-US" b="1" i="0" dirty="0">
+                <a:solidFill>
+                  <a:srgbClr val="00C2A8"/>
+                </a:solidFill>
+              </a:rPr>
+              <a:t>+</a:t>
+            </a:r>
+          </a:p>
+        </p:txBody>
+      </p:sp>
+      <p:sp>
+        <p:nvSpPr>
+          <p:cNvPr id="616" name="N616"/>
           <p:cNvSpPr/>
           <p:nvPr/>
         </p:nvSpPr>
         <p:spPr>
           <a:xfrm>
-            <a:off x="7264400" y="4876800"/>
-            <a:ext cx="3556000" cy="1397000"/>
+            <a:off x="7861300" y="3860800"/>
+            <a:ext cx="406400" cy="279400"/>
           </a:xfrm>
           <a:prstGeom prst="rect">
             <a:avLst/>
@@ -7700,21 +6392,19 @@
           </a:ln>
         </p:spPr>
         <p:txBody>
-          <a:bodyPr wrap="square" lIns="91440" tIns="45720" rIns="91440" bIns="45720" anchor="t">
-            <a:normAutofit/>
+          <a:bodyPr wrap="none" lIns="45720" tIns="27432" rIns="45720" bIns="27432" anchor="ctr" anchorCtr="0">
+            <a:noAutofit/>
           </a:bodyPr>
           <a:lstStyle/>
           <a:p>
-            <a:pPr algn="l">
-              <a:buNone/>
-            </a:pPr>
-            <a:r>
-              <a:rPr lang="en-US" sz="1300" b="0" i="0" dirty="0">
-                <a:solidFill>
-                  <a:srgbClr val="2A2540"/>
-                </a:solidFill>
-              </a:rPr>
-              <a:t>Too little overlap and too few repeat purchases to learn item IDs — shared MiniLM text is the only reliable bridge. Best sparse result (0.36 on Toys→VG); still beats MostPop.</a:t>
+            <a:pPr algn="ctr"/>
+            <a:r>
+              <a:rPr lang="en-US" b="1" i="0" dirty="0">
+                <a:solidFill>
+                  <a:srgbClr val="00C2A8"/>
+                </a:solidFill>
+              </a:rPr>
+              <a:t>+</a:t>
             </a:r>
           </a:p>
         </p:txBody>
@@ -7722,7 +6412,7 @@
     </p:spTree>
     <p:extLst>
       <p:ext uri="{BB962C8B-B14F-4D97-AF65-F5344CB8AC3E}">
-        <p14:creationId xmlns:p14="http://schemas.microsoft.com/office/powerpoint/2010/main" val="3892150061"/>
+        <p14:creationId xmlns:p14="http://schemas.microsoft.com/office/powerpoint/2010/main" val="2646129204"/>
       </p:ext>
     </p:extLst>
   </p:cSld>
@@ -7754,7 +6444,7 @@
           <p:cNvPr id="2" name="Title 1">
             <a:extLst>
               <a:ext uri="{FF2B5EF4-FFF2-40B4-BE49-F238E27FC236}">
-                <a16:creationId xmlns:a16="http://schemas.microsoft.com/office/drawing/2014/main" id="{4431A0C4-E8FA-5735-A41A-47F97B7749E3}"/>
+                <a16:creationId xmlns:a16="http://schemas.microsoft.com/office/drawing/2014/main" id="{9073ADC1-0E06-F17E-9A0B-DC64D22FC011}"/>
               </a:ext>
             </a:extLst>
           </p:cNvPr>
@@ -7762,39 +6452,663 @@
             <a:spLocks noGrp="1"/>
           </p:cNvSpPr>
           <p:nvPr>
-            <p:ph type="ctrTitle"/>
+            <p:ph type="title"/>
           </p:nvPr>
         </p:nvSpPr>
         <p:spPr/>
         <p:txBody>
+          <a:bodyPr>
+            <a:normAutofit fontScale="90000"/>
+          </a:bodyPr>
+          <a:lstStyle/>
+          <a:p>
+            <a:pPr>
+              <a:buNone/>
+            </a:pPr>
+            <a:r>
+              <a:rPr lang="en-US" sz="1400" b="1" dirty="0">
+                <a:solidFill>
+                  <a:srgbClr val="6C3BFF"/>
+                </a:solidFill>
+              </a:rPr>
+              <a:t>STAGE 2</a:t>
+            </a:r>
+          </a:p>
+          <a:p>
+            <a:pPr>
+              <a:buNone/>
+            </a:pPr>
+            <a:r>
+              <a:rPr lang="en-US" dirty="0"/>
+              <a:t>One small linear map translates source taste into the target space</a:t>
+            </a:r>
+          </a:p>
+        </p:txBody>
+      </p:sp>
+      <p:sp>
+        <p:nvSpPr>
+          <p:cNvPr id="600" name="l600"/>
+          <p:cNvSpPr/>
+          <p:nvPr/>
+        </p:nvSpPr>
+        <p:spPr>
+          <a:xfrm>
+            <a:off x="762000" y="1905000"/>
+            <a:ext cx="3810000" cy="279400"/>
+          </a:xfrm>
+          <a:prstGeom prst="rect">
+            <a:avLst/>
+          </a:prstGeom>
+          <a:noFill/>
+        </p:spPr>
+        <p:txBody>
+          <a:bodyPr lIns="0" tIns="0" rIns="0" bIns="0" rtlCol="0" anchor="ctr">
+            <a:normAutofit/>
+          </a:bodyPr>
+          <a:lstStyle/>
+          <a:p>
+            <a:pPr algn="l">
+              <a:buNone/>
+            </a:pPr>
+            <a:r>
+              <a:rPr lang="en-US" sz="1100" b="1" i="0" dirty="0">
+                <a:solidFill>
+                  <a:srgbClr val="6E6A7C"/>
+                </a:solidFill>
+              </a:rPr>
+              <a:t>FROZEN INPUTS — overlap users only</a:t>
+            </a:r>
+          </a:p>
+        </p:txBody>
+      </p:sp>
+      <p:sp>
+        <p:nvSpPr>
+          <p:cNvPr id="601" name="b601"/>
+          <p:cNvSpPr/>
+          <p:nvPr/>
+        </p:nvSpPr>
+        <p:spPr>
+          <a:xfrm>
+            <a:off x="762000" y="2286000"/>
+            <a:ext cx="2921000" cy="1066800"/>
+          </a:xfrm>
+          <a:prstGeom prst="roundRect">
+            <a:avLst>
+              <a:gd name="adj" fmla="val 8"/>
+            </a:avLst>
+          </a:prstGeom>
+          <a:solidFill>
+            <a:srgbClr val="EDEAF7"/>
+          </a:solidFill>
+          <a:ln>
+            <a:noFill/>
+          </a:ln>
+        </p:spPr>
+        <p:txBody>
+          <a:bodyPr lIns="73152" tIns="36576" rIns="73152" bIns="36576" rtlCol="0" anchor="ctr">
+            <a:normAutofit/>
+          </a:bodyPr>
+          <a:lstStyle/>
+          <a:p>
+            <a:pPr algn="ctr">
+              <a:buNone/>
+            </a:pPr>
+            <a:r>
+              <a:rPr lang="en-US" sz="1600" b="1" i="0" dirty="0">
+                <a:solidFill>
+                  <a:srgbClr val="6C3BFF"/>
+                </a:solidFill>
+                <a:latin typeface="Consolas"/>
+              </a:rPr>
+              <a:t>U_src</a:t>
+            </a:r>
+          </a:p>
+          <a:p>
+            <a:pPr algn="ctr">
+              <a:buNone/>
+            </a:pPr>
+            <a:r>
+              <a:rPr lang="en-US" sz="1150" b="0" i="0" dirty="0">
+                <a:solidFill>
+                  <a:srgbClr val="2A2540"/>
+                </a:solidFill>
+              </a:rPr>
+              <a:t>source user vectors</a:t>
+            </a:r>
+          </a:p>
+        </p:txBody>
+      </p:sp>
+      <p:sp>
+        <p:nvSpPr>
+          <p:cNvPr id="602" name="b602"/>
+          <p:cNvSpPr/>
+          <p:nvPr/>
+        </p:nvSpPr>
+        <p:spPr>
+          <a:xfrm>
+            <a:off x="762000" y="3657600"/>
+            <a:ext cx="2921000" cy="1066800"/>
+          </a:xfrm>
+          <a:prstGeom prst="roundRect">
+            <a:avLst>
+              <a:gd name="adj" fmla="val 8"/>
+            </a:avLst>
+          </a:prstGeom>
+          <a:solidFill>
+            <a:srgbClr val="EDEAF7"/>
+          </a:solidFill>
+          <a:ln>
+            <a:noFill/>
+          </a:ln>
+        </p:spPr>
+        <p:txBody>
+          <a:bodyPr lIns="73152" tIns="36576" rIns="73152" bIns="36576" rtlCol="0" anchor="ctr">
+            <a:normAutofit/>
+          </a:bodyPr>
+          <a:lstStyle/>
+          <a:p>
+            <a:pPr algn="ctr">
+              <a:buNone/>
+            </a:pPr>
+            <a:r>
+              <a:rPr lang="en-US" sz="1600" b="1" i="0" dirty="0">
+                <a:solidFill>
+                  <a:srgbClr val="00C2A8"/>
+                </a:solidFill>
+                <a:latin typeface="Consolas"/>
+              </a:rPr>
+              <a:t>U_tgt</a:t>
+            </a:r>
+          </a:p>
+          <a:p>
+            <a:pPr algn="ctr">
+              <a:buNone/>
+            </a:pPr>
+            <a:r>
+              <a:rPr lang="en-US" sz="1150" b="0" i="0" dirty="0">
+                <a:solidFill>
+                  <a:srgbClr val="2A2540"/>
+                </a:solidFill>
+              </a:rPr>
+              <a:t>target user vectors</a:t>
+            </a:r>
+          </a:p>
+        </p:txBody>
+      </p:sp>
+      <p:sp>
+        <p:nvSpPr>
+          <p:cNvPr id="603" name="l603"/>
+          <p:cNvSpPr/>
+          <p:nvPr/>
+        </p:nvSpPr>
+        <p:spPr>
+          <a:xfrm>
+            <a:off x="762000" y="4800600"/>
+            <a:ext cx="2921000" cy="254000"/>
+          </a:xfrm>
+          <a:prstGeom prst="rect">
+            <a:avLst/>
+          </a:prstGeom>
+          <a:noFill/>
+        </p:spPr>
+        <p:txBody>
+          <a:bodyPr lIns="0" tIns="0" rIns="0" bIns="0" rtlCol="0" anchor="ctr">
+            <a:normAutofit/>
+          </a:bodyPr>
+          <a:lstStyle/>
+          <a:p>
+            <a:pPr algn="l">
+              <a:buNone/>
+            </a:pPr>
+            <a:r>
+              <a:rPr lang="en-US" sz="1000" b="0" i="1" dirty="0">
+                <a:solidFill>
+                  <a:srgbClr val="6E6A7C"/>
+                </a:solidFill>
+              </a:rPr>
+              <a:t>both detached — gradients off</a:t>
+            </a:r>
+          </a:p>
+        </p:txBody>
+      </p:sp>
+      <p:sp>
+        <p:nvSpPr>
+          <p:cNvPr id="604" name="a604"/>
+          <p:cNvSpPr/>
+          <p:nvPr/>
+        </p:nvSpPr>
+        <p:spPr>
+          <a:xfrm>
+            <a:off x="3810000" y="2667000"/>
+            <a:ext cx="711200" cy="355600"/>
+          </a:xfrm>
+          <a:prstGeom prst="rightArrow">
+            <a:avLst/>
+          </a:prstGeom>
+          <a:solidFill>
+            <a:srgbClr val="6C3BFF"/>
+          </a:solidFill>
+          <a:ln>
+            <a:noFill/>
+          </a:ln>
+        </p:spPr>
+        <p:txBody>
           <a:bodyPr/>
           <a:lstStyle/>
           <a:p>
-            <a:pPr algn="l"/>
-            <a:r>
-              <a:rPr lang="en-US" sz="5400" b="1" dirty="0"/>
-              <a:t>Thank you</a:t>
-            </a:r>
-          </a:p>
-          <a:p>
-            <a:pPr algn="l"/>
-            <a:r>
-              <a:rPr lang="en-US" sz="5400" b="1" dirty="0">
-                <a:solidFill>
-                  <a:schemeClr val="accent1"/>
-                </a:solidFill>
-              </a:rPr>
-              <a:t>Questions?</a:t>
-            </a:r>
-          </a:p>
-        </p:txBody>
-      </p:sp>
-      <p:sp>
-        <p:nvSpPr>
-          <p:cNvPr id="5" name="Subtitle 4">
+            <a:endParaRPr lang="en-US"/>
+          </a:p>
+        </p:txBody>
+      </p:sp>
+      <p:sp>
+        <p:nvSpPr>
+          <p:cNvPr id="605" name="a605"/>
+          <p:cNvSpPr/>
+          <p:nvPr/>
+        </p:nvSpPr>
+        <p:spPr>
+          <a:xfrm>
+            <a:off x="3810000" y="4038600"/>
+            <a:ext cx="711200" cy="355600"/>
+          </a:xfrm>
+          <a:prstGeom prst="rightArrow">
+            <a:avLst/>
+          </a:prstGeom>
+          <a:solidFill>
+            <a:srgbClr val="00C2A8"/>
+          </a:solidFill>
+          <a:ln>
+            <a:noFill/>
+          </a:ln>
+        </p:spPr>
+        <p:txBody>
+          <a:bodyPr/>
+          <a:lstStyle/>
+          <a:p>
+            <a:endParaRPr lang="en-US"/>
+          </a:p>
+        </p:txBody>
+      </p:sp>
+      <p:sp>
+        <p:nvSpPr>
+          <p:cNvPr id="606" name="b606"/>
+          <p:cNvSpPr/>
+          <p:nvPr/>
+        </p:nvSpPr>
+        <p:spPr>
+          <a:xfrm>
+            <a:off x="4724400" y="2540000"/>
+            <a:ext cx="2489200" cy="2184400"/>
+          </a:xfrm>
+          <a:prstGeom prst="roundRect">
+            <a:avLst>
+              <a:gd name="adj" fmla="val 12"/>
+            </a:avLst>
+          </a:prstGeom>
+          <a:solidFill>
+            <a:srgbClr val="6C3BFF"/>
+          </a:solidFill>
+          <a:ln>
+            <a:noFill/>
+          </a:ln>
+        </p:spPr>
+        <p:txBody>
+          <a:bodyPr lIns="73152" tIns="36576" rIns="73152" bIns="36576" rtlCol="0" anchor="ctr">
+            <a:normAutofit/>
+          </a:bodyPr>
+          <a:lstStyle/>
+          <a:p>
+            <a:pPr algn="ctr">
+              <a:buNone/>
+            </a:pPr>
+            <a:r>
+              <a:rPr lang="en-US" sz="3200" b="1" i="1" dirty="0">
+                <a:solidFill>
+                  <a:srgbClr val="FFFFFF"/>
+                </a:solidFill>
+              </a:rPr>
+              <a:t>f</a:t>
+            </a:r>
+          </a:p>
+          <a:p>
+            <a:pPr algn="ctr">
+              <a:buNone/>
+            </a:pPr>
+            <a:r>
+              <a:rPr lang="en-US" sz="1400" b="1" i="0" dirty="0">
+                <a:solidFill>
+                  <a:srgbClr val="FFFFFF"/>
+                </a:solidFill>
+                <a:latin typeface="Consolas"/>
+              </a:rPr>
+              <a:t>f(x) = W x + b</a:t>
+            </a:r>
+          </a:p>
+          <a:p>
+            <a:pPr algn="ctr">
+              <a:buNone/>
+            </a:pPr>
+            <a:r>
+              <a:rPr lang="en-US" sz="1050" b="0" i="0" dirty="0">
+                <a:solidFill>
+                  <a:srgbClr val="E7DEFF"/>
+                </a:solidFill>
+              </a:rPr>
+              <a:t>one linear layer · ~4.2k params</a:t>
+            </a:r>
+          </a:p>
+        </p:txBody>
+      </p:sp>
+      <p:sp>
+        <p:nvSpPr>
+          <p:cNvPr id="607" name="l607"/>
+          <p:cNvSpPr/>
+          <p:nvPr/>
+        </p:nvSpPr>
+        <p:spPr>
+          <a:xfrm>
+            <a:off x="4724400" y="4800600"/>
+            <a:ext cx="2489200" cy="279400"/>
+          </a:xfrm>
+          <a:prstGeom prst="rect">
+            <a:avLst/>
+          </a:prstGeom>
+          <a:noFill/>
+        </p:spPr>
+        <p:txBody>
+          <a:bodyPr lIns="0" tIns="0" rIns="0" bIns="0" rtlCol="0" anchor="ctr">
+            <a:normAutofit/>
+          </a:bodyPr>
+          <a:lstStyle/>
+          <a:p>
+            <a:pPr algn="ctr">
+              <a:buNone/>
+            </a:pPr>
+            <a:r>
+              <a:rPr lang="en-US" sz="1150" b="1" i="0" dirty="0">
+                <a:solidFill>
+                  <a:srgbClr val="6C3BFF"/>
+                </a:solidFill>
+              </a:rPr>
+              <a:t>learns f(U_src) ≈ U_tgt</a:t>
+            </a:r>
+          </a:p>
+        </p:txBody>
+      </p:sp>
+      <p:sp>
+        <p:nvSpPr>
+          <p:cNvPr id="608" name="a608"/>
+          <p:cNvSpPr/>
+          <p:nvPr/>
+        </p:nvSpPr>
+        <p:spPr>
+          <a:xfrm>
+            <a:off x="7340600" y="3454400"/>
+            <a:ext cx="508000" cy="355600"/>
+          </a:xfrm>
+          <a:prstGeom prst="rightArrow">
+            <a:avLst/>
+          </a:prstGeom>
+          <a:solidFill>
+            <a:srgbClr val="6E6A7C"/>
+          </a:solidFill>
+          <a:ln>
+            <a:noFill/>
+          </a:ln>
+        </p:spPr>
+        <p:txBody>
+          <a:bodyPr/>
+          <a:lstStyle/>
+          <a:p>
+            <a:endParaRPr lang="en-US"/>
+          </a:p>
+        </p:txBody>
+      </p:sp>
+      <p:sp>
+        <p:nvSpPr>
+          <p:cNvPr id="609" name="b609"/>
+          <p:cNvSpPr/>
+          <p:nvPr/>
+        </p:nvSpPr>
+        <p:spPr>
+          <a:xfrm>
+            <a:off x="7975600" y="2286000"/>
+            <a:ext cx="3454400" cy="2794000"/>
+          </a:xfrm>
+          <a:prstGeom prst="roundRect">
+            <a:avLst>
+              <a:gd name="adj" fmla="val 8"/>
+            </a:avLst>
+          </a:prstGeom>
+          <a:solidFill>
+            <a:srgbClr val="FFFFFF"/>
+          </a:solidFill>
+          <a:ln w="12700">
+            <a:solidFill>
+              <a:srgbClr val="E3DEF5"/>
+            </a:solidFill>
+          </a:ln>
+        </p:spPr>
+        <p:txBody>
+          <a:bodyPr lIns="73152" tIns="36576" rIns="73152" bIns="36576" rtlCol="0" anchor="ctr">
+            <a:normAutofit/>
+          </a:bodyPr>
+          <a:lstStyle/>
+          <a:p>
+            <a:pPr algn="ctr">
+              <a:buNone/>
+            </a:pPr>
+            <a:endParaRPr lang="en-US"/>
+          </a:p>
+        </p:txBody>
+      </p:sp>
+      <p:sp>
+        <p:nvSpPr>
+          <p:cNvPr id="610" name="l610"/>
+          <p:cNvSpPr/>
+          <p:nvPr/>
+        </p:nvSpPr>
+        <p:spPr>
+          <a:xfrm>
+            <a:off x="8229600" y="2489200"/>
+            <a:ext cx="2997200" cy="304800"/>
+          </a:xfrm>
+          <a:prstGeom prst="rect">
+            <a:avLst/>
+          </a:prstGeom>
+          <a:noFill/>
+        </p:spPr>
+        <p:txBody>
+          <a:bodyPr lIns="0" tIns="0" rIns="0" bIns="0" rtlCol="0" anchor="ctr">
+            <a:normAutofit/>
+          </a:bodyPr>
+          <a:lstStyle/>
+          <a:p>
+            <a:pPr algn="l">
+              <a:buNone/>
+            </a:pPr>
+            <a:r>
+              <a:rPr lang="en-US" sz="1150" b="1" i="0" dirty="0">
+                <a:solidFill>
+                  <a:srgbClr val="FF6B6B"/>
+                </a:solidFill>
+              </a:rPr>
+              <a:t>WHY LINEAR, NOT DEEP</a:t>
+            </a:r>
+          </a:p>
+        </p:txBody>
+      </p:sp>
+      <p:sp>
+        <p:nvSpPr>
+          <p:cNvPr id="611" name="l611"/>
+          <p:cNvSpPr/>
+          <p:nvPr/>
+        </p:nvSpPr>
+        <p:spPr>
+          <a:xfrm>
+            <a:off x="8229600" y="2844800"/>
+            <a:ext cx="2997200" cy="2032000"/>
+          </a:xfrm>
+          <a:prstGeom prst="rect">
+            <a:avLst/>
+          </a:prstGeom>
+          <a:noFill/>
+        </p:spPr>
+        <p:txBody>
+          <a:bodyPr lIns="0" tIns="0" rIns="0" bIns="0" rtlCol="0" anchor="t" anchorCtr="0">
+            <a:normAutofit/>
+          </a:bodyPr>
+          <a:lstStyle/>
+          <a:p>
+            <a:pPr algn="l">
+              <a:buNone/>
+            </a:pPr>
+            <a:r>
+              <a:rPr lang="en-US" sz="1250" b="0" i="0" dirty="0">
+                <a:solidFill>
+                  <a:srgbClr val="2A2540"/>
+                </a:solidFill>
+              </a:rPr>
+              <a:t>Supervised on only ~10k–100k overlap users, such that a deep MLP overfits.</a:t>
+            </a:r>
+            <a:br>
+              <a:rPr lang="en-US" sz="1250" b="0" i="0" dirty="0">
+                <a:solidFill>
+                  <a:srgbClr val="2A2540"/>
+                </a:solidFill>
+              </a:rPr>
+            </a:br>
+            <a:endParaRPr lang="en-US" sz="1250" b="0" i="0" dirty="0">
+              <a:solidFill>
+                <a:srgbClr val="2A2540"/>
+              </a:solidFill>
+            </a:endParaRPr>
+          </a:p>
+          <a:p>
+            <a:pPr algn="l">
+              <a:buNone/>
+            </a:pPr>
+            <a:r>
+              <a:rPr lang="en-US" sz="1250" b="0" i="0" dirty="0">
+                <a:solidFill>
+                  <a:srgbClr val="2A2540"/>
+                </a:solidFill>
+              </a:rPr>
+              <a:t>A small, regularized linear map generalizes better and is never materially worse on rich pairs.</a:t>
+            </a:r>
+          </a:p>
+        </p:txBody>
+      </p:sp>
+      <p:sp>
+        <p:nvSpPr>
+          <p:cNvPr id="612" name="b612"/>
+          <p:cNvSpPr/>
+          <p:nvPr/>
+        </p:nvSpPr>
+        <p:spPr>
+          <a:xfrm>
+            <a:off x="762000" y="5334000"/>
+            <a:ext cx="10668000" cy="914400"/>
+          </a:xfrm>
+          <a:prstGeom prst="roundRect">
+            <a:avLst>
+              <a:gd name="adj" fmla="val 8"/>
+            </a:avLst>
+          </a:prstGeom>
+          <a:solidFill>
+            <a:srgbClr val="FFFFFF"/>
+          </a:solidFill>
+          <a:ln w="19050">
+            <a:solidFill>
+              <a:srgbClr val="6C3BFF"/>
+            </a:solidFill>
+          </a:ln>
+        </p:spPr>
+        <p:txBody>
+          <a:bodyPr lIns="73152" tIns="36576" rIns="73152" bIns="36576" rtlCol="0" anchor="ctr">
+            <a:normAutofit/>
+          </a:bodyPr>
+          <a:lstStyle/>
+          <a:p>
+            <a:pPr algn="ctr">
+              <a:buNone/>
+            </a:pPr>
+            <a:endParaRPr lang="en-US"/>
+          </a:p>
+        </p:txBody>
+      </p:sp>
+      <p:sp>
+        <p:nvSpPr>
+          <p:cNvPr id="613" name="l613"/>
+          <p:cNvSpPr/>
+          <p:nvPr/>
+        </p:nvSpPr>
+        <p:spPr>
+          <a:xfrm>
+            <a:off x="1066800" y="5486400"/>
+            <a:ext cx="10058400" cy="609600"/>
+          </a:xfrm>
+          <a:prstGeom prst="rect">
+            <a:avLst/>
+          </a:prstGeom>
+          <a:noFill/>
+        </p:spPr>
+        <p:txBody>
+          <a:bodyPr lIns="0" tIns="0" rIns="0" bIns="0" rtlCol="0" anchor="ctr">
+            <a:normAutofit/>
+          </a:bodyPr>
+          <a:lstStyle/>
+          <a:p>
+            <a:pPr algn="l">
+              <a:buNone/>
+            </a:pPr>
+            <a:r>
+              <a:rPr lang="en-US" sz="1300" b="1" i="0" dirty="0">
+                <a:solidFill>
+                  <a:srgbClr val="12101A"/>
+                </a:solidFill>
+              </a:rPr>
+              <a:t>Train on 80% of overlap users · hold out 20% as the cold-eval cohort f never sees.</a:t>
+            </a:r>
+          </a:p>
+        </p:txBody>
+      </p:sp>
+    </p:spTree>
+    <p:extLst>
+      <p:ext uri="{BB962C8B-B14F-4D97-AF65-F5344CB8AC3E}">
+        <p14:creationId xmlns:p14="http://schemas.microsoft.com/office/powerpoint/2010/main" val="2017471410"/>
+      </p:ext>
+    </p:extLst>
+  </p:cSld>
+  <p:clrMapOvr>
+    <a:masterClrMapping/>
+  </p:clrMapOvr>
+</p:sld>
+</file>
+
+<file path=ppt/slides/slide17.xml><?xml version="1.0" encoding="utf-8"?>
+<p:sld xmlns:a="http://schemas.openxmlformats.org/drawingml/2006/main" xmlns:r="http://schemas.openxmlformats.org/officeDocument/2006/relationships" xmlns:p="http://schemas.openxmlformats.org/presentationml/2006/main">
+  <p:cSld>
+    <p:spTree>
+      <p:nvGrpSpPr>
+        <p:cNvPr id="1" name=""/>
+        <p:cNvGrpSpPr/>
+        <p:nvPr/>
+      </p:nvGrpSpPr>
+      <p:grpSpPr>
+        <a:xfrm>
+          <a:off x="0" y="0"/>
+          <a:ext cx="0" cy="0"/>
+          <a:chOff x="0" y="0"/>
+          <a:chExt cx="0" cy="0"/>
+        </a:xfrm>
+      </p:grpSpPr>
+      <p:sp>
+        <p:nvSpPr>
+          <p:cNvPr id="2" name="Title 1">
             <a:extLst>
               <a:ext uri="{FF2B5EF4-FFF2-40B4-BE49-F238E27FC236}">
-                <a16:creationId xmlns:a16="http://schemas.microsoft.com/office/drawing/2014/main" id="{6DDAA963-94B2-665F-FAF4-A96A54423636}"/>
+                <a16:creationId xmlns:a16="http://schemas.microsoft.com/office/drawing/2014/main" id="{9073ADC1-0E06-F17E-9A0B-DC64D22FC011}"/>
               </a:ext>
             </a:extLst>
           </p:cNvPr>
@@ -7802,22 +7116,1909 @@
             <a:spLocks noGrp="1"/>
           </p:cNvSpPr>
           <p:nvPr>
-            <p:ph type="subTitle" idx="1"/>
+            <p:ph type="title"/>
           </p:nvPr>
         </p:nvSpPr>
         <p:spPr/>
         <p:txBody>
+          <a:bodyPr>
+            <a:normAutofit fontScale="90000"/>
+          </a:bodyPr>
+          <a:lstStyle/>
+          <a:p>
+            <a:pPr>
+              <a:buNone/>
+            </a:pPr>
+            <a:r>
+              <a:rPr lang="en-US" sz="1400" b="1" dirty="0">
+                <a:solidFill>
+                  <a:srgbClr val="6C3BFF"/>
+                </a:solidFill>
+              </a:rPr>
+              <a:t>STAGE 3</a:t>
+            </a:r>
+          </a:p>
+          <a:p>
+            <a:pPr>
+              <a:buNone/>
+            </a:pPr>
+            <a:r>
+              <a:rPr lang="en-US" dirty="0"/>
+              <a:t>Cold-start inference, then how we measure it</a:t>
+            </a:r>
+          </a:p>
+        </p:txBody>
+      </p:sp>
+      <p:sp>
+        <p:nvSpPr>
+          <p:cNvPr id="600" name="t600"/>
+          <p:cNvSpPr/>
+          <p:nvPr/>
+        </p:nvSpPr>
+        <p:spPr>
+          <a:xfrm>
+            <a:off x="762000" y="1854200"/>
+            <a:ext cx="5842000" cy="254000"/>
+          </a:xfrm>
+          <a:prstGeom prst="rect">
+            <a:avLst/>
+          </a:prstGeom>
+          <a:noFill/>
+        </p:spPr>
+        <p:txBody>
+          <a:bodyPr wrap="square" lIns="0" tIns="0" rIns="0" bIns="0" rtlCol="0" anchor="t"/>
+          <a:lstStyle/>
+          <a:p>
+            <a:pPr algn="l"/>
+            <a:r>
+              <a:rPr lang="en-US" sz="1250" b="1" dirty="0">
+                <a:solidFill>
+                  <a:srgbClr val="6C3BFF"/>
+                </a:solidFill>
+              </a:rPr>
+              <a:t>INFERENCE  ·  RANK FOR A COLD USER</a:t>
+            </a:r>
+          </a:p>
+        </p:txBody>
+      </p:sp>
+      <p:sp>
+        <p:nvSpPr>
+          <p:cNvPr id="601" name="b601"/>
+          <p:cNvSpPr/>
+          <p:nvPr/>
+        </p:nvSpPr>
+        <p:spPr>
+          <a:xfrm>
+            <a:off x="762000" y="2235200"/>
+            <a:ext cx="1625600" cy="914400"/>
+          </a:xfrm>
+          <a:prstGeom prst="roundRect">
+            <a:avLst>
+              <a:gd name="adj" fmla="val 16000"/>
+            </a:avLst>
+          </a:prstGeom>
+          <a:solidFill>
+            <a:srgbClr val="EDEAF7"/>
+          </a:solidFill>
+          <a:ln>
+            <a:noFill/>
+          </a:ln>
+        </p:spPr>
+        <p:txBody>
+          <a:bodyPr lIns="76200" tIns="25400" rIns="76200" bIns="25400" rtlCol="0" anchor="ctr"/>
+          <a:lstStyle/>
+          <a:p>
+            <a:pPr algn="ctr"/>
+            <a:r>
+              <a:rPr lang="en-US" sz="1300" b="1" dirty="0">
+                <a:solidFill>
+                  <a:srgbClr val="12101A"/>
+                </a:solidFill>
+              </a:rPr>
+              <a:t>Cold user</a:t>
+            </a:r>
+          </a:p>
+          <a:p>
+            <a:pPr algn="ctr"/>
+            <a:r>
+              <a:rPr lang="en-US" sz="1000" i="1" dirty="0">
+                <a:solidFill>
+                  <a:srgbClr val="6E6A7C"/>
+                </a:solidFill>
+              </a:rPr>
+              <a:t>source history only</a:t>
+            </a:r>
+          </a:p>
+        </p:txBody>
+      </p:sp>
+      <p:sp>
+        <p:nvSpPr>
+          <p:cNvPr id="602" name="a602"/>
+          <p:cNvSpPr/>
+          <p:nvPr/>
+        </p:nvSpPr>
+        <p:spPr>
+          <a:xfrm>
+            <a:off x="2413000" y="2527300"/>
+            <a:ext cx="254000" cy="330200"/>
+          </a:xfrm>
+          <a:prstGeom prst="rect">
+            <a:avLst/>
+          </a:prstGeom>
+          <a:noFill/>
+        </p:spPr>
+        <p:txBody>
+          <a:bodyPr lIns="0" tIns="0" rIns="0" bIns="0" rtlCol="0" anchor="ctr"/>
+          <a:lstStyle/>
+          <a:p>
+            <a:pPr algn="ctr"/>
+            <a:r>
+              <a:rPr lang="en-US" sz="1600" b="1" dirty="0">
+                <a:solidFill>
+                  <a:srgbClr val="6E6A7C"/>
+                </a:solidFill>
+              </a:rPr>
+              <a:t>→</a:t>
+            </a:r>
+          </a:p>
+        </p:txBody>
+      </p:sp>
+      <p:sp>
+        <p:nvSpPr>
+          <p:cNvPr id="603" name="b603"/>
+          <p:cNvSpPr/>
+          <p:nvPr/>
+        </p:nvSpPr>
+        <p:spPr>
+          <a:xfrm>
+            <a:off x="2692400" y="2235200"/>
+            <a:ext cx="1625600" cy="914400"/>
+          </a:xfrm>
+          <a:prstGeom prst="roundRect">
+            <a:avLst>
+              <a:gd name="adj" fmla="val 16000"/>
+            </a:avLst>
+          </a:prstGeom>
+          <a:solidFill>
+            <a:srgbClr val="FFFFFF"/>
+          </a:solidFill>
+          <a:ln w="1482">
+            <a:solidFill>
+              <a:srgbClr val="6C3BFF"/>
+            </a:solidFill>
+          </a:ln>
+        </p:spPr>
+        <p:txBody>
+          <a:bodyPr lIns="76200" tIns="25400" rIns="76200" bIns="25400" rtlCol="0" anchor="ctr"/>
+          <a:lstStyle/>
+          <a:p>
+            <a:pPr algn="ctr"/>
+            <a:r>
+              <a:rPr lang="en-US" sz="1300" b="1" dirty="0">
+                <a:solidFill>
+                  <a:srgbClr val="6C3BFF"/>
+                </a:solidFill>
+                <a:latin typeface="Consolas"/>
+              </a:rPr>
+              <a:t>U_src</a:t>
+            </a:r>
+          </a:p>
+          <a:p>
+            <a:pPr algn="ctr"/>
+            <a:r>
+              <a:rPr lang="en-US" sz="1000" i="1" dirty="0">
+                <a:solidFill>
+                  <a:srgbClr val="6E6A7C"/>
+                </a:solidFill>
+              </a:rPr>
+              <a:t>source vector</a:t>
+            </a:r>
+          </a:p>
+        </p:txBody>
+      </p:sp>
+      <p:sp>
+        <p:nvSpPr>
+          <p:cNvPr id="604" name="a604"/>
+          <p:cNvSpPr/>
+          <p:nvPr/>
+        </p:nvSpPr>
+        <p:spPr>
+          <a:xfrm>
+            <a:off x="4343400" y="2527300"/>
+            <a:ext cx="254000" cy="330200"/>
+          </a:xfrm>
+          <a:prstGeom prst="rect">
+            <a:avLst/>
+          </a:prstGeom>
+          <a:noFill/>
+        </p:spPr>
+        <p:txBody>
+          <a:bodyPr lIns="0" tIns="0" rIns="0" bIns="0" rtlCol="0" anchor="ctr"/>
+          <a:lstStyle/>
+          <a:p>
+            <a:pPr algn="ctr"/>
+            <a:r>
+              <a:rPr lang="en-US" sz="1600" b="1" dirty="0">
+                <a:solidFill>
+                  <a:srgbClr val="6E6A7C"/>
+                </a:solidFill>
+              </a:rPr>
+              <a:t>→</a:t>
+            </a:r>
+          </a:p>
+        </p:txBody>
+      </p:sp>
+      <p:sp>
+        <p:nvSpPr>
+          <p:cNvPr id="605" name="b605"/>
+          <p:cNvSpPr/>
+          <p:nvPr/>
+        </p:nvSpPr>
+        <p:spPr>
+          <a:xfrm>
+            <a:off x="4622800" y="2235200"/>
+            <a:ext cx="1625600" cy="914400"/>
+          </a:xfrm>
+          <a:prstGeom prst="roundRect">
+            <a:avLst>
+              <a:gd name="adj" fmla="val 16000"/>
+            </a:avLst>
+          </a:prstGeom>
+          <a:solidFill>
+            <a:srgbClr val="6C3BFF"/>
+          </a:solidFill>
+          <a:ln>
+            <a:noFill/>
+          </a:ln>
+        </p:spPr>
+        <p:txBody>
+          <a:bodyPr lIns="76200" tIns="25400" rIns="76200" bIns="25400" rtlCol="0" anchor="ctr"/>
+          <a:lstStyle/>
+          <a:p>
+            <a:pPr algn="ctr"/>
+            <a:r>
+              <a:rPr lang="en-US" sz="1700" b="1" dirty="0">
+                <a:solidFill>
+                  <a:srgbClr val="FFFFFF"/>
+                </a:solidFill>
+                <a:latin typeface="Consolas"/>
+              </a:rPr>
+              <a:t>f</a:t>
+            </a:r>
+          </a:p>
+          <a:p>
+            <a:pPr algn="ctr"/>
+            <a:r>
+              <a:rPr lang="en-US" sz="1000" i="1" dirty="0">
+                <a:solidFill>
+                  <a:srgbClr val="E5DEFF"/>
+                </a:solidFill>
+              </a:rPr>
+              <a:t>the linear map</a:t>
+            </a:r>
+          </a:p>
+        </p:txBody>
+      </p:sp>
+      <p:sp>
+        <p:nvSpPr>
+          <p:cNvPr id="606" name="a606"/>
+          <p:cNvSpPr/>
+          <p:nvPr/>
+        </p:nvSpPr>
+        <p:spPr>
+          <a:xfrm>
+            <a:off x="6273800" y="2527300"/>
+            <a:ext cx="254000" cy="330200"/>
+          </a:xfrm>
+          <a:prstGeom prst="rect">
+            <a:avLst/>
+          </a:prstGeom>
+          <a:noFill/>
+        </p:spPr>
+        <p:txBody>
+          <a:bodyPr lIns="0" tIns="0" rIns="0" bIns="0" rtlCol="0" anchor="ctr"/>
+          <a:lstStyle/>
+          <a:p>
+            <a:pPr algn="ctr"/>
+            <a:r>
+              <a:rPr lang="en-US" sz="1600" b="1" dirty="0">
+                <a:solidFill>
+                  <a:srgbClr val="6E6A7C"/>
+                </a:solidFill>
+              </a:rPr>
+              <a:t>→</a:t>
+            </a:r>
+          </a:p>
+        </p:txBody>
+      </p:sp>
+      <p:sp>
+        <p:nvSpPr>
+          <p:cNvPr id="607" name="b607"/>
+          <p:cNvSpPr/>
+          <p:nvPr/>
+        </p:nvSpPr>
+        <p:spPr>
+          <a:xfrm>
+            <a:off x="6553200" y="2235200"/>
+            <a:ext cx="1625600" cy="914400"/>
+          </a:xfrm>
+          <a:prstGeom prst="roundRect">
+            <a:avLst>
+              <a:gd name="adj" fmla="val 16000"/>
+            </a:avLst>
+          </a:prstGeom>
+          <a:solidFill>
+            <a:srgbClr val="FFFFFF"/>
+          </a:solidFill>
+          <a:ln w="1482">
+            <a:solidFill>
+              <a:srgbClr val="00C2A8"/>
+            </a:solidFill>
+          </a:ln>
+        </p:spPr>
+        <p:txBody>
+          <a:bodyPr lIns="76200" tIns="25400" rIns="76200" bIns="25400" rtlCol="0" anchor="ctr"/>
+          <a:lstStyle/>
+          <a:p>
+            <a:pPr algn="ctr"/>
+            <a:r>
+              <a:rPr lang="en-US" sz="1500" b="1" dirty="0">
+                <a:solidFill>
+                  <a:srgbClr val="00C2A8"/>
+                </a:solidFill>
+                <a:latin typeface="Consolas"/>
+              </a:rPr>
+              <a:t>û_t</a:t>
+            </a:r>
+          </a:p>
+          <a:p>
+            <a:pPr algn="ctr"/>
+            <a:r>
+              <a:rPr lang="en-US" sz="1000" i="1" dirty="0">
+                <a:solidFill>
+                  <a:srgbClr val="6E6A7C"/>
+                </a:solidFill>
+              </a:rPr>
+              <a:t>predicted taste</a:t>
+            </a:r>
+          </a:p>
+        </p:txBody>
+      </p:sp>
+      <p:sp>
+        <p:nvSpPr>
+          <p:cNvPr id="608" name="a608"/>
+          <p:cNvSpPr/>
+          <p:nvPr/>
+        </p:nvSpPr>
+        <p:spPr>
+          <a:xfrm>
+            <a:off x="8204200" y="2527300"/>
+            <a:ext cx="254000" cy="330200"/>
+          </a:xfrm>
+          <a:prstGeom prst="rect">
+            <a:avLst/>
+          </a:prstGeom>
+          <a:noFill/>
+        </p:spPr>
+        <p:txBody>
+          <a:bodyPr lIns="0" tIns="0" rIns="0" bIns="0" rtlCol="0" anchor="ctr"/>
+          <a:lstStyle/>
+          <a:p>
+            <a:pPr algn="ctr"/>
+            <a:r>
+              <a:rPr lang="en-US" sz="1600" b="1" dirty="0">
+                <a:solidFill>
+                  <a:srgbClr val="6E6A7C"/>
+                </a:solidFill>
+              </a:rPr>
+              <a:t>→</a:t>
+            </a:r>
+          </a:p>
+        </p:txBody>
+      </p:sp>
+      <p:sp>
+        <p:nvSpPr>
+          <p:cNvPr id="609" name="b609"/>
+          <p:cNvSpPr/>
+          <p:nvPr/>
+        </p:nvSpPr>
+        <p:spPr>
+          <a:xfrm>
+            <a:off x="8483600" y="2235200"/>
+            <a:ext cx="1625600" cy="914400"/>
+          </a:xfrm>
+          <a:prstGeom prst="roundRect">
+            <a:avLst>
+              <a:gd name="adj" fmla="val 16000"/>
+            </a:avLst>
+          </a:prstGeom>
+          <a:solidFill>
+            <a:srgbClr val="FFFFFF"/>
+          </a:solidFill>
+          <a:ln w="19050">
+            <a:solidFill>
+              <a:srgbClr val="6C3BFF"/>
+            </a:solidFill>
+          </a:ln>
+        </p:spPr>
+        <p:txBody>
+          <a:bodyPr lIns="76200" tIns="25400" rIns="76200" bIns="25400" rtlCol="0" anchor="ctr"/>
+          <a:lstStyle/>
+          <a:p>
+            <a:pPr algn="ctr"/>
+            <a:r>
+              <a:rPr lang="en-US" sz="1250" b="1" dirty="0">
+                <a:solidFill>
+                  <a:srgbClr val="12101A"/>
+                </a:solidFill>
+              </a:rPr>
+              <a:t>Ranked items</a:t>
+            </a:r>
+          </a:p>
+          <a:p>
+            <a:pPr algn="ctr"/>
+            <a:r>
+              <a:rPr lang="en-US" sz="1000" i="1" dirty="0">
+                <a:solidFill>
+                  <a:srgbClr val="6E6A7C"/>
+                </a:solidFill>
+              </a:rPr>
+              <a:t>top of target list</a:t>
+            </a:r>
+          </a:p>
+        </p:txBody>
+      </p:sp>
+      <p:sp>
+        <p:nvSpPr>
+          <p:cNvPr id="610" name="t610"/>
+          <p:cNvSpPr/>
+          <p:nvPr/>
+        </p:nvSpPr>
+        <p:spPr>
+          <a:xfrm>
+            <a:off x="4622800" y="3276600"/>
+            <a:ext cx="5486400" cy="228600"/>
+          </a:xfrm>
+          <a:prstGeom prst="rect">
+            <a:avLst/>
+          </a:prstGeom>
+          <a:noFill/>
+        </p:spPr>
+        <p:txBody>
+          <a:bodyPr wrap="square" lIns="0" tIns="0" rIns="0" bIns="0" rtlCol="0" anchor="t"/>
+          <a:lstStyle/>
+          <a:p>
+            <a:pPr algn="l"/>
+            <a:r>
+              <a:rPr lang="en-US" sz="1100" i="1" dirty="0">
+                <a:solidFill>
+                  <a:srgbClr val="6E6A7C"/>
+                </a:solidFill>
+              </a:rPr>
+              <a:t>score = û_t · V_tgt   (dot product vs. every target item)</a:t>
+            </a:r>
+          </a:p>
+        </p:txBody>
+      </p:sp>
+      <p:sp>
+        <p:nvSpPr>
+          <p:cNvPr id="611" name="div"/>
+          <p:cNvSpPr/>
+          <p:nvPr/>
+        </p:nvSpPr>
+        <p:spPr>
+          <a:xfrm>
+            <a:off x="762000" y="3835400"/>
+            <a:ext cx="10668000" cy="19050"/>
+          </a:xfrm>
+          <a:prstGeom prst="rect">
+            <a:avLst/>
+          </a:prstGeom>
+          <a:solidFill>
+            <a:srgbClr val="DAD6EA"/>
+          </a:solidFill>
+          <a:ln>
+            <a:noFill/>
+          </a:ln>
+        </p:spPr>
+        <p:txBody>
           <a:bodyPr/>
           <a:lstStyle/>
           <a:p>
-            <a:endParaRPr lang="en-IL" dirty="0"/>
+            <a:endParaRPr lang="en-US"/>
+          </a:p>
+        </p:txBody>
+      </p:sp>
+      <p:sp>
+        <p:nvSpPr>
+          <p:cNvPr id="612" name="t612"/>
+          <p:cNvSpPr/>
+          <p:nvPr/>
+        </p:nvSpPr>
+        <p:spPr>
+          <a:xfrm>
+            <a:off x="762000" y="4013200"/>
+            <a:ext cx="6858000" cy="254000"/>
+          </a:xfrm>
+          <a:prstGeom prst="rect">
+            <a:avLst/>
+          </a:prstGeom>
+          <a:noFill/>
+        </p:spPr>
+        <p:txBody>
+          <a:bodyPr wrap="square" lIns="0" tIns="0" rIns="0" bIns="0" rtlCol="0" anchor="t"/>
+          <a:lstStyle/>
+          <a:p>
+            <a:pPr algn="l"/>
+            <a:r>
+              <a:rPr lang="en-US" sz="1250" b="1" dirty="0">
+                <a:solidFill>
+                  <a:srgbClr val="00C2A8"/>
+                </a:solidFill>
+              </a:rPr>
+              <a:t>EVALUATION  ·  ON THE 20% COLD-EVAL COHORT</a:t>
+            </a:r>
+          </a:p>
+        </p:txBody>
+      </p:sp>
+      <p:sp>
+        <p:nvSpPr>
+          <p:cNvPr id="613" name="b613"/>
+          <p:cNvSpPr/>
+          <p:nvPr/>
+        </p:nvSpPr>
+        <p:spPr>
+          <a:xfrm>
+            <a:off x="762000" y="4394200"/>
+            <a:ext cx="3175000" cy="1854200"/>
+          </a:xfrm>
+          <a:prstGeom prst="roundRect">
+            <a:avLst>
+              <a:gd name="adj" fmla="val 10000"/>
+            </a:avLst>
+          </a:prstGeom>
+          <a:solidFill>
+            <a:srgbClr val="EDEAF7"/>
+          </a:solidFill>
+          <a:ln>
+            <a:noFill/>
+          </a:ln>
+        </p:spPr>
+        <p:txBody>
+          <a:bodyPr lIns="76200" tIns="25400" rIns="76200" bIns="25400" rtlCol="0" anchor="ctr"/>
+          <a:lstStyle/>
+          <a:p>
+            <a:endParaRPr lang="en-US"/>
+          </a:p>
+        </p:txBody>
+      </p:sp>
+      <p:sp>
+        <p:nvSpPr>
+          <p:cNvPr id="614" name="t614"/>
+          <p:cNvSpPr/>
+          <p:nvPr/>
+        </p:nvSpPr>
+        <p:spPr>
+          <a:xfrm>
+            <a:off x="990600" y="4572000"/>
+            <a:ext cx="2717800" cy="228600"/>
+          </a:xfrm>
+          <a:prstGeom prst="rect">
+            <a:avLst/>
+          </a:prstGeom>
+          <a:noFill/>
+        </p:spPr>
+        <p:txBody>
+          <a:bodyPr wrap="square" lIns="0" tIns="0" rIns="0" bIns="0" rtlCol="0" anchor="t"/>
+          <a:lstStyle/>
+          <a:p>
+            <a:pPr algn="l"/>
+            <a:r>
+              <a:rPr lang="en-US" sz="1300" b="1" dirty="0">
+                <a:solidFill>
+                  <a:srgbClr val="12101A"/>
+                </a:solidFill>
+              </a:rPr>
+              <a:t>Leave-one-out ranking</a:t>
+            </a:r>
+          </a:p>
+        </p:txBody>
+      </p:sp>
+      <p:sp>
+        <p:nvSpPr>
+          <p:cNvPr id="615" name="t615"/>
+          <p:cNvSpPr/>
+          <p:nvPr/>
+        </p:nvSpPr>
+        <p:spPr>
+          <a:xfrm>
+            <a:off x="990600" y="4902200"/>
+            <a:ext cx="2717800" cy="1270000"/>
+          </a:xfrm>
+          <a:prstGeom prst="rect">
+            <a:avLst/>
+          </a:prstGeom>
+          <a:noFill/>
+        </p:spPr>
+        <p:txBody>
+          <a:bodyPr wrap="square" lIns="0" tIns="0" rIns="0" bIns="0" rtlCol="0" anchor="t"/>
+          <a:lstStyle/>
+          <a:p>
+            <a:pPr algn="l"/>
+            <a:r>
+              <a:rPr lang="en-US" sz="1150" dirty="0">
+                <a:solidFill>
+                  <a:srgbClr val="2A2540"/>
+                </a:solidFill>
+              </a:rPr>
+              <a:t>Per user: 1 held-out target positive (latest by time) + 100 sampled unseen negatives = 101 candidates, ranked together — the positive's rank gives the score.</a:t>
+            </a:r>
+          </a:p>
+        </p:txBody>
+      </p:sp>
+      <p:sp>
+        <p:nvSpPr>
+          <p:cNvPr id="616" name="b616"/>
+          <p:cNvSpPr/>
+          <p:nvPr/>
+        </p:nvSpPr>
+        <p:spPr>
+          <a:xfrm>
+            <a:off x="4191000" y="4394200"/>
+            <a:ext cx="3429000" cy="1854200"/>
+          </a:xfrm>
+          <a:prstGeom prst="roundRect">
+            <a:avLst>
+              <a:gd name="adj" fmla="val 10000"/>
+            </a:avLst>
+          </a:prstGeom>
+          <a:solidFill>
+            <a:srgbClr val="EDEAF7"/>
+          </a:solidFill>
+          <a:ln>
+            <a:noFill/>
+          </a:ln>
+        </p:spPr>
+        <p:txBody>
+          <a:bodyPr lIns="76200" tIns="25400" rIns="76200" bIns="25400" rtlCol="0" anchor="ctr"/>
+          <a:lstStyle/>
+          <a:p>
+            <a:endParaRPr lang="en-US"/>
+          </a:p>
+        </p:txBody>
+      </p:sp>
+      <p:sp>
+        <p:nvSpPr>
+          <p:cNvPr id="617" name="t617"/>
+          <p:cNvSpPr/>
+          <p:nvPr/>
+        </p:nvSpPr>
+        <p:spPr>
+          <a:xfrm>
+            <a:off x="4419600" y="4572000"/>
+            <a:ext cx="2971800" cy="228600"/>
+          </a:xfrm>
+          <a:prstGeom prst="rect">
+            <a:avLst/>
+          </a:prstGeom>
+          <a:noFill/>
+        </p:spPr>
+        <p:txBody>
+          <a:bodyPr wrap="square" lIns="0" tIns="0" rIns="0" bIns="0" rtlCol="0" anchor="t"/>
+          <a:lstStyle/>
+          <a:p>
+            <a:pPr algn="l"/>
+            <a:r>
+              <a:rPr lang="en-US" sz="1300" b="1" dirty="0">
+                <a:solidFill>
+                  <a:srgbClr val="12101A"/>
+                </a:solidFill>
+              </a:rPr>
+              <a:t>Against 4 baselines</a:t>
+            </a:r>
+          </a:p>
+        </p:txBody>
+      </p:sp>
+      <p:sp>
+        <p:nvSpPr>
+          <p:cNvPr id="618" name="t618"/>
+          <p:cNvSpPr/>
+          <p:nvPr/>
+        </p:nvSpPr>
+        <p:spPr>
+          <a:xfrm>
+            <a:off x="4419600" y="4927600"/>
+            <a:ext cx="1651000" cy="203200"/>
+          </a:xfrm>
+          <a:prstGeom prst="rect">
+            <a:avLst/>
+          </a:prstGeom>
+          <a:noFill/>
+        </p:spPr>
+        <p:txBody>
+          <a:bodyPr wrap="square" lIns="0" tIns="0" rIns="0" bIns="0" rtlCol="0" anchor="t"/>
+          <a:lstStyle/>
+          <a:p>
+            <a:pPr algn="l"/>
+            <a:r>
+              <a:rPr lang="en-US" sz="1150" b="1" dirty="0">
+                <a:solidFill>
+                  <a:srgbClr val="6C3BFF"/>
+                </a:solidFill>
+              </a:rPr>
+              <a:t>target-MF</a:t>
+            </a:r>
+          </a:p>
+        </p:txBody>
+      </p:sp>
+      <p:sp>
+        <p:nvSpPr>
+          <p:cNvPr id="619" name="t619"/>
+          <p:cNvSpPr/>
+          <p:nvPr/>
+        </p:nvSpPr>
+        <p:spPr>
+          <a:xfrm>
+            <a:off x="5867400" y="4927600"/>
+            <a:ext cx="1574800" cy="203200"/>
+          </a:xfrm>
+          <a:prstGeom prst="rect">
+            <a:avLst/>
+          </a:prstGeom>
+          <a:noFill/>
+        </p:spPr>
+        <p:txBody>
+          <a:bodyPr wrap="square" lIns="0" tIns="0" rIns="0" bIns="0" rtlCol="0" anchor="t"/>
+          <a:lstStyle/>
+          <a:p>
+            <a:pPr algn="l"/>
+            <a:r>
+              <a:rPr lang="en-US" sz="1000" i="1" dirty="0">
+                <a:solidFill>
+                  <a:srgbClr val="6E6A7C"/>
+                </a:solidFill>
+              </a:rPr>
+              <a:t>single-vertical prior</a:t>
+            </a:r>
+          </a:p>
+        </p:txBody>
+      </p:sp>
+      <p:sp>
+        <p:nvSpPr>
+          <p:cNvPr id="620" name="t620"/>
+          <p:cNvSpPr/>
+          <p:nvPr/>
+        </p:nvSpPr>
+        <p:spPr>
+          <a:xfrm>
+            <a:off x="4419600" y="5245100"/>
+            <a:ext cx="1651000" cy="203200"/>
+          </a:xfrm>
+          <a:prstGeom prst="rect">
+            <a:avLst/>
+          </a:prstGeom>
+          <a:noFill/>
+        </p:spPr>
+        <p:txBody>
+          <a:bodyPr wrap="square" lIns="0" tIns="0" rIns="0" bIns="0" rtlCol="0" anchor="t"/>
+          <a:lstStyle/>
+          <a:p>
+            <a:pPr algn="l"/>
+            <a:r>
+              <a:rPr lang="en-US" sz="1150" b="1" dirty="0">
+                <a:solidFill>
+                  <a:srgbClr val="6C3BFF"/>
+                </a:solidFill>
+              </a:rPr>
+              <a:t>content</a:t>
+            </a:r>
+          </a:p>
+        </p:txBody>
+      </p:sp>
+      <p:sp>
+        <p:nvSpPr>
+          <p:cNvPr id="621" name="t621"/>
+          <p:cNvSpPr/>
+          <p:nvPr/>
+        </p:nvSpPr>
+        <p:spPr>
+          <a:xfrm>
+            <a:off x="5867400" y="5245100"/>
+            <a:ext cx="1574800" cy="203200"/>
+          </a:xfrm>
+          <a:prstGeom prst="rect">
+            <a:avLst/>
+          </a:prstGeom>
+          <a:noFill/>
+        </p:spPr>
+        <p:txBody>
+          <a:bodyPr wrap="square" lIns="0" tIns="0" rIns="0" bIns="0" rtlCol="0" anchor="t"/>
+          <a:lstStyle/>
+          <a:p>
+            <a:pPr algn="l"/>
+            <a:r>
+              <a:rPr lang="en-US" sz="1000" i="1" dirty="0">
+                <a:solidFill>
+                  <a:srgbClr val="6E6A7C"/>
+                </a:solidFill>
+              </a:rPr>
+              <a:t>training-free text cosine</a:t>
+            </a:r>
+          </a:p>
+        </p:txBody>
+      </p:sp>
+      <p:sp>
+        <p:nvSpPr>
+          <p:cNvPr id="622" name="t622"/>
+          <p:cNvSpPr/>
+          <p:nvPr/>
+        </p:nvSpPr>
+        <p:spPr>
+          <a:xfrm>
+            <a:off x="4419600" y="5562600"/>
+            <a:ext cx="1651000" cy="203200"/>
+          </a:xfrm>
+          <a:prstGeom prst="rect">
+            <a:avLst/>
+          </a:prstGeom>
+          <a:noFill/>
+        </p:spPr>
+        <p:txBody>
+          <a:bodyPr wrap="square" lIns="0" tIns="0" rIns="0" bIns="0" rtlCol="0" anchor="t"/>
+          <a:lstStyle/>
+          <a:p>
+            <a:pPr algn="l"/>
+            <a:r>
+              <a:rPr lang="en-US" sz="1150" b="1" dirty="0">
+                <a:solidFill>
+                  <a:srgbClr val="6C3BFF"/>
+                </a:solidFill>
+              </a:rPr>
+              <a:t>MostPop</a:t>
+            </a:r>
+          </a:p>
+        </p:txBody>
+      </p:sp>
+      <p:sp>
+        <p:nvSpPr>
+          <p:cNvPr id="623" name="t623"/>
+          <p:cNvSpPr/>
+          <p:nvPr/>
+        </p:nvSpPr>
+        <p:spPr>
+          <a:xfrm>
+            <a:off x="5867400" y="5562600"/>
+            <a:ext cx="1574800" cy="203200"/>
+          </a:xfrm>
+          <a:prstGeom prst="rect">
+            <a:avLst/>
+          </a:prstGeom>
+          <a:noFill/>
+        </p:spPr>
+        <p:txBody>
+          <a:bodyPr wrap="square" lIns="0" tIns="0" rIns="0" bIns="0" rtlCol="0" anchor="t"/>
+          <a:lstStyle/>
+          <a:p>
+            <a:pPr algn="l"/>
+            <a:r>
+              <a:rPr lang="en-US" sz="1000" i="1" dirty="0">
+                <a:solidFill>
+                  <a:srgbClr val="6E6A7C"/>
+                </a:solidFill>
+              </a:rPr>
+              <a:t>deployed fallback</a:t>
+            </a:r>
+          </a:p>
+        </p:txBody>
+      </p:sp>
+      <p:sp>
+        <p:nvSpPr>
+          <p:cNvPr id="624" name="t624"/>
+          <p:cNvSpPr/>
+          <p:nvPr/>
+        </p:nvSpPr>
+        <p:spPr>
+          <a:xfrm>
+            <a:off x="4419600" y="5880100"/>
+            <a:ext cx="1651000" cy="203200"/>
+          </a:xfrm>
+          <a:prstGeom prst="rect">
+            <a:avLst/>
+          </a:prstGeom>
+          <a:noFill/>
+        </p:spPr>
+        <p:txBody>
+          <a:bodyPr wrap="square" lIns="0" tIns="0" rIns="0" bIns="0" rtlCol="0" anchor="t"/>
+          <a:lstStyle/>
+          <a:p>
+            <a:pPr algn="l"/>
+            <a:r>
+              <a:rPr lang="en-US" sz="1150" b="1" dirty="0">
+                <a:solidFill>
+                  <a:srgbClr val="6C3BFF"/>
+                </a:solidFill>
+              </a:rPr>
+              <a:t>Random</a:t>
+            </a:r>
+          </a:p>
+        </p:txBody>
+      </p:sp>
+      <p:sp>
+        <p:nvSpPr>
+          <p:cNvPr id="625" name="t625"/>
+          <p:cNvSpPr/>
+          <p:nvPr/>
+        </p:nvSpPr>
+        <p:spPr>
+          <a:xfrm>
+            <a:off x="5867400" y="5880100"/>
+            <a:ext cx="1574800" cy="203200"/>
+          </a:xfrm>
+          <a:prstGeom prst="rect">
+            <a:avLst/>
+          </a:prstGeom>
+          <a:noFill/>
+        </p:spPr>
+        <p:txBody>
+          <a:bodyPr wrap="square" lIns="0" tIns="0" rIns="0" bIns="0" rtlCol="0" anchor="t"/>
+          <a:lstStyle/>
+          <a:p>
+            <a:pPr algn="l"/>
+            <a:r>
+              <a:rPr lang="en-US" sz="1000" i="1" dirty="0">
+                <a:solidFill>
+                  <a:srgbClr val="6E6A7C"/>
+                </a:solidFill>
+              </a:rPr>
+              <a:t>the floor</a:t>
+            </a:r>
+          </a:p>
+        </p:txBody>
+      </p:sp>
+      <p:sp>
+        <p:nvSpPr>
+          <p:cNvPr id="626" name="b626"/>
+          <p:cNvSpPr/>
+          <p:nvPr/>
+        </p:nvSpPr>
+        <p:spPr>
+          <a:xfrm>
+            <a:off x="7874000" y="4394200"/>
+            <a:ext cx="3556000" cy="1854200"/>
+          </a:xfrm>
+          <a:prstGeom prst="roundRect">
+            <a:avLst>
+              <a:gd name="adj" fmla="val 10000"/>
+            </a:avLst>
+          </a:prstGeom>
+          <a:solidFill>
+            <a:srgbClr val="FFFFFF"/>
+          </a:solidFill>
+          <a:ln w="19050">
+            <a:solidFill>
+              <a:srgbClr val="6C3BFF"/>
+            </a:solidFill>
+          </a:ln>
+        </p:spPr>
+        <p:txBody>
+          <a:bodyPr lIns="76200" tIns="25400" rIns="76200" bIns="25400" rtlCol="0" anchor="ctr"/>
+          <a:lstStyle/>
+          <a:p>
+            <a:endParaRPr lang="en-US"/>
+          </a:p>
+        </p:txBody>
+      </p:sp>
+      <p:sp>
+        <p:nvSpPr>
+          <p:cNvPr id="627" name="t627"/>
+          <p:cNvSpPr/>
+          <p:nvPr/>
+        </p:nvSpPr>
+        <p:spPr>
+          <a:xfrm>
+            <a:off x="8128000" y="4572000"/>
+            <a:ext cx="3098800" cy="228600"/>
+          </a:xfrm>
+          <a:prstGeom prst="rect">
+            <a:avLst/>
+          </a:prstGeom>
+          <a:noFill/>
+        </p:spPr>
+        <p:txBody>
+          <a:bodyPr wrap="square" lIns="0" tIns="0" rIns="0" bIns="0" rtlCol="0" anchor="t"/>
+          <a:lstStyle/>
+          <a:p>
+            <a:pPr algn="l"/>
+            <a:r>
+              <a:rPr lang="en-US" sz="1200" b="1" dirty="0">
+                <a:solidFill>
+                  <a:srgbClr val="12101A"/>
+                </a:solidFill>
+              </a:rPr>
+              <a:t>Metrics · mean over 3 seeds</a:t>
+            </a:r>
+          </a:p>
+        </p:txBody>
+      </p:sp>
+      <p:sp>
+        <p:nvSpPr>
+          <p:cNvPr id="628" name="t628"/>
+          <p:cNvSpPr/>
+          <p:nvPr/>
+        </p:nvSpPr>
+        <p:spPr>
+          <a:xfrm>
+            <a:off x="8128000" y="4927600"/>
+            <a:ext cx="3098800" cy="279400"/>
+          </a:xfrm>
+          <a:prstGeom prst="rect">
+            <a:avLst/>
+          </a:prstGeom>
+          <a:noFill/>
+        </p:spPr>
+        <p:txBody>
+          <a:bodyPr wrap="square" lIns="0" tIns="0" rIns="0" bIns="0" rtlCol="0" anchor="t"/>
+          <a:lstStyle/>
+          <a:p>
+            <a:pPr algn="l"/>
+            <a:r>
+              <a:rPr lang="en-US" sz="1350" b="1" dirty="0">
+                <a:solidFill>
+                  <a:srgbClr val="067A68"/>
+                </a:solidFill>
+              </a:rPr>
+              <a:t>Recall@10</a:t>
+            </a:r>
+          </a:p>
+        </p:txBody>
+      </p:sp>
+      <p:sp>
+        <p:nvSpPr>
+          <p:cNvPr id="629" name="t629"/>
+          <p:cNvSpPr/>
+          <p:nvPr/>
+        </p:nvSpPr>
+        <p:spPr>
+          <a:xfrm>
+            <a:off x="8128000" y="5257800"/>
+            <a:ext cx="3098800" cy="279400"/>
+          </a:xfrm>
+          <a:prstGeom prst="rect">
+            <a:avLst/>
+          </a:prstGeom>
+          <a:noFill/>
+        </p:spPr>
+        <p:txBody>
+          <a:bodyPr wrap="square" lIns="0" tIns="0" rIns="0" bIns="0" rtlCol="0" anchor="t"/>
+          <a:lstStyle/>
+          <a:p>
+            <a:pPr algn="l"/>
+            <a:r>
+              <a:rPr lang="en-US" sz="1350" b="1" dirty="0">
+                <a:solidFill>
+                  <a:srgbClr val="067A68"/>
+                </a:solidFill>
+              </a:rPr>
+              <a:t>NDCG@10</a:t>
+            </a:r>
+          </a:p>
+        </p:txBody>
+      </p:sp>
+      <p:sp>
+        <p:nvSpPr>
+          <p:cNvPr id="630" name="t630"/>
+          <p:cNvSpPr/>
+          <p:nvPr/>
+        </p:nvSpPr>
+        <p:spPr>
+          <a:xfrm>
+            <a:off x="8128000" y="5588000"/>
+            <a:ext cx="3098800" cy="279400"/>
+          </a:xfrm>
+          <a:prstGeom prst="rect">
+            <a:avLst/>
+          </a:prstGeom>
+          <a:noFill/>
+        </p:spPr>
+        <p:txBody>
+          <a:bodyPr wrap="square" lIns="0" tIns="0" rIns="0" bIns="0" rtlCol="0" anchor="t"/>
+          <a:lstStyle/>
+          <a:p>
+            <a:pPr algn="l"/>
+            <a:r>
+              <a:rPr lang="en-US" sz="1350" b="1" dirty="0">
+                <a:solidFill>
+                  <a:srgbClr val="067A68"/>
+                </a:solidFill>
+              </a:rPr>
+              <a:t>HR@10</a:t>
+            </a:r>
+          </a:p>
+        </p:txBody>
+      </p:sp>
+      <p:sp>
+        <p:nvSpPr>
+          <p:cNvPr id="631" name="t631"/>
+          <p:cNvSpPr/>
+          <p:nvPr/>
+        </p:nvSpPr>
+        <p:spPr>
+          <a:xfrm>
+            <a:off x="8128000" y="5918200"/>
+            <a:ext cx="3098800" cy="177800"/>
+          </a:xfrm>
+          <a:prstGeom prst="rect">
+            <a:avLst/>
+          </a:prstGeom>
+          <a:noFill/>
+        </p:spPr>
+        <p:txBody>
+          <a:bodyPr wrap="square" lIns="0" tIns="0" rIns="0" bIns="0" rtlCol="0" anchor="t"/>
+          <a:lstStyle/>
+          <a:p>
+            <a:pPr algn="l"/>
+            <a:r>
+              <a:rPr lang="en-US" sz="1000" i="1" dirty="0">
+                <a:solidFill>
+                  <a:srgbClr val="6E6A7C"/>
+                </a:solidFill>
+              </a:rPr>
+              <a:t>reported mean ± std</a:t>
+            </a:r>
           </a:p>
         </p:txBody>
       </p:sp>
     </p:spTree>
     <p:extLst>
       <p:ext uri="{BB962C8B-B14F-4D97-AF65-F5344CB8AC3E}">
-        <p14:creationId xmlns:p14="http://schemas.microsoft.com/office/powerpoint/2010/main" val="3301606274"/>
+        <p14:creationId xmlns:p14="http://schemas.microsoft.com/office/powerpoint/2010/main" val="131938736"/>
+      </p:ext>
+    </p:extLst>
+  </p:cSld>
+  <p:clrMapOvr>
+    <a:masterClrMapping/>
+  </p:clrMapOvr>
+</p:sld>
+</file>
+
+<file path=ppt/slides/slide18.xml><?xml version="1.0" encoding="utf-8"?>
+<p:sld xmlns:a="http://schemas.openxmlformats.org/drawingml/2006/main" xmlns:r="http://schemas.openxmlformats.org/officeDocument/2006/relationships" xmlns:p="http://schemas.openxmlformats.org/presentationml/2006/main">
+  <p:cSld>
+    <p:spTree>
+      <p:nvGrpSpPr>
+        <p:cNvPr id="1" name=""/>
+        <p:cNvGrpSpPr/>
+        <p:nvPr/>
+      </p:nvGrpSpPr>
+      <p:grpSpPr>
+        <a:xfrm>
+          <a:off x="0" y="0"/>
+          <a:ext cx="0" cy="0"/>
+          <a:chOff x="0" y="0"/>
+          <a:chExt cx="0" cy="0"/>
+        </a:xfrm>
+      </p:grpSpPr>
+      <p:sp>
+        <p:nvSpPr>
+          <p:cNvPr id="2" name="Title 1">
+            <a:extLst>
+              <a:ext uri="{FF2B5EF4-FFF2-40B4-BE49-F238E27FC236}">
+                <a16:creationId xmlns:a16="http://schemas.microsoft.com/office/drawing/2014/main" id="{C5DB16FC-00FC-4B83-9020-408CA83120F5}"/>
+              </a:ext>
+            </a:extLst>
+          </p:cNvPr>
+          <p:cNvSpPr>
+            <a:spLocks noGrp="1"/>
+          </p:cNvSpPr>
+          <p:nvPr>
+            <p:ph type="title"/>
+          </p:nvPr>
+        </p:nvSpPr>
+        <p:spPr/>
+        <p:txBody>
+          <a:bodyPr/>
+          <a:lstStyle/>
+          <a:p>
+            <a:pPr>
+              <a:buNone/>
+            </a:pPr>
+            <a:r>
+              <a:rPr lang="en-US" sz="2000" b="1" dirty="0">
+                <a:solidFill>
+                  <a:srgbClr val="00C2A8"/>
+                </a:solidFill>
+              </a:rPr>
+              <a:t>→ TO THE NOTEBOOK</a:t>
+            </a:r>
+          </a:p>
+          <a:p>
+            <a:pPr>
+              <a:buNone/>
+            </a:pPr>
+            <a:r>
+              <a:rPr lang="en-US" dirty="0"/>
+              <a:t>EMCDR results</a:t>
+            </a:r>
+          </a:p>
+        </p:txBody>
+      </p:sp>
+      <p:sp>
+        <p:nvSpPr>
+          <p:cNvPr id="5" name="Text Placeholder 4">
+            <a:extLst>
+              <a:ext uri="{FF2B5EF4-FFF2-40B4-BE49-F238E27FC236}">
+                <a16:creationId xmlns:a16="http://schemas.microsoft.com/office/drawing/2014/main" id="{9396D725-CAAE-47E9-6093-C00E4D439337}"/>
+              </a:ext>
+            </a:extLst>
+          </p:cNvPr>
+          <p:cNvSpPr>
+            <a:spLocks noGrp="1"/>
+          </p:cNvSpPr>
+          <p:nvPr>
+            <p:ph type="body" idx="1"/>
+          </p:nvPr>
+        </p:nvSpPr>
+        <p:spPr/>
+        <p:txBody>
+          <a:bodyPr/>
+          <a:lstStyle/>
+          <a:p>
+            <a:endParaRPr lang="en-IL" dirty="0"/>
+          </a:p>
+        </p:txBody>
+      </p:sp>
+    </p:spTree>
+    <p:extLst>
+      <p:ext uri="{BB962C8B-B14F-4D97-AF65-F5344CB8AC3E}">
+        <p14:creationId xmlns:p14="http://schemas.microsoft.com/office/powerpoint/2010/main" val="321133493"/>
+      </p:ext>
+    </p:extLst>
+  </p:cSld>
+  <p:clrMapOvr>
+    <a:masterClrMapping/>
+  </p:clrMapOvr>
+</p:sld>
+</file>
+
+<file path=ppt/slides/slide19.xml><?xml version="1.0" encoding="utf-8"?>
+<p:sld xmlns:a="http://schemas.openxmlformats.org/drawingml/2006/main" xmlns:r="http://schemas.openxmlformats.org/officeDocument/2006/relationships" xmlns:p="http://schemas.openxmlformats.org/presentationml/2006/main">
+  <p:cSld>
+    <p:spTree>
+      <p:nvGrpSpPr>
+        <p:cNvPr id="1" name=""/>
+        <p:cNvGrpSpPr/>
+        <p:nvPr/>
+      </p:nvGrpSpPr>
+      <p:grpSpPr>
+        <a:xfrm>
+          <a:off x="0" y="0"/>
+          <a:ext cx="0" cy="0"/>
+          <a:chOff x="0" y="0"/>
+          <a:chExt cx="0" cy="0"/>
+        </a:xfrm>
+      </p:grpSpPr>
+      <p:sp>
+        <p:nvSpPr>
+          <p:cNvPr id="2" name="Title 1">
+            <a:extLst>
+              <a:ext uri="{FF2B5EF4-FFF2-40B4-BE49-F238E27FC236}">
+                <a16:creationId xmlns:a16="http://schemas.microsoft.com/office/drawing/2014/main" id="{FA1861AF-22E0-DD96-16A1-81362CC1A35C}"/>
+              </a:ext>
+            </a:extLst>
+          </p:cNvPr>
+          <p:cNvSpPr>
+            <a:spLocks noGrp="1"/>
+          </p:cNvSpPr>
+          <p:nvPr>
+            <p:ph type="title"/>
+          </p:nvPr>
+        </p:nvSpPr>
+        <p:spPr/>
+        <p:txBody>
+          <a:bodyPr>
+            <a:normAutofit fontScale="90000"/>
+          </a:bodyPr>
+          <a:lstStyle/>
+          <a:p>
+            <a:pPr>
+              <a:buNone/>
+            </a:pPr>
+            <a:r>
+              <a:rPr lang="en-US" sz="2000" b="1" dirty="0">
+                <a:solidFill>
+                  <a:srgbClr val="6C3BFF"/>
+                </a:solidFill>
+              </a:rPr>
+              <a:t>THE FINISHED PRODUCT</a:t>
+            </a:r>
+          </a:p>
+          <a:p>
+            <a:pPr>
+              <a:buNone/>
+            </a:pPr>
+            <a:r>
+              <a:rPr lang="en-US" dirty="0"/>
+              <a:t>One system that routes each pair to its strongest signal</a:t>
+            </a:r>
+          </a:p>
+        </p:txBody>
+      </p:sp>
+      <p:sp>
+        <p:nvSpPr>
+          <p:cNvPr id="600" name="intro"/>
+          <p:cNvSpPr/>
+          <p:nvPr/>
+        </p:nvSpPr>
+        <p:spPr>
+          <a:xfrm>
+            <a:off x="762000" y="1879600"/>
+            <a:ext cx="10668000" cy="508000"/>
+          </a:xfrm>
+          <a:prstGeom prst="rect">
+            <a:avLst/>
+          </a:prstGeom>
+          <a:noFill/>
+          <a:ln>
+            <a:noFill/>
+          </a:ln>
+        </p:spPr>
+        <p:txBody>
+          <a:bodyPr wrap="square" lIns="91440" tIns="45720" rIns="91440" bIns="45720" anchor="t">
+            <a:normAutofit/>
+          </a:bodyPr>
+          <a:lstStyle/>
+          <a:p>
+            <a:pPr algn="l">
+              <a:buNone/>
+            </a:pPr>
+            <a:r>
+              <a:rPr lang="en-US" sz="1400" b="0" i="0" dirty="0">
+                <a:solidFill>
+                  <a:srgbClr val="2A2540"/>
+                </a:solidFill>
+              </a:rPr>
+              <a:t>No single model wins everywhere — so we route each pair to its strongest signal.</a:t>
+            </a:r>
+          </a:p>
+        </p:txBody>
+      </p:sp>
+      <p:sp>
+        <p:nvSpPr>
+          <p:cNvPr id="602" name="node"/>
+          <p:cNvSpPr/>
+          <p:nvPr/>
+        </p:nvSpPr>
+        <p:spPr>
+          <a:xfrm>
+            <a:off x="4191000" y="2489200"/>
+            <a:ext cx="3810000" cy="711200"/>
+          </a:xfrm>
+          <a:prstGeom prst="roundRect">
+            <a:avLst>
+              <a:gd name="adj" fmla="val 14000"/>
+            </a:avLst>
+          </a:prstGeom>
+          <a:solidFill>
+            <a:srgbClr val="6C3BFF"/>
+          </a:solidFill>
+          <a:ln>
+            <a:noFill/>
+          </a:ln>
+        </p:spPr>
+        <p:txBody>
+          <a:bodyPr wrap="square" lIns="91440" tIns="45720" rIns="91440" bIns="45720" anchor="ctr">
+            <a:normAutofit/>
+          </a:bodyPr>
+          <a:lstStyle/>
+          <a:p>
+            <a:pPr algn="ctr">
+              <a:buNone/>
+            </a:pPr>
+            <a:r>
+              <a:rPr lang="en-US" sz="1400" b="1" i="0" dirty="0">
+                <a:solidFill>
+                  <a:srgbClr val="FFFFFF"/>
+                </a:solidFill>
+              </a:rPr>
+              <a:t>Is the transfer signal strong enough to trust?</a:t>
+            </a:r>
+          </a:p>
+        </p:txBody>
+      </p:sp>
+      <p:sp>
+        <p:nvSpPr>
+          <p:cNvPr id="630" name="stem"/>
+          <p:cNvSpPr/>
+          <p:nvPr/>
+        </p:nvSpPr>
+        <p:spPr>
+          <a:xfrm>
+            <a:off x="6070600" y="3200400"/>
+            <a:ext cx="50800" cy="431800"/>
+          </a:xfrm>
+          <a:prstGeom prst="rect">
+            <a:avLst/>
+          </a:prstGeom>
+          <a:solidFill>
+            <a:srgbClr val="6C3BFF"/>
+          </a:solidFill>
+          <a:ln>
+            <a:noFill/>
+          </a:ln>
+        </p:spPr>
+        <p:txBody>
+          <a:bodyPr anchor="t"/>
+          <a:lstStyle/>
+          <a:p>
+            <a:endParaRPr lang="en-US"/>
+          </a:p>
+        </p:txBody>
+      </p:sp>
+      <p:sp>
+        <p:nvSpPr>
+          <p:cNvPr id="631" name="hbar"/>
+          <p:cNvSpPr/>
+          <p:nvPr/>
+        </p:nvSpPr>
+        <p:spPr>
+          <a:xfrm>
+            <a:off x="3175000" y="3632200"/>
+            <a:ext cx="5867400" cy="50800"/>
+          </a:xfrm>
+          <a:prstGeom prst="rect">
+            <a:avLst/>
+          </a:prstGeom>
+          <a:solidFill>
+            <a:srgbClr val="6C3BFF"/>
+          </a:solidFill>
+          <a:ln>
+            <a:noFill/>
+          </a:ln>
+        </p:spPr>
+        <p:txBody>
+          <a:bodyPr anchor="t"/>
+          <a:lstStyle/>
+          <a:p>
+            <a:endParaRPr lang="en-US"/>
+          </a:p>
+        </p:txBody>
+      </p:sp>
+      <p:sp>
+        <p:nvSpPr>
+          <p:cNvPr id="632" name="dropL"/>
+          <p:cNvSpPr/>
+          <p:nvPr/>
+        </p:nvSpPr>
+        <p:spPr>
+          <a:xfrm>
+            <a:off x="3149600" y="3632200"/>
+            <a:ext cx="50800" cy="558800"/>
+          </a:xfrm>
+          <a:prstGeom prst="rect">
+            <a:avLst/>
+          </a:prstGeom>
+          <a:solidFill>
+            <a:srgbClr val="6C3BFF"/>
+          </a:solidFill>
+          <a:ln>
+            <a:noFill/>
+          </a:ln>
+        </p:spPr>
+        <p:txBody>
+          <a:bodyPr anchor="t"/>
+          <a:lstStyle/>
+          <a:p>
+            <a:endParaRPr lang="en-US"/>
+          </a:p>
+        </p:txBody>
+      </p:sp>
+      <p:sp>
+        <p:nvSpPr>
+          <p:cNvPr id="633" name="dropR"/>
+          <p:cNvSpPr/>
+          <p:nvPr/>
+        </p:nvSpPr>
+        <p:spPr>
+          <a:xfrm>
+            <a:off x="8991600" y="3632200"/>
+            <a:ext cx="50800" cy="558800"/>
+          </a:xfrm>
+          <a:prstGeom prst="rect">
+            <a:avLst/>
+          </a:prstGeom>
+          <a:solidFill>
+            <a:srgbClr val="00C2A8"/>
+          </a:solidFill>
+          <a:ln>
+            <a:noFill/>
+          </a:ln>
+        </p:spPr>
+        <p:txBody>
+          <a:bodyPr anchor="t"/>
+          <a:lstStyle/>
+          <a:p>
+            <a:endParaRPr lang="en-US"/>
+          </a:p>
+        </p:txBody>
+      </p:sp>
+      <p:sp>
+        <p:nvSpPr>
+          <p:cNvPr id="604" name="labL"/>
+          <p:cNvSpPr/>
+          <p:nvPr/>
+        </p:nvSpPr>
+        <p:spPr>
+          <a:xfrm>
+            <a:off x="1143000" y="3759200"/>
+            <a:ext cx="4064000" cy="304800"/>
+          </a:xfrm>
+          <a:prstGeom prst="rect">
+            <a:avLst/>
+          </a:prstGeom>
+          <a:noFill/>
+          <a:ln>
+            <a:noFill/>
+          </a:ln>
+        </p:spPr>
+        <p:txBody>
+          <a:bodyPr wrap="square" lIns="91440" tIns="45720" rIns="91440" bIns="45720" anchor="t">
+            <a:normAutofit/>
+          </a:bodyPr>
+          <a:lstStyle/>
+          <a:p>
+            <a:pPr algn="ctr">
+              <a:buNone/>
+            </a:pPr>
+            <a:r>
+              <a:rPr lang="en-US" sz="1150" b="1" i="0" dirty="0">
+                <a:solidFill>
+                  <a:srgbClr val="6C3BFF"/>
+                </a:solidFill>
+              </a:rPr>
+              <a:t>YES · RICH pairs</a:t>
+            </a:r>
+            <a:r>
+              <a:rPr lang="en-US" sz="1150" b="0" i="0" dirty="0">
+                <a:solidFill>
+                  <a:srgbClr val="6E6A7C"/>
+                </a:solidFill>
+              </a:rPr>
+              <a:t>                 ≥20k overlap (5 pairs)</a:t>
+            </a:r>
+          </a:p>
+        </p:txBody>
+      </p:sp>
+      <p:sp>
+        <p:nvSpPr>
+          <p:cNvPr id="605" name="labR"/>
+          <p:cNvSpPr/>
+          <p:nvPr/>
+        </p:nvSpPr>
+        <p:spPr>
+          <a:xfrm>
+            <a:off x="6985000" y="3759200"/>
+            <a:ext cx="4064000" cy="304800"/>
+          </a:xfrm>
+          <a:prstGeom prst="rect">
+            <a:avLst/>
+          </a:prstGeom>
+          <a:noFill/>
+          <a:ln>
+            <a:noFill/>
+          </a:ln>
+        </p:spPr>
+        <p:txBody>
+          <a:bodyPr wrap="square" lIns="91440" tIns="45720" rIns="91440" bIns="45720" anchor="t">
+            <a:normAutofit/>
+          </a:bodyPr>
+          <a:lstStyle/>
+          <a:p>
+            <a:pPr algn="ctr">
+              <a:buNone/>
+            </a:pPr>
+            <a:r>
+              <a:rPr lang="en-US" sz="1150" b="1" i="0" dirty="0">
+                <a:solidFill>
+                  <a:srgbClr val="00C2A8"/>
+                </a:solidFill>
+              </a:rPr>
+              <a:t>NO · SPARSE target</a:t>
+            </a:r>
+            <a:r>
+              <a:rPr lang="en-US" sz="1150" b="0" i="0" dirty="0">
+                <a:solidFill>
+                  <a:srgbClr val="6E6A7C"/>
+                </a:solidFill>
+              </a:rPr>
+              <a:t>              Video-Games (3 pairs)</a:t>
+            </a:r>
+          </a:p>
+        </p:txBody>
+      </p:sp>
+      <p:sp>
+        <p:nvSpPr>
+          <p:cNvPr id="608" name="cardL"/>
+          <p:cNvSpPr/>
+          <p:nvPr/>
+        </p:nvSpPr>
+        <p:spPr>
+          <a:xfrm>
+            <a:off x="1143000" y="4241800"/>
+            <a:ext cx="4064000" cy="2184400"/>
+          </a:xfrm>
+          <a:prstGeom prst="roundRect">
+            <a:avLst>
+              <a:gd name="adj" fmla="val 6000"/>
+            </a:avLst>
+          </a:prstGeom>
+          <a:solidFill>
+            <a:srgbClr val="EDEAF7"/>
+          </a:solidFill>
+          <a:ln w="19050">
+            <a:solidFill>
+              <a:srgbClr val="6C3BFF"/>
+            </a:solidFill>
+          </a:ln>
+        </p:spPr>
+        <p:txBody>
+          <a:bodyPr anchor="t"/>
+          <a:lstStyle/>
+          <a:p>
+            <a:endParaRPr lang="en-US"/>
+          </a:p>
+        </p:txBody>
+      </p:sp>
+      <p:sp>
+        <p:nvSpPr>
+          <p:cNvPr id="609" name="cardLbar"/>
+          <p:cNvSpPr/>
+          <p:nvPr/>
+        </p:nvSpPr>
+        <p:spPr>
+          <a:xfrm>
+            <a:off x="1143000" y="4241800"/>
+            <a:ext cx="76200" cy="2184400"/>
+          </a:xfrm>
+          <a:prstGeom prst="rect">
+            <a:avLst/>
+          </a:prstGeom>
+          <a:solidFill>
+            <a:srgbClr val="6C3BFF"/>
+          </a:solidFill>
+          <a:ln>
+            <a:noFill/>
+          </a:ln>
+        </p:spPr>
+        <p:txBody>
+          <a:bodyPr anchor="t"/>
+          <a:lstStyle/>
+          <a:p>
+            <a:endParaRPr lang="en-US"/>
+          </a:p>
+        </p:txBody>
+      </p:sp>
+      <p:sp>
+        <p:nvSpPr>
+          <p:cNvPr id="610" name="hL"/>
+          <p:cNvSpPr/>
+          <p:nvPr/>
+        </p:nvSpPr>
+        <p:spPr>
+          <a:xfrm>
+            <a:off x="1422400" y="4419600"/>
+            <a:ext cx="3556000" cy="355600"/>
+          </a:xfrm>
+          <a:prstGeom prst="rect">
+            <a:avLst/>
+          </a:prstGeom>
+          <a:noFill/>
+          <a:ln>
+            <a:noFill/>
+          </a:ln>
+        </p:spPr>
+        <p:txBody>
+          <a:bodyPr wrap="square" lIns="91440" tIns="45720" rIns="91440" bIns="45720" anchor="t">
+            <a:normAutofit/>
+          </a:bodyPr>
+          <a:lstStyle/>
+          <a:p>
+            <a:pPr algn="l">
+              <a:buNone/>
+            </a:pPr>
+            <a:r>
+              <a:rPr lang="en-US" sz="1600" b="1" i="0" dirty="0">
+                <a:solidFill>
+                  <a:srgbClr val="12101A"/>
+                </a:solidFill>
+              </a:rPr>
+              <a:t>Serve EMCDR directly</a:t>
+            </a:r>
+          </a:p>
+        </p:txBody>
+      </p:sp>
+      <p:sp>
+        <p:nvSpPr>
+          <p:cNvPr id="611" name="bL"/>
+          <p:cNvSpPr/>
+          <p:nvPr/>
+        </p:nvSpPr>
+        <p:spPr>
+          <a:xfrm>
+            <a:off x="1422400" y="4876800"/>
+            <a:ext cx="3556000" cy="1397000"/>
+          </a:xfrm>
+          <a:prstGeom prst="rect">
+            <a:avLst/>
+          </a:prstGeom>
+          <a:noFill/>
+          <a:ln>
+            <a:noFill/>
+          </a:ln>
+        </p:spPr>
+        <p:txBody>
+          <a:bodyPr wrap="square" lIns="91440" tIns="45720" rIns="91440" bIns="45720" anchor="t">
+            <a:normAutofit/>
+          </a:bodyPr>
+          <a:lstStyle/>
+          <a:p>
+            <a:pPr algn="l">
+              <a:buNone/>
+            </a:pPr>
+            <a:r>
+              <a:rPr lang="en-US" sz="1300" b="0" i="0" dirty="0">
+                <a:solidFill>
+                  <a:srgbClr val="2A2540"/>
+                </a:solidFill>
+              </a:rPr>
+              <a:t>Enough overlap to supervise the mapping — EMCDR is the outright best model and beats every baseline. Best on 5 of 8 pairs.</a:t>
+            </a:r>
+          </a:p>
+        </p:txBody>
+      </p:sp>
+      <p:sp>
+        <p:nvSpPr>
+          <p:cNvPr id="612" name="cardR"/>
+          <p:cNvSpPr/>
+          <p:nvPr/>
+        </p:nvSpPr>
+        <p:spPr>
+          <a:xfrm>
+            <a:off x="6985000" y="4241800"/>
+            <a:ext cx="4064000" cy="2184400"/>
+          </a:xfrm>
+          <a:prstGeom prst="roundRect">
+            <a:avLst>
+              <a:gd name="adj" fmla="val 6000"/>
+            </a:avLst>
+          </a:prstGeom>
+          <a:solidFill>
+            <a:srgbClr val="EDEAF7"/>
+          </a:solidFill>
+          <a:ln w="19050">
+            <a:solidFill>
+              <a:srgbClr val="00C2A8"/>
+            </a:solidFill>
+          </a:ln>
+        </p:spPr>
+        <p:txBody>
+          <a:bodyPr anchor="t"/>
+          <a:lstStyle/>
+          <a:p>
+            <a:endParaRPr lang="en-US"/>
+          </a:p>
+        </p:txBody>
+      </p:sp>
+      <p:sp>
+        <p:nvSpPr>
+          <p:cNvPr id="613" name="cardRbar"/>
+          <p:cNvSpPr/>
+          <p:nvPr/>
+        </p:nvSpPr>
+        <p:spPr>
+          <a:xfrm>
+            <a:off x="6985000" y="4241800"/>
+            <a:ext cx="76200" cy="2184400"/>
+          </a:xfrm>
+          <a:prstGeom prst="rect">
+            <a:avLst/>
+          </a:prstGeom>
+          <a:solidFill>
+            <a:srgbClr val="00C2A8"/>
+          </a:solidFill>
+          <a:ln>
+            <a:noFill/>
+          </a:ln>
+        </p:spPr>
+        <p:txBody>
+          <a:bodyPr anchor="t"/>
+          <a:lstStyle/>
+          <a:p>
+            <a:endParaRPr lang="en-US"/>
+          </a:p>
+        </p:txBody>
+      </p:sp>
+      <p:sp>
+        <p:nvSpPr>
+          <p:cNvPr id="614" name="hR"/>
+          <p:cNvSpPr/>
+          <p:nvPr/>
+        </p:nvSpPr>
+        <p:spPr>
+          <a:xfrm>
+            <a:off x="7264400" y="4419600"/>
+            <a:ext cx="3556000" cy="355600"/>
+          </a:xfrm>
+          <a:prstGeom prst="rect">
+            <a:avLst/>
+          </a:prstGeom>
+          <a:noFill/>
+          <a:ln>
+            <a:noFill/>
+          </a:ln>
+        </p:spPr>
+        <p:txBody>
+          <a:bodyPr wrap="square" lIns="91440" tIns="45720" rIns="91440" bIns="45720" anchor="t">
+            <a:normAutofit/>
+          </a:bodyPr>
+          <a:lstStyle/>
+          <a:p>
+            <a:pPr algn="l">
+              <a:buNone/>
+            </a:pPr>
+            <a:r>
+              <a:rPr lang="en-US" sz="1600" b="1" i="0" dirty="0">
+                <a:solidFill>
+                  <a:srgbClr val="12101A"/>
+                </a:solidFill>
+              </a:rPr>
+              <a:t>Serve content transfer</a:t>
+            </a:r>
+          </a:p>
+        </p:txBody>
+      </p:sp>
+      <p:sp>
+        <p:nvSpPr>
+          <p:cNvPr id="615" name="bR"/>
+          <p:cNvSpPr/>
+          <p:nvPr/>
+        </p:nvSpPr>
+        <p:spPr>
+          <a:xfrm>
+            <a:off x="7264400" y="4876800"/>
+            <a:ext cx="3556000" cy="1397000"/>
+          </a:xfrm>
+          <a:prstGeom prst="rect">
+            <a:avLst/>
+          </a:prstGeom>
+          <a:noFill/>
+          <a:ln>
+            <a:noFill/>
+          </a:ln>
+        </p:spPr>
+        <p:txBody>
+          <a:bodyPr wrap="square" lIns="91440" tIns="45720" rIns="91440" bIns="45720" anchor="t">
+            <a:normAutofit/>
+          </a:bodyPr>
+          <a:lstStyle/>
+          <a:p>
+            <a:pPr algn="l">
+              <a:buNone/>
+            </a:pPr>
+            <a:r>
+              <a:rPr lang="en-US" sz="1300" b="0" i="0" dirty="0">
+                <a:solidFill>
+                  <a:srgbClr val="2A2540"/>
+                </a:solidFill>
+              </a:rPr>
+              <a:t>Too little overlap and too few repeat purchases to learn item IDs — shared MiniLM text is the only reliable bridge. Best sparse result (0.36 on Toys→VG); still beats MostPop.</a:t>
+            </a:r>
+          </a:p>
+        </p:txBody>
+      </p:sp>
+    </p:spTree>
+    <p:extLst>
+      <p:ext uri="{BB962C8B-B14F-4D97-AF65-F5344CB8AC3E}">
+        <p14:creationId xmlns:p14="http://schemas.microsoft.com/office/powerpoint/2010/main" val="3892150061"/>
       </p:ext>
     </p:extLst>
   </p:cSld>
@@ -8308,6 +9509,101 @@
     <p:extLst>
       <p:ext uri="{BB962C8B-B14F-4D97-AF65-F5344CB8AC3E}">
         <p14:creationId xmlns:p14="http://schemas.microsoft.com/office/powerpoint/2010/main" val="784544738"/>
+      </p:ext>
+    </p:extLst>
+  </p:cSld>
+  <p:clrMapOvr>
+    <a:masterClrMapping/>
+  </p:clrMapOvr>
+</p:sld>
+</file>
+
+<file path=ppt/slides/slide20.xml><?xml version="1.0" encoding="utf-8"?>
+<p:sld xmlns:a="http://schemas.openxmlformats.org/drawingml/2006/main" xmlns:r="http://schemas.openxmlformats.org/officeDocument/2006/relationships" xmlns:p="http://schemas.openxmlformats.org/presentationml/2006/main">
+  <p:cSld>
+    <p:spTree>
+      <p:nvGrpSpPr>
+        <p:cNvPr id="1" name=""/>
+        <p:cNvGrpSpPr/>
+        <p:nvPr/>
+      </p:nvGrpSpPr>
+      <p:grpSpPr>
+        <a:xfrm>
+          <a:off x="0" y="0"/>
+          <a:ext cx="0" cy="0"/>
+          <a:chOff x="0" y="0"/>
+          <a:chExt cx="0" cy="0"/>
+        </a:xfrm>
+      </p:grpSpPr>
+      <p:sp>
+        <p:nvSpPr>
+          <p:cNvPr id="2" name="Title 1">
+            <a:extLst>
+              <a:ext uri="{FF2B5EF4-FFF2-40B4-BE49-F238E27FC236}">
+                <a16:creationId xmlns:a16="http://schemas.microsoft.com/office/drawing/2014/main" id="{4431A0C4-E8FA-5735-A41A-47F97B7749E3}"/>
+              </a:ext>
+            </a:extLst>
+          </p:cNvPr>
+          <p:cNvSpPr>
+            <a:spLocks noGrp="1"/>
+          </p:cNvSpPr>
+          <p:nvPr>
+            <p:ph type="ctrTitle"/>
+          </p:nvPr>
+        </p:nvSpPr>
+        <p:spPr/>
+        <p:txBody>
+          <a:bodyPr/>
+          <a:lstStyle/>
+          <a:p>
+            <a:pPr algn="l"/>
+            <a:r>
+              <a:rPr lang="en-US" sz="5400" b="1" dirty="0"/>
+              <a:t>Thank you</a:t>
+            </a:r>
+          </a:p>
+          <a:p>
+            <a:pPr algn="l"/>
+            <a:r>
+              <a:rPr lang="en-US" sz="5400" b="1" dirty="0">
+                <a:solidFill>
+                  <a:schemeClr val="accent1"/>
+                </a:solidFill>
+              </a:rPr>
+              <a:t>Questions?</a:t>
+            </a:r>
+          </a:p>
+        </p:txBody>
+      </p:sp>
+      <p:sp>
+        <p:nvSpPr>
+          <p:cNvPr id="5" name="Subtitle 4">
+            <a:extLst>
+              <a:ext uri="{FF2B5EF4-FFF2-40B4-BE49-F238E27FC236}">
+                <a16:creationId xmlns:a16="http://schemas.microsoft.com/office/drawing/2014/main" id="{6DDAA963-94B2-665F-FAF4-A96A54423636}"/>
+              </a:ext>
+            </a:extLst>
+          </p:cNvPr>
+          <p:cNvSpPr>
+            <a:spLocks noGrp="1"/>
+          </p:cNvSpPr>
+          <p:nvPr>
+            <p:ph type="subTitle" idx="1"/>
+          </p:nvPr>
+        </p:nvSpPr>
+        <p:spPr/>
+        <p:txBody>
+          <a:bodyPr/>
+          <a:lstStyle/>
+          <a:p>
+            <a:endParaRPr lang="en-IL" dirty="0"/>
+          </a:p>
+        </p:txBody>
+      </p:sp>
+    </p:spTree>
+    <p:extLst>
+      <p:ext uri="{BB962C8B-B14F-4D97-AF65-F5344CB8AC3E}">
+        <p14:creationId xmlns:p14="http://schemas.microsoft.com/office/powerpoint/2010/main" val="3301606274"/>
       </p:ext>
     </p:extLst>
   </p:cSld>
@@ -11684,7 +12980,7 @@
                   <a:srgbClr val="6C3BFF"/>
                 </a:solidFill>
               </a:rPr>
-              <a:t>02</a:t>
+              <a:t>BENCHMARKING</a:t>
             </a:r>
           </a:p>
           <a:p>
@@ -11693,7 +12989,7 @@
             </a:pPr>
             <a:r>
               <a:rPr lang="en-US" dirty="0"/>
-              <a:t>Model &amp; Results</a:t>
+              <a:t>SOTA &amp; paper comparison</a:t>
             </a:r>
           </a:p>
         </p:txBody>
@@ -11728,7 +13024,7 @@
                   <a:schemeClr val="tx2"/>
                 </a:solidFill>
               </a:rPr>
-              <a:t>The EMCDR shared latent space, the baselines it beats, and where it still falls short.</a:t>
+              <a:t>How our EMCDR results stack up against comparable cross-domain work — and the baselines we benchmark it against.</a:t>
             </a:r>
           </a:p>
         </p:txBody>
@@ -11736,7 +13032,7 @@
     </p:spTree>
     <p:extLst>
       <p:ext uri="{BB962C8B-B14F-4D97-AF65-F5344CB8AC3E}">
-        <p14:creationId xmlns:p14="http://schemas.microsoft.com/office/powerpoint/2010/main" val="4108708542"/>
+        <p14:creationId xmlns:p14="http://schemas.microsoft.com/office/powerpoint/2010/main" val="4157806483"/>
       </p:ext>
     </p:extLst>
   </p:cSld>
